--- a/e017770n_placeholder_presatation.pptx
+++ b/e017770n_placeholder_presatation.pptx
@@ -4,6 +4,9 @@
   <p:sldMasterIdLst>
     <p:sldMasterId id="2147483694" r:id="rId1"/>
   </p:sldMasterIdLst>
+  <p:notesMasterIdLst>
+    <p:notesMasterId r:id="rId12"/>
+  </p:notesMasterIdLst>
   <p:sldIdLst>
     <p:sldId id="256" r:id="rId2"/>
     <p:sldId id="257" r:id="rId3"/>
@@ -113,7 +116,445 @@
       </a:defRPr>
     </a:lvl9pPr>
   </p:defaultTextStyle>
+  <p:extLst>
+    <p:ext uri="{EFAFB233-063F-42B5-8137-9DF3F51BA10A}">
+      <p15:sldGuideLst xmlns:p15="http://schemas.microsoft.com/office/powerpoint/2012/main"/>
+    </p:ext>
+  </p:extLst>
 </p:presentation>
+</file>
+
+<file path=ppt/notesMasters/notesMaster1.xml><?xml version="1.0" encoding="utf-8"?>
+<p:notesMaster xmlns:a="http://schemas.openxmlformats.org/drawingml/2006/main" xmlns:r="http://schemas.openxmlformats.org/officeDocument/2006/relationships" xmlns:p="http://schemas.openxmlformats.org/presentationml/2006/main">
+  <p:cSld>
+    <p:bg>
+      <p:bgRef idx="1001">
+        <a:schemeClr val="bg1"/>
+      </p:bgRef>
+    </p:bg>
+    <p:spTree>
+      <p:nvGrpSpPr>
+        <p:cNvPr id="1" name=""/>
+        <p:cNvGrpSpPr/>
+        <p:nvPr/>
+      </p:nvGrpSpPr>
+      <p:grpSpPr>
+        <a:xfrm>
+          <a:off x="0" y="0"/>
+          <a:ext cx="0" cy="0"/>
+          <a:chOff x="0" y="0"/>
+          <a:chExt cx="0" cy="0"/>
+        </a:xfrm>
+      </p:grpSpPr>
+      <p:sp>
+        <p:nvSpPr>
+          <p:cNvPr id="2" name="Header Placeholder 1"/>
+          <p:cNvSpPr>
+            <a:spLocks noGrp="1"/>
+          </p:cNvSpPr>
+          <p:nvPr>
+            <p:ph type="hdr" sz="quarter"/>
+          </p:nvPr>
+        </p:nvSpPr>
+        <p:spPr>
+          <a:xfrm>
+            <a:off x="0" y="0"/>
+            <a:ext cx="2971800" cy="458788"/>
+          </a:xfrm>
+          <a:prstGeom prst="rect">
+            <a:avLst/>
+          </a:prstGeom>
+        </p:spPr>
+        <p:txBody>
+          <a:bodyPr vert="horz" lIns="91440" tIns="45720" rIns="91440" bIns="45720" rtlCol="0"/>
+          <a:lstStyle>
+            <a:lvl1pPr algn="l">
+              <a:defRPr sz="1200"/>
+            </a:lvl1pPr>
+          </a:lstStyle>
+          <a:p>
+            <a:endParaRPr lang="en-GB"/>
+          </a:p>
+        </p:txBody>
+      </p:sp>
+      <p:sp>
+        <p:nvSpPr>
+          <p:cNvPr id="3" name="Date Placeholder 2"/>
+          <p:cNvSpPr>
+            <a:spLocks noGrp="1"/>
+          </p:cNvSpPr>
+          <p:nvPr>
+            <p:ph type="dt" idx="1"/>
+          </p:nvPr>
+        </p:nvSpPr>
+        <p:spPr>
+          <a:xfrm>
+            <a:off x="3884613" y="0"/>
+            <a:ext cx="2971800" cy="458788"/>
+          </a:xfrm>
+          <a:prstGeom prst="rect">
+            <a:avLst/>
+          </a:prstGeom>
+        </p:spPr>
+        <p:txBody>
+          <a:bodyPr vert="horz" lIns="91440" tIns="45720" rIns="91440" bIns="45720" rtlCol="0"/>
+          <a:lstStyle>
+            <a:lvl1pPr algn="r">
+              <a:defRPr sz="1200"/>
+            </a:lvl1pPr>
+          </a:lstStyle>
+          <a:p>
+            <a:fld id="{223844D3-2483-4259-8C26-02475C71C866}" type="datetimeFigureOut">
+              <a:rPr lang="en-GB" smtClean="0"/>
+              <a:t>23/04/2026</a:t>
+            </a:fld>
+            <a:endParaRPr lang="en-GB"/>
+          </a:p>
+        </p:txBody>
+      </p:sp>
+      <p:sp>
+        <p:nvSpPr>
+          <p:cNvPr id="4" name="Slide Image Placeholder 3"/>
+          <p:cNvSpPr>
+            <a:spLocks noGrp="1" noRot="1" noChangeAspect="1"/>
+          </p:cNvSpPr>
+          <p:nvPr>
+            <p:ph type="sldImg" idx="2"/>
+          </p:nvPr>
+        </p:nvSpPr>
+        <p:spPr>
+          <a:xfrm>
+            <a:off x="685800" y="1143000"/>
+            <a:ext cx="5486400" cy="3086100"/>
+          </a:xfrm>
+          <a:prstGeom prst="rect">
+            <a:avLst/>
+          </a:prstGeom>
+          <a:noFill/>
+          <a:ln w="12700">
+            <a:solidFill>
+              <a:prstClr val="black"/>
+            </a:solidFill>
+          </a:ln>
+        </p:spPr>
+        <p:txBody>
+          <a:bodyPr vert="horz" lIns="91440" tIns="45720" rIns="91440" bIns="45720" rtlCol="0" anchor="ctr"/>
+          <a:lstStyle/>
+          <a:p>
+            <a:endParaRPr lang="en-GB"/>
+          </a:p>
+        </p:txBody>
+      </p:sp>
+      <p:sp>
+        <p:nvSpPr>
+          <p:cNvPr id="5" name="Notes Placeholder 4"/>
+          <p:cNvSpPr>
+            <a:spLocks noGrp="1"/>
+          </p:cNvSpPr>
+          <p:nvPr>
+            <p:ph type="body" sz="quarter" idx="3"/>
+          </p:nvPr>
+        </p:nvSpPr>
+        <p:spPr>
+          <a:xfrm>
+            <a:off x="685800" y="4400550"/>
+            <a:ext cx="5486400" cy="3600450"/>
+          </a:xfrm>
+          <a:prstGeom prst="rect">
+            <a:avLst/>
+          </a:prstGeom>
+        </p:spPr>
+        <p:txBody>
+          <a:bodyPr vert="horz" lIns="91440" tIns="45720" rIns="91440" bIns="45720" rtlCol="0"/>
+          <a:lstStyle/>
+          <a:p>
+            <a:pPr lvl="0"/>
+            <a:r>
+              <a:rPr lang="en-GB"/>
+              <a:t>Click to edit Master text styles</a:t>
+            </a:r>
+          </a:p>
+          <a:p>
+            <a:pPr lvl="1"/>
+            <a:r>
+              <a:rPr lang="en-GB"/>
+              <a:t>Second level</a:t>
+            </a:r>
+          </a:p>
+          <a:p>
+            <a:pPr lvl="2"/>
+            <a:r>
+              <a:rPr lang="en-GB"/>
+              <a:t>Third level</a:t>
+            </a:r>
+          </a:p>
+          <a:p>
+            <a:pPr lvl="3"/>
+            <a:r>
+              <a:rPr lang="en-GB"/>
+              <a:t>Fourth level</a:t>
+            </a:r>
+          </a:p>
+          <a:p>
+            <a:pPr lvl="4"/>
+            <a:r>
+              <a:rPr lang="en-GB"/>
+              <a:t>Fifth level</a:t>
+            </a:r>
+          </a:p>
+        </p:txBody>
+      </p:sp>
+      <p:sp>
+        <p:nvSpPr>
+          <p:cNvPr id="6" name="Footer Placeholder 5"/>
+          <p:cNvSpPr>
+            <a:spLocks noGrp="1"/>
+          </p:cNvSpPr>
+          <p:nvPr>
+            <p:ph type="ftr" sz="quarter" idx="4"/>
+          </p:nvPr>
+        </p:nvSpPr>
+        <p:spPr>
+          <a:xfrm>
+            <a:off x="0" y="8685213"/>
+            <a:ext cx="2971800" cy="458787"/>
+          </a:xfrm>
+          <a:prstGeom prst="rect">
+            <a:avLst/>
+          </a:prstGeom>
+        </p:spPr>
+        <p:txBody>
+          <a:bodyPr vert="horz" lIns="91440" tIns="45720" rIns="91440" bIns="45720" rtlCol="0" anchor="b"/>
+          <a:lstStyle>
+            <a:lvl1pPr algn="l">
+              <a:defRPr sz="1200"/>
+            </a:lvl1pPr>
+          </a:lstStyle>
+          <a:p>
+            <a:endParaRPr lang="en-GB"/>
+          </a:p>
+        </p:txBody>
+      </p:sp>
+      <p:sp>
+        <p:nvSpPr>
+          <p:cNvPr id="7" name="Slide Number Placeholder 6"/>
+          <p:cNvSpPr>
+            <a:spLocks noGrp="1"/>
+          </p:cNvSpPr>
+          <p:nvPr>
+            <p:ph type="sldNum" sz="quarter" idx="5"/>
+          </p:nvPr>
+        </p:nvSpPr>
+        <p:spPr>
+          <a:xfrm>
+            <a:off x="3884613" y="8685213"/>
+            <a:ext cx="2971800" cy="458787"/>
+          </a:xfrm>
+          <a:prstGeom prst="rect">
+            <a:avLst/>
+          </a:prstGeom>
+        </p:spPr>
+        <p:txBody>
+          <a:bodyPr vert="horz" lIns="91440" tIns="45720" rIns="91440" bIns="45720" rtlCol="0" anchor="b"/>
+          <a:lstStyle>
+            <a:lvl1pPr algn="r">
+              <a:defRPr sz="1200"/>
+            </a:lvl1pPr>
+          </a:lstStyle>
+          <a:p>
+            <a:fld id="{18D3A22E-B055-4303-8C4A-EA8322EBB027}" type="slidenum">
+              <a:rPr lang="en-GB" smtClean="0"/>
+              <a:t>‹#›</a:t>
+            </a:fld>
+            <a:endParaRPr lang="en-GB"/>
+          </a:p>
+        </p:txBody>
+      </p:sp>
+    </p:spTree>
+    <p:extLst>
+      <p:ext uri="{BB962C8B-B14F-4D97-AF65-F5344CB8AC3E}">
+        <p14:creationId xmlns:p14="http://schemas.microsoft.com/office/powerpoint/2010/main" val="3720597524"/>
+      </p:ext>
+    </p:extLst>
+  </p:cSld>
+  <p:clrMap bg1="lt1" tx1="dk1" bg2="lt2" tx2="dk2" accent1="accent1" accent2="accent2" accent3="accent3" accent4="accent4" accent5="accent5" accent6="accent6" hlink="hlink" folHlink="folHlink"/>
+  <p:notesStyle>
+    <a:lvl1pPr marL="0" algn="l" defTabSz="914400" rtl="0" eaLnBrk="1" latinLnBrk="0" hangingPunct="1">
+      <a:defRPr sz="1200" kern="1200">
+        <a:solidFill>
+          <a:schemeClr val="tx1"/>
+        </a:solidFill>
+        <a:latin typeface="+mn-lt"/>
+        <a:ea typeface="+mn-ea"/>
+        <a:cs typeface="+mn-cs"/>
+      </a:defRPr>
+    </a:lvl1pPr>
+    <a:lvl2pPr marL="457200" algn="l" defTabSz="914400" rtl="0" eaLnBrk="1" latinLnBrk="0" hangingPunct="1">
+      <a:defRPr sz="1200" kern="1200">
+        <a:solidFill>
+          <a:schemeClr val="tx1"/>
+        </a:solidFill>
+        <a:latin typeface="+mn-lt"/>
+        <a:ea typeface="+mn-ea"/>
+        <a:cs typeface="+mn-cs"/>
+      </a:defRPr>
+    </a:lvl2pPr>
+    <a:lvl3pPr marL="914400" algn="l" defTabSz="914400" rtl="0" eaLnBrk="1" latinLnBrk="0" hangingPunct="1">
+      <a:defRPr sz="1200" kern="1200">
+        <a:solidFill>
+          <a:schemeClr val="tx1"/>
+        </a:solidFill>
+        <a:latin typeface="+mn-lt"/>
+        <a:ea typeface="+mn-ea"/>
+        <a:cs typeface="+mn-cs"/>
+      </a:defRPr>
+    </a:lvl3pPr>
+    <a:lvl4pPr marL="1371600" algn="l" defTabSz="914400" rtl="0" eaLnBrk="1" latinLnBrk="0" hangingPunct="1">
+      <a:defRPr sz="1200" kern="1200">
+        <a:solidFill>
+          <a:schemeClr val="tx1"/>
+        </a:solidFill>
+        <a:latin typeface="+mn-lt"/>
+        <a:ea typeface="+mn-ea"/>
+        <a:cs typeface="+mn-cs"/>
+      </a:defRPr>
+    </a:lvl4pPr>
+    <a:lvl5pPr marL="1828800" algn="l" defTabSz="914400" rtl="0" eaLnBrk="1" latinLnBrk="0" hangingPunct="1">
+      <a:defRPr sz="1200" kern="1200">
+        <a:solidFill>
+          <a:schemeClr val="tx1"/>
+        </a:solidFill>
+        <a:latin typeface="+mn-lt"/>
+        <a:ea typeface="+mn-ea"/>
+        <a:cs typeface="+mn-cs"/>
+      </a:defRPr>
+    </a:lvl5pPr>
+    <a:lvl6pPr marL="2286000" algn="l" defTabSz="914400" rtl="0" eaLnBrk="1" latinLnBrk="0" hangingPunct="1">
+      <a:defRPr sz="1200" kern="1200">
+        <a:solidFill>
+          <a:schemeClr val="tx1"/>
+        </a:solidFill>
+        <a:latin typeface="+mn-lt"/>
+        <a:ea typeface="+mn-ea"/>
+        <a:cs typeface="+mn-cs"/>
+      </a:defRPr>
+    </a:lvl6pPr>
+    <a:lvl7pPr marL="2743200" algn="l" defTabSz="914400" rtl="0" eaLnBrk="1" latinLnBrk="0" hangingPunct="1">
+      <a:defRPr sz="1200" kern="1200">
+        <a:solidFill>
+          <a:schemeClr val="tx1"/>
+        </a:solidFill>
+        <a:latin typeface="+mn-lt"/>
+        <a:ea typeface="+mn-ea"/>
+        <a:cs typeface="+mn-cs"/>
+      </a:defRPr>
+    </a:lvl7pPr>
+    <a:lvl8pPr marL="3200400" algn="l" defTabSz="914400" rtl="0" eaLnBrk="1" latinLnBrk="0" hangingPunct="1">
+      <a:defRPr sz="1200" kern="1200">
+        <a:solidFill>
+          <a:schemeClr val="tx1"/>
+        </a:solidFill>
+        <a:latin typeface="+mn-lt"/>
+        <a:ea typeface="+mn-ea"/>
+        <a:cs typeface="+mn-cs"/>
+      </a:defRPr>
+    </a:lvl8pPr>
+    <a:lvl9pPr marL="3657600" algn="l" defTabSz="914400" rtl="0" eaLnBrk="1" latinLnBrk="0" hangingPunct="1">
+      <a:defRPr sz="1200" kern="1200">
+        <a:solidFill>
+          <a:schemeClr val="tx1"/>
+        </a:solidFill>
+        <a:latin typeface="+mn-lt"/>
+        <a:ea typeface="+mn-ea"/>
+        <a:cs typeface="+mn-cs"/>
+      </a:defRPr>
+    </a:lvl9pPr>
+  </p:notesStyle>
+</p:notesMaster>
+</file>
+
+<file path=ppt/notesSlides/notesSlide1.xml><?xml version="1.0" encoding="utf-8"?>
+<p:notes xmlns:a="http://schemas.openxmlformats.org/drawingml/2006/main" xmlns:r="http://schemas.openxmlformats.org/officeDocument/2006/relationships" xmlns:p="http://schemas.openxmlformats.org/presentationml/2006/main">
+  <p:cSld>
+    <p:spTree>
+      <p:nvGrpSpPr>
+        <p:cNvPr id="1" name=""/>
+        <p:cNvGrpSpPr/>
+        <p:nvPr/>
+      </p:nvGrpSpPr>
+      <p:grpSpPr>
+        <a:xfrm>
+          <a:off x="0" y="0"/>
+          <a:ext cx="0" cy="0"/>
+          <a:chOff x="0" y="0"/>
+          <a:chExt cx="0" cy="0"/>
+        </a:xfrm>
+      </p:grpSpPr>
+      <p:sp>
+        <p:nvSpPr>
+          <p:cNvPr id="2" name="Slide Image Placeholder 1"/>
+          <p:cNvSpPr>
+            <a:spLocks noGrp="1" noRot="1" noChangeAspect="1"/>
+          </p:cNvSpPr>
+          <p:nvPr>
+            <p:ph type="sldImg"/>
+          </p:nvPr>
+        </p:nvSpPr>
+        <p:spPr/>
+      </p:sp>
+      <p:sp>
+        <p:nvSpPr>
+          <p:cNvPr id="3" name="Notes Placeholder 2"/>
+          <p:cNvSpPr>
+            <a:spLocks noGrp="1"/>
+          </p:cNvSpPr>
+          <p:nvPr>
+            <p:ph type="body" idx="1"/>
+          </p:nvPr>
+        </p:nvSpPr>
+        <p:spPr/>
+        <p:txBody>
+          <a:bodyPr/>
+          <a:lstStyle/>
+          <a:p>
+            <a:endParaRPr lang="en-GB" dirty="0"/>
+          </a:p>
+        </p:txBody>
+      </p:sp>
+      <p:sp>
+        <p:nvSpPr>
+          <p:cNvPr id="4" name="Slide Number Placeholder 3"/>
+          <p:cNvSpPr>
+            <a:spLocks noGrp="1"/>
+          </p:cNvSpPr>
+          <p:nvPr>
+            <p:ph type="sldNum" sz="quarter" idx="5"/>
+          </p:nvPr>
+        </p:nvSpPr>
+        <p:spPr/>
+        <p:txBody>
+          <a:bodyPr/>
+          <a:lstStyle/>
+          <a:p>
+            <a:fld id="{18D3A22E-B055-4303-8C4A-EA8322EBB027}" type="slidenum">
+              <a:rPr lang="en-GB" smtClean="0"/>
+              <a:t>4</a:t>
+            </a:fld>
+            <a:endParaRPr lang="en-GB"/>
+          </a:p>
+        </p:txBody>
+      </p:sp>
+    </p:spTree>
+    <p:extLst>
+      <p:ext uri="{BB962C8B-B14F-4D97-AF65-F5344CB8AC3E}">
+        <p14:creationId xmlns:p14="http://schemas.microsoft.com/office/powerpoint/2010/main" val="559733896"/>
+      </p:ext>
+    </p:extLst>
+  </p:cSld>
+  <p:clrMapOvr>
+    <a:masterClrMapping/>
+  </p:clrMapOvr>
+</p:notes>
 </file>
 
 <file path=ppt/slideLayouts/slideLayout1.xml><?xml version="1.0" encoding="utf-8"?>
@@ -3588,6 +4029,111 @@
       </p:grpSpPr>
       <p:sp>
         <p:nvSpPr>
+          <p:cNvPr id="4" name="Rectangle 3">
+            <a:extLst>
+              <a:ext uri="{FF2B5EF4-FFF2-40B4-BE49-F238E27FC236}">
+                <a16:creationId xmlns:a16="http://schemas.microsoft.com/office/drawing/2014/main" id="{497D4265-723B-1E2F-23E9-D5DBC4B12B5A}"/>
+              </a:ext>
+            </a:extLst>
+          </p:cNvPr>
+          <p:cNvSpPr/>
+          <p:nvPr/>
+        </p:nvSpPr>
+        <p:spPr>
+          <a:xfrm>
+            <a:off x="0" y="0"/>
+            <a:ext cx="12192000" cy="6858000"/>
+          </a:xfrm>
+          <a:prstGeom prst="rect">
+            <a:avLst/>
+          </a:prstGeom>
+          <a:gradFill flip="none" rotWithShape="1">
+            <a:gsLst>
+              <a:gs pos="0">
+                <a:schemeClr val="tx1">
+                  <a:lumMod val="65000"/>
+                  <a:lumOff val="35000"/>
+                  <a:shade val="30000"/>
+                  <a:satMod val="115000"/>
+                </a:schemeClr>
+              </a:gs>
+              <a:gs pos="50000">
+                <a:schemeClr val="tx1">
+                  <a:lumMod val="65000"/>
+                  <a:lumOff val="35000"/>
+                  <a:shade val="67500"/>
+                  <a:satMod val="115000"/>
+                </a:schemeClr>
+              </a:gs>
+              <a:gs pos="100000">
+                <a:schemeClr val="tx1">
+                  <a:lumMod val="65000"/>
+                  <a:lumOff val="35000"/>
+                  <a:shade val="100000"/>
+                  <a:satMod val="115000"/>
+                </a:schemeClr>
+              </a:gs>
+            </a:gsLst>
+            <a:lin ang="5400000" scaled="1"/>
+            <a:tileRect/>
+          </a:gradFill>
+          <a:ln>
+            <a:noFill/>
+          </a:ln>
+        </p:spPr>
+        <p:style>
+          <a:lnRef idx="2">
+            <a:schemeClr val="accent1">
+              <a:shade val="15000"/>
+            </a:schemeClr>
+          </a:lnRef>
+          <a:fillRef idx="1">
+            <a:schemeClr val="accent1"/>
+          </a:fillRef>
+          <a:effectRef idx="0">
+            <a:schemeClr val="accent1"/>
+          </a:effectRef>
+          <a:fontRef idx="minor">
+            <a:schemeClr val="lt1"/>
+          </a:fontRef>
+        </p:style>
+        <p:txBody>
+          <a:bodyPr rtlCol="0" anchor="ctr"/>
+          <a:lstStyle/>
+          <a:p>
+            <a:pPr algn="ctr"/>
+            <a:endParaRPr lang="en-GB">
+              <a:gradFill flip="none" rotWithShape="1">
+                <a:gsLst>
+                  <a:gs pos="0">
+                    <a:schemeClr val="accent4">
+                      <a:lumMod val="40000"/>
+                      <a:lumOff val="60000"/>
+                    </a:schemeClr>
+                  </a:gs>
+                  <a:gs pos="46000">
+                    <a:schemeClr val="accent4">
+                      <a:lumMod val="95000"/>
+                      <a:lumOff val="5000"/>
+                    </a:schemeClr>
+                  </a:gs>
+                  <a:gs pos="100000">
+                    <a:schemeClr val="accent4">
+                      <a:lumMod val="60000"/>
+                    </a:schemeClr>
+                  </a:gs>
+                </a:gsLst>
+                <a:path path="circle">
+                  <a:fillToRect l="50000" t="130000" r="50000" b="-30000"/>
+                </a:path>
+                <a:tileRect/>
+              </a:gradFill>
+            </a:endParaRPr>
+          </a:p>
+        </p:txBody>
+      </p:sp>
+      <p:sp>
+        <p:nvSpPr>
           <p:cNvPr id="2" name="Title 1">
             <a:extLst>
               <a:ext uri="{FF2B5EF4-FFF2-40B4-BE49-F238E27FC236}">
@@ -3608,11 +4154,19 @@
           <a:lstStyle/>
           <a:p>
             <a:r>
-              <a:rPr lang="en-GB" dirty="0"/>
+              <a:rPr lang="en-GB" dirty="0">
+                <a:solidFill>
+                  <a:schemeClr val="bg1"/>
+                </a:solidFill>
+              </a:rPr>
               <a:t>textures </a:t>
             </a:r>
             <a:r>
-              <a:rPr lang="en-GB" sz="800" dirty="0"/>
+              <a:rPr lang="en-GB" sz="800" dirty="0">
+                <a:solidFill>
+                  <a:schemeClr val="bg1"/>
+                </a:solidFill>
+              </a:rPr>
               <a:t>(It is not my place to fight this scourge but I did so and I did it valiantly FOR PLACEHALLA!!!)</a:t>
             </a:r>
           </a:p>
@@ -3639,7 +4193,11 @@
           <a:bodyPr/>
           <a:lstStyle/>
           <a:p>
-            <a:endParaRPr lang="en-GB" dirty="0"/>
+            <a:endParaRPr lang="en-GB" dirty="0">
+              <a:solidFill>
+                <a:schemeClr val="bg1"/>
+              </a:solidFill>
+            </a:endParaRPr>
           </a:p>
         </p:txBody>
       </p:sp>
@@ -3675,6 +4233,226 @@
       </p:grpSpPr>
       <p:sp>
         <p:nvSpPr>
+          <p:cNvPr id="4" name="Rectangle 3">
+            <a:extLst>
+              <a:ext uri="{FF2B5EF4-FFF2-40B4-BE49-F238E27FC236}">
+                <a16:creationId xmlns:a16="http://schemas.microsoft.com/office/drawing/2014/main" id="{CA5FC928-734A-D9E0-455D-7870112DC363}"/>
+              </a:ext>
+            </a:extLst>
+          </p:cNvPr>
+          <p:cNvSpPr/>
+          <p:nvPr/>
+        </p:nvSpPr>
+        <p:spPr>
+          <a:xfrm>
+            <a:off x="0" y="0"/>
+            <a:ext cx="12192000" cy="6858000"/>
+          </a:xfrm>
+          <a:prstGeom prst="rect">
+            <a:avLst/>
+          </a:prstGeom>
+          <a:gradFill flip="none" rotWithShape="1">
+            <a:gsLst>
+              <a:gs pos="0">
+                <a:schemeClr val="tx1">
+                  <a:lumMod val="65000"/>
+                  <a:lumOff val="35000"/>
+                  <a:shade val="30000"/>
+                  <a:satMod val="115000"/>
+                </a:schemeClr>
+              </a:gs>
+              <a:gs pos="50000">
+                <a:schemeClr val="tx1">
+                  <a:lumMod val="65000"/>
+                  <a:lumOff val="35000"/>
+                  <a:shade val="67500"/>
+                  <a:satMod val="115000"/>
+                </a:schemeClr>
+              </a:gs>
+              <a:gs pos="100000">
+                <a:schemeClr val="tx1">
+                  <a:lumMod val="65000"/>
+                  <a:lumOff val="35000"/>
+                  <a:shade val="100000"/>
+                  <a:satMod val="115000"/>
+                </a:schemeClr>
+              </a:gs>
+            </a:gsLst>
+            <a:lin ang="5400000" scaled="1"/>
+            <a:tileRect/>
+          </a:gradFill>
+          <a:ln>
+            <a:noFill/>
+          </a:ln>
+        </p:spPr>
+        <p:style>
+          <a:lnRef idx="2">
+            <a:schemeClr val="accent1">
+              <a:shade val="15000"/>
+            </a:schemeClr>
+          </a:lnRef>
+          <a:fillRef idx="1">
+            <a:schemeClr val="accent1"/>
+          </a:fillRef>
+          <a:effectRef idx="0">
+            <a:schemeClr val="accent1"/>
+          </a:effectRef>
+          <a:fontRef idx="minor">
+            <a:schemeClr val="lt1"/>
+          </a:fontRef>
+        </p:style>
+        <p:txBody>
+          <a:bodyPr rtlCol="0" anchor="ctr"/>
+          <a:lstStyle/>
+          <a:p>
+            <a:pPr algn="ctr"/>
+            <a:endParaRPr lang="en-GB">
+              <a:gradFill flip="none" rotWithShape="1">
+                <a:gsLst>
+                  <a:gs pos="0">
+                    <a:schemeClr val="accent4">
+                      <a:lumMod val="40000"/>
+                      <a:lumOff val="60000"/>
+                    </a:schemeClr>
+                  </a:gs>
+                  <a:gs pos="46000">
+                    <a:schemeClr val="accent4">
+                      <a:lumMod val="95000"/>
+                      <a:lumOff val="5000"/>
+                    </a:schemeClr>
+                  </a:gs>
+                  <a:gs pos="100000">
+                    <a:schemeClr val="accent4">
+                      <a:lumMod val="60000"/>
+                    </a:schemeClr>
+                  </a:gs>
+                </a:gsLst>
+                <a:path path="circle">
+                  <a:fillToRect l="50000" t="130000" r="50000" b="-30000"/>
+                </a:path>
+                <a:tileRect/>
+              </a:gradFill>
+            </a:endParaRPr>
+          </a:p>
+        </p:txBody>
+      </p:sp>
+      <p:pic>
+        <p:nvPicPr>
+          <p:cNvPr id="1026" name="Picture 2" descr="Hl2 Time GIF">
+            <a:extLst>
+              <a:ext uri="{FF2B5EF4-FFF2-40B4-BE49-F238E27FC236}">
+                <a16:creationId xmlns:a16="http://schemas.microsoft.com/office/drawing/2014/main" id="{4AA5BDBC-A55E-8A27-ACE8-18FB9931DD42}"/>
+              </a:ext>
+            </a:extLst>
+          </p:cNvPr>
+          <p:cNvPicPr>
+            <a:picLocks noChangeAspect="1" noChangeArrowheads="1"/>
+          </p:cNvPicPr>
+          <p:nvPr/>
+        </p:nvPicPr>
+        <p:blipFill>
+          <a:blip r:embed="rId2">
+            <a:alphaModFix amt="20000"/>
+            <a:extLst>
+              <a:ext uri="{28A0092B-C50C-407E-A947-70E740481C1C}">
+                <a14:useLocalDpi xmlns:a14="http://schemas.microsoft.com/office/drawing/2010/main" val="0"/>
+              </a:ext>
+            </a:extLst>
+          </a:blip>
+          <a:srcRect/>
+          <a:stretch>
+            <a:fillRect/>
+          </a:stretch>
+        </p:blipFill>
+        <p:spPr bwMode="auto">
+          <a:xfrm>
+            <a:off x="0" y="19844"/>
+            <a:ext cx="12192000" cy="6841604"/>
+          </a:xfrm>
+          <a:prstGeom prst="rect">
+            <a:avLst/>
+          </a:prstGeom>
+          <a:noFill/>
+          <a:extLst>
+            <a:ext uri="{909E8E84-426E-40DD-AFC4-6F175D3DCCD1}">
+              <a14:hiddenFill xmlns:a14="http://schemas.microsoft.com/office/drawing/2010/main">
+                <a:solidFill>
+                  <a:srgbClr val="FFFFFF"/>
+                </a:solidFill>
+              </a14:hiddenFill>
+            </a:ext>
+          </a:extLst>
+        </p:spPr>
+      </p:pic>
+      <p:pic>
+        <p:nvPicPr>
+          <p:cNvPr id="1028" name="Picture 4" descr="Vintage Back Lit Wall Clock - 120cm | Black Country Metalworks">
+            <a:extLst>
+              <a:ext uri="{FF2B5EF4-FFF2-40B4-BE49-F238E27FC236}">
+                <a16:creationId xmlns:a16="http://schemas.microsoft.com/office/drawing/2014/main" id="{D8779782-D0D9-785C-A092-F63A51302CBB}"/>
+              </a:ext>
+            </a:extLst>
+          </p:cNvPr>
+          <p:cNvPicPr>
+            <a:picLocks noChangeAspect="1" noChangeArrowheads="1"/>
+          </p:cNvPicPr>
+          <p:nvPr/>
+        </p:nvPicPr>
+        <p:blipFill>
+          <a:blip r:embed="rId3">
+            <a:alphaModFix amt="50000"/>
+            <a:extLst>
+              <a:ext uri="{BEBA8EAE-BF5A-486C-A8C5-ECC9F3942E4B}">
+                <a14:imgProps xmlns:a14="http://schemas.microsoft.com/office/drawing/2010/main">
+                  <a14:imgLayer r:embed="rId4">
+                    <a14:imgEffect>
+                      <a14:backgroundRemoval t="9905" b="92381" l="8762" r="92000">
+                        <a14:foregroundMark x1="11048" y1="40000" x2="8762" y2="51238"/>
+                        <a14:foregroundMark x1="8762" y1="51238" x2="10095" y2="60952"/>
+                        <a14:foregroundMark x1="37333" y1="87429" x2="60000" y2="89714"/>
+                        <a14:foregroundMark x1="60000" y1="89714" x2="60571" y2="88571"/>
+                        <a14:foregroundMark x1="51238" y1="92381" x2="49143" y2="92000"/>
+                        <a14:foregroundMark x1="88952" y1="63619" x2="89524" y2="41905"/>
+                        <a14:foregroundMark x1="89524" y1="41905" x2="88000" y2="38476"/>
+                        <a14:foregroundMark x1="60571" y1="11810" x2="38667" y2="10857"/>
+                        <a14:foregroundMark x1="92000" y1="44381" x2="91619" y2="46667"/>
+                      </a14:backgroundRemoval>
+                    </a14:imgEffect>
+                  </a14:imgLayer>
+                </a14:imgProps>
+              </a:ext>
+              <a:ext uri="{28A0092B-C50C-407E-A947-70E740481C1C}">
+                <a14:useLocalDpi xmlns:a14="http://schemas.microsoft.com/office/drawing/2010/main" val="0"/>
+              </a:ext>
+            </a:extLst>
+          </a:blip>
+          <a:srcRect/>
+          <a:stretch>
+            <a:fillRect/>
+          </a:stretch>
+        </p:blipFill>
+        <p:spPr bwMode="auto">
+          <a:xfrm>
+            <a:off x="8330973" y="-809625"/>
+            <a:ext cx="5000625" cy="5000625"/>
+          </a:xfrm>
+          <a:prstGeom prst="rect">
+            <a:avLst/>
+          </a:prstGeom>
+          <a:noFill/>
+          <a:extLst>
+            <a:ext uri="{909E8E84-426E-40DD-AFC4-6F175D3DCCD1}">
+              <a14:hiddenFill xmlns:a14="http://schemas.microsoft.com/office/drawing/2010/main">
+                <a:solidFill>
+                  <a:srgbClr val="FFFFFF"/>
+                </a:solidFill>
+              </a14:hiddenFill>
+            </a:ext>
+          </a:extLst>
+        </p:spPr>
+      </p:pic>
+      <p:sp>
+        <p:nvSpPr>
           <p:cNvPr id="2" name="Title 1">
             <a:extLst>
               <a:ext uri="{FF2B5EF4-FFF2-40B4-BE49-F238E27FC236}">
@@ -3695,7 +4473,11 @@
           <a:lstStyle/>
           <a:p>
             <a:r>
-              <a:rPr lang="en-GB" dirty="0"/>
+              <a:rPr lang="en-GB" dirty="0">
+                <a:solidFill>
+                  <a:schemeClr val="bg1"/>
+                </a:solidFill>
+              </a:rPr>
               <a:t>Timer class</a:t>
             </a:r>
           </a:p>
@@ -3722,10 +4504,273 @@
           <a:bodyPr/>
           <a:lstStyle/>
           <a:p>
-            <a:endParaRPr lang="en-GB"/>
-          </a:p>
-        </p:txBody>
-      </p:sp>
+            <a:r>
+              <a:rPr lang="en-GB" dirty="0">
+                <a:solidFill>
+                  <a:schemeClr val="bg1"/>
+                </a:solidFill>
+              </a:rPr>
+              <a:t>This is a class I made and it count the time between two points in the program's execution.</a:t>
+            </a:r>
+          </a:p>
+          <a:p>
+            <a:endParaRPr lang="en-GB" dirty="0">
+              <a:solidFill>
+                <a:schemeClr val="bg1"/>
+              </a:solidFill>
+            </a:endParaRPr>
+          </a:p>
+          <a:p>
+            <a:r>
+              <a:rPr lang="en-GB" dirty="0">
+                <a:solidFill>
+                  <a:schemeClr val="bg1"/>
+                </a:solidFill>
+              </a:rPr>
+              <a:t>It can then return the time that passed in full or it can return it in bits of 0.016  seconds until there are no more bits and this last part is useful for the physics stuff.</a:t>
+            </a:r>
+          </a:p>
+          <a:p>
+            <a:endParaRPr lang="en-GB" dirty="0">
+              <a:solidFill>
+                <a:schemeClr val="bg1"/>
+              </a:solidFill>
+            </a:endParaRPr>
+          </a:p>
+          <a:p>
+            <a:r>
+              <a:rPr lang="en-GB" dirty="0">
+                <a:solidFill>
+                  <a:schemeClr val="bg1"/>
+                </a:solidFill>
+              </a:rPr>
+              <a:t>It can also return the time since the program or timers' creation.</a:t>
+            </a:r>
+          </a:p>
+          <a:p>
+            <a:endParaRPr lang="en-GB" dirty="0">
+              <a:solidFill>
+                <a:schemeClr val="bg1"/>
+              </a:solidFill>
+            </a:endParaRPr>
+          </a:p>
+          <a:p>
+            <a:endParaRPr lang="en-GB" dirty="0">
+              <a:solidFill>
+                <a:schemeClr val="bg1"/>
+              </a:solidFill>
+            </a:endParaRPr>
+          </a:p>
+          <a:p>
+            <a:endParaRPr lang="en-GB" dirty="0">
+              <a:solidFill>
+                <a:schemeClr val="bg1"/>
+              </a:solidFill>
+            </a:endParaRPr>
+          </a:p>
+        </p:txBody>
+      </p:sp>
+      <p:pic>
+        <p:nvPicPr>
+          <p:cNvPr id="1030" name="Picture 6" descr="66,200 Antique Clock Face Hands Without Royalty-Free Images, Stock Photos &amp;  Pictures | Shutterstock">
+            <a:extLst>
+              <a:ext uri="{FF2B5EF4-FFF2-40B4-BE49-F238E27FC236}">
+                <a16:creationId xmlns:a16="http://schemas.microsoft.com/office/drawing/2014/main" id="{11DDBF29-6D3F-33AF-DFB8-90A7935D6DB3}"/>
+              </a:ext>
+            </a:extLst>
+          </p:cNvPr>
+          <p:cNvPicPr>
+            <a:picLocks noChangeAspect="1" noChangeArrowheads="1"/>
+          </p:cNvPicPr>
+          <p:nvPr/>
+        </p:nvPicPr>
+        <p:blipFill>
+          <a:blip r:embed="rId5">
+            <a:alphaModFix amt="50000"/>
+            <a:extLst>
+              <a:ext uri="{BEBA8EAE-BF5A-486C-A8C5-ECC9F3942E4B}">
+                <a14:imgProps xmlns:a14="http://schemas.microsoft.com/office/drawing/2010/main">
+                  <a14:imgLayer r:embed="rId6">
+                    <a14:imgEffect>
+                      <a14:backgroundRemoval t="10000" b="91667" l="9167" r="90833">
+                        <a14:foregroundMark x1="10667" y1="42500" x2="9167" y2="53000"/>
+                        <a14:foregroundMark x1="9167" y1="53000" x2="10500" y2="57500"/>
+                        <a14:foregroundMark x1="38000" y1="89500" x2="48500" y2="91833"/>
+                        <a14:foregroundMark x1="48500" y1="91833" x2="57167" y2="91667"/>
+                        <a14:foregroundMark x1="57167" y1="91667" x2="62667" y2="89167"/>
+                        <a14:foregroundMark x1="88833" y1="64000" x2="90833" y2="46333"/>
+                        <a14:foregroundMark x1="90833" y1="46333" x2="88667" y2="37500"/>
+                        <a14:foregroundMark x1="60167" y1="11333" x2="41500" y2="10667"/>
+                      </a14:backgroundRemoval>
+                    </a14:imgEffect>
+                  </a14:imgLayer>
+                </a14:imgProps>
+              </a:ext>
+              <a:ext uri="{28A0092B-C50C-407E-A947-70E740481C1C}">
+                <a14:useLocalDpi xmlns:a14="http://schemas.microsoft.com/office/drawing/2010/main" val="0"/>
+              </a:ext>
+            </a:extLst>
+          </a:blip>
+          <a:srcRect/>
+          <a:stretch>
+            <a:fillRect/>
+          </a:stretch>
+        </p:blipFill>
+        <p:spPr bwMode="auto">
+          <a:xfrm>
+            <a:off x="-2857500" y="3980656"/>
+            <a:ext cx="5715000" cy="5715000"/>
+          </a:xfrm>
+          <a:prstGeom prst="rect">
+            <a:avLst/>
+          </a:prstGeom>
+          <a:noFill/>
+          <a:extLst>
+            <a:ext uri="{909E8E84-426E-40DD-AFC4-6F175D3DCCD1}">
+              <a14:hiddenFill xmlns:a14="http://schemas.microsoft.com/office/drawing/2010/main">
+                <a:solidFill>
+                  <a:srgbClr val="FFFFFF"/>
+                </a:solidFill>
+              </a14:hiddenFill>
+            </a:ext>
+          </a:extLst>
+        </p:spPr>
+      </p:pic>
+      <p:cxnSp>
+        <p:nvCxnSpPr>
+          <p:cNvPr id="7" name="Straight Connector 6">
+            <a:extLst>
+              <a:ext uri="{FF2B5EF4-FFF2-40B4-BE49-F238E27FC236}">
+                <a16:creationId xmlns:a16="http://schemas.microsoft.com/office/drawing/2014/main" id="{851E6CAA-04FC-E29D-9295-31027F4E31ED}"/>
+              </a:ext>
+            </a:extLst>
+          </p:cNvPr>
+          <p:cNvCxnSpPr>
+            <a:cxnSpLocks/>
+          </p:cNvCxnSpPr>
+          <p:nvPr/>
+        </p:nvCxnSpPr>
+        <p:spPr>
+          <a:xfrm flipH="1" flipV="1">
+            <a:off x="-28576" y="5555457"/>
+            <a:ext cx="28576" cy="2692399"/>
+          </a:xfrm>
+          <a:prstGeom prst="line">
+            <a:avLst/>
+          </a:prstGeom>
+          <a:ln w="57150">
+            <a:solidFill>
+              <a:srgbClr val="000000">
+                <a:alpha val="50196"/>
+              </a:srgbClr>
+            </a:solidFill>
+          </a:ln>
+        </p:spPr>
+        <p:style>
+          <a:lnRef idx="2">
+            <a:schemeClr val="accent1"/>
+          </a:lnRef>
+          <a:fillRef idx="0">
+            <a:schemeClr val="accent1"/>
+          </a:fillRef>
+          <a:effectRef idx="1">
+            <a:schemeClr val="accent1"/>
+          </a:effectRef>
+          <a:fontRef idx="minor">
+            <a:schemeClr val="tx1"/>
+          </a:fontRef>
+        </p:style>
+      </p:cxnSp>
+      <p:cxnSp>
+        <p:nvCxnSpPr>
+          <p:cNvPr id="16" name="Straight Connector 15">
+            <a:extLst>
+              <a:ext uri="{FF2B5EF4-FFF2-40B4-BE49-F238E27FC236}">
+                <a16:creationId xmlns:a16="http://schemas.microsoft.com/office/drawing/2014/main" id="{724DE231-FFCC-B1FE-B5FF-9F7A4555465C}"/>
+              </a:ext>
+            </a:extLst>
+          </p:cNvPr>
+          <p:cNvCxnSpPr>
+            <a:cxnSpLocks/>
+          </p:cNvCxnSpPr>
+          <p:nvPr/>
+        </p:nvCxnSpPr>
+        <p:spPr>
+          <a:xfrm flipV="1">
+            <a:off x="-652089" y="5884386"/>
+            <a:ext cx="1304177" cy="2034540"/>
+          </a:xfrm>
+          <a:prstGeom prst="line">
+            <a:avLst/>
+          </a:prstGeom>
+          <a:ln w="57150">
+            <a:solidFill>
+              <a:srgbClr val="000000">
+                <a:alpha val="50196"/>
+              </a:srgbClr>
+            </a:solidFill>
+          </a:ln>
+        </p:spPr>
+        <p:style>
+          <a:lnRef idx="2">
+            <a:schemeClr val="accent1"/>
+          </a:lnRef>
+          <a:fillRef idx="0">
+            <a:schemeClr val="accent1"/>
+          </a:fillRef>
+          <a:effectRef idx="1">
+            <a:schemeClr val="accent1"/>
+          </a:effectRef>
+          <a:fontRef idx="minor">
+            <a:schemeClr val="tx1"/>
+          </a:fontRef>
+        </p:style>
+      </p:cxnSp>
+      <p:cxnSp>
+        <p:nvCxnSpPr>
+          <p:cNvPr id="20" name="Straight Connector 19">
+            <a:extLst>
+              <a:ext uri="{FF2B5EF4-FFF2-40B4-BE49-F238E27FC236}">
+                <a16:creationId xmlns:a16="http://schemas.microsoft.com/office/drawing/2014/main" id="{CA197E8A-94AF-2C64-1A4F-64EA13F2DDAC}"/>
+              </a:ext>
+            </a:extLst>
+          </p:cNvPr>
+          <p:cNvCxnSpPr>
+            <a:cxnSpLocks/>
+          </p:cNvCxnSpPr>
+          <p:nvPr/>
+        </p:nvCxnSpPr>
+        <p:spPr>
+          <a:xfrm>
+            <a:off x="-1295400" y="6858000"/>
+            <a:ext cx="2590800" cy="0"/>
+          </a:xfrm>
+          <a:prstGeom prst="line">
+            <a:avLst/>
+          </a:prstGeom>
+          <a:ln w="12700">
+            <a:solidFill>
+              <a:srgbClr val="FF0000">
+                <a:alpha val="49804"/>
+              </a:srgbClr>
+            </a:solidFill>
+          </a:ln>
+        </p:spPr>
+        <p:style>
+          <a:lnRef idx="2">
+            <a:schemeClr val="accent1"/>
+          </a:lnRef>
+          <a:fillRef idx="0">
+            <a:schemeClr val="accent1"/>
+          </a:fillRef>
+          <a:effectRef idx="1">
+            <a:schemeClr val="accent1"/>
+          </a:effectRef>
+          <a:fontRef idx="minor">
+            <a:schemeClr val="tx1"/>
+          </a:fontRef>
+        </p:style>
+      </p:cxnSp>
     </p:spTree>
     <p:extLst>
       <p:ext uri="{BB962C8B-B14F-4D97-AF65-F5344CB8AC3E}">
@@ -3736,6 +4781,117 @@
   <p:clrMapOvr>
     <a:masterClrMapping/>
   </p:clrMapOvr>
+  <p:timing>
+    <p:tnLst>
+      <p:par>
+        <p:cTn id="1" dur="indefinite" restart="never" nodeType="tmRoot">
+          <p:childTnLst>
+            <p:seq concurrent="1" nextAc="seek">
+              <p:cTn id="2" dur="indefinite" nodeType="mainSeq">
+                <p:childTnLst>
+                  <p:par>
+                    <p:cTn id="3" fill="hold">
+                      <p:stCondLst>
+                        <p:cond delay="indefinite"/>
+                        <p:cond evt="onBegin" delay="0">
+                          <p:tn val="2"/>
+                        </p:cond>
+                      </p:stCondLst>
+                      <p:childTnLst>
+                        <p:par>
+                          <p:cTn id="4" fill="hold">
+                            <p:stCondLst>
+                              <p:cond delay="0"/>
+                            </p:stCondLst>
+                            <p:childTnLst>
+                              <p:par>
+                                <p:cTn id="5" presetID="8" presetClass="emph" presetSubtype="0" repeatCount="indefinite" fill="hold" nodeType="withEffect">
+                                  <p:stCondLst>
+                                    <p:cond delay="0"/>
+                                  </p:stCondLst>
+                                  <p:childTnLst>
+                                    <p:animRot by="360000000">
+                                      <p:cBhvr>
+                                        <p:cTn id="6" dur="20000" fill="hold"/>
+                                        <p:tgtEl>
+                                          <p:spTgt spid="7"/>
+                                        </p:tgtEl>
+                                        <p:attrNameLst>
+                                          <p:attrName>r</p:attrName>
+                                        </p:attrNameLst>
+                                      </p:cBhvr>
+                                    </p:animRot>
+                                  </p:childTnLst>
+                                </p:cTn>
+                              </p:par>
+                              <p:par>
+                                <p:cTn id="7" presetID="8" presetClass="emph" presetSubtype="0" repeatCount="indefinite" fill="hold" nodeType="withEffect">
+                                  <p:stCondLst>
+                                    <p:cond delay="0"/>
+                                  </p:stCondLst>
+                                  <p:childTnLst>
+                                    <p:animRot by="480000000">
+                                      <p:cBhvr>
+                                        <p:cTn id="8" dur="20000" fill="hold"/>
+                                        <p:tgtEl>
+                                          <p:spTgt spid="16"/>
+                                        </p:tgtEl>
+                                        <p:attrNameLst>
+                                          <p:attrName>r</p:attrName>
+                                        </p:attrNameLst>
+                                      </p:cBhvr>
+                                    </p:animRot>
+                                  </p:childTnLst>
+                                </p:cTn>
+                              </p:par>
+                              <p:par>
+                                <p:cTn id="9" presetID="8" presetClass="emph" presetSubtype="0" repeatCount="indefinite" fill="hold" nodeType="withEffect">
+                                  <p:stCondLst>
+                                    <p:cond delay="0"/>
+                                  </p:stCondLst>
+                                  <p:childTnLst>
+                                    <p:animRot by="540000000">
+                                      <p:cBhvr>
+                                        <p:cTn id="10" dur="20000" fill="hold"/>
+                                        <p:tgtEl>
+                                          <p:spTgt spid="20"/>
+                                        </p:tgtEl>
+                                        <p:attrNameLst>
+                                          <p:attrName>r</p:attrName>
+                                        </p:attrNameLst>
+                                      </p:cBhvr>
+                                    </p:animRot>
+                                  </p:childTnLst>
+                                </p:cTn>
+                              </p:par>
+                            </p:childTnLst>
+                          </p:cTn>
+                        </p:par>
+                      </p:childTnLst>
+                    </p:cTn>
+                  </p:par>
+                </p:childTnLst>
+              </p:cTn>
+              <p:prevCondLst>
+                <p:cond evt="onPrev" delay="0">
+                  <p:tgtEl>
+                    <p:sldTgt/>
+                  </p:tgtEl>
+                </p:cond>
+              </p:prevCondLst>
+              <p:nextCondLst>
+                <p:cond evt="onNext" delay="0">
+                  <p:tgtEl>
+                    <p:sldTgt/>
+                  </p:tgtEl>
+                </p:cond>
+              </p:nextCondLst>
+            </p:seq>
+          </p:childTnLst>
+        </p:cTn>
+      </p:par>
+    </p:tnLst>
+  </p:timing>
 </p:sld>
 </file>
 
@@ -3764,6 +4920,157 @@
       </p:grpSpPr>
       <p:sp>
         <p:nvSpPr>
+          <p:cNvPr id="4" name="Rectangle 3">
+            <a:extLst>
+              <a:ext uri="{FF2B5EF4-FFF2-40B4-BE49-F238E27FC236}">
+                <a16:creationId xmlns:a16="http://schemas.microsoft.com/office/drawing/2014/main" id="{D2530AAF-B70C-3FB2-F9EA-6547470E652C}"/>
+              </a:ext>
+            </a:extLst>
+          </p:cNvPr>
+          <p:cNvSpPr/>
+          <p:nvPr/>
+        </p:nvSpPr>
+        <p:spPr>
+          <a:xfrm>
+            <a:off x="0" y="0"/>
+            <a:ext cx="12192000" cy="6858000"/>
+          </a:xfrm>
+          <a:prstGeom prst="rect">
+            <a:avLst/>
+          </a:prstGeom>
+          <a:gradFill flip="none" rotWithShape="1">
+            <a:gsLst>
+              <a:gs pos="0">
+                <a:schemeClr val="tx1">
+                  <a:lumMod val="65000"/>
+                  <a:lumOff val="35000"/>
+                  <a:shade val="30000"/>
+                  <a:satMod val="115000"/>
+                </a:schemeClr>
+              </a:gs>
+              <a:gs pos="50000">
+                <a:schemeClr val="tx1">
+                  <a:lumMod val="65000"/>
+                  <a:lumOff val="35000"/>
+                  <a:shade val="67500"/>
+                  <a:satMod val="115000"/>
+                </a:schemeClr>
+              </a:gs>
+              <a:gs pos="100000">
+                <a:schemeClr val="tx1">
+                  <a:lumMod val="65000"/>
+                  <a:lumOff val="35000"/>
+                  <a:shade val="100000"/>
+                  <a:satMod val="115000"/>
+                </a:schemeClr>
+              </a:gs>
+            </a:gsLst>
+            <a:lin ang="5400000" scaled="1"/>
+            <a:tileRect/>
+          </a:gradFill>
+          <a:ln>
+            <a:noFill/>
+          </a:ln>
+        </p:spPr>
+        <p:style>
+          <a:lnRef idx="2">
+            <a:schemeClr val="accent1">
+              <a:shade val="15000"/>
+            </a:schemeClr>
+          </a:lnRef>
+          <a:fillRef idx="1">
+            <a:schemeClr val="accent1"/>
+          </a:fillRef>
+          <a:effectRef idx="0">
+            <a:schemeClr val="accent1"/>
+          </a:effectRef>
+          <a:fontRef idx="minor">
+            <a:schemeClr val="lt1"/>
+          </a:fontRef>
+        </p:style>
+        <p:txBody>
+          <a:bodyPr rtlCol="0" anchor="ctr"/>
+          <a:lstStyle/>
+          <a:p>
+            <a:pPr algn="ctr"/>
+            <a:endParaRPr lang="en-GB">
+              <a:gradFill flip="none" rotWithShape="1">
+                <a:gsLst>
+                  <a:gs pos="0">
+                    <a:schemeClr val="accent4">
+                      <a:lumMod val="40000"/>
+                      <a:lumOff val="60000"/>
+                    </a:schemeClr>
+                  </a:gs>
+                  <a:gs pos="46000">
+                    <a:schemeClr val="accent4">
+                      <a:lumMod val="95000"/>
+                      <a:lumOff val="5000"/>
+                    </a:schemeClr>
+                  </a:gs>
+                  <a:gs pos="100000">
+                    <a:schemeClr val="accent4">
+                      <a:lumMod val="60000"/>
+                    </a:schemeClr>
+                  </a:gs>
+                </a:gsLst>
+                <a:path path="circle">
+                  <a:fillToRect l="50000" t="130000" r="50000" b="-30000"/>
+                </a:path>
+                <a:tileRect/>
+              </a:gradFill>
+            </a:endParaRPr>
+          </a:p>
+        </p:txBody>
+      </p:sp>
+      <p:pic>
+        <p:nvPicPr>
+          <p:cNvPr id="6" name="Picture 5">
+            <a:extLst>
+              <a:ext uri="{FF2B5EF4-FFF2-40B4-BE49-F238E27FC236}">
+                <a16:creationId xmlns:a16="http://schemas.microsoft.com/office/drawing/2014/main" id="{C60DCF20-7C1D-DB1E-440B-087E2D2D49B6}"/>
+              </a:ext>
+            </a:extLst>
+          </p:cNvPr>
+          <p:cNvPicPr>
+            <a:picLocks noChangeAspect="1"/>
+          </p:cNvPicPr>
+          <p:nvPr/>
+        </p:nvPicPr>
+        <p:blipFill>
+          <a:blip r:embed="rId2">
+            <a:alphaModFix amt="35000"/>
+            <a:extLst>
+              <a:ext uri="{BEBA8EAE-BF5A-486C-A8C5-ECC9F3942E4B}">
+                <a14:imgProps xmlns:a14="http://schemas.microsoft.com/office/drawing/2010/main">
+                  <a14:imgLayer r:embed="rId3">
+                    <a14:imgEffect>
+                      <a14:sharpenSoften amount="-40000"/>
+                    </a14:imgEffect>
+                  </a14:imgLayer>
+                </a14:imgProps>
+              </a:ext>
+              <a:ext uri="{28A0092B-C50C-407E-A947-70E740481C1C}">
+                <a14:useLocalDpi xmlns:a14="http://schemas.microsoft.com/office/drawing/2010/main" val="0"/>
+              </a:ext>
+            </a:extLst>
+          </a:blip>
+          <a:stretch>
+            <a:fillRect/>
+          </a:stretch>
+        </p:blipFill>
+        <p:spPr>
+          <a:xfrm>
+            <a:off x="0" y="0"/>
+            <a:ext cx="12192000" cy="6858000"/>
+          </a:xfrm>
+          <a:prstGeom prst="rect">
+            <a:avLst/>
+          </a:prstGeom>
+        </p:spPr>
+      </p:pic>
+      <p:sp>
+        <p:nvSpPr>
           <p:cNvPr id="2" name="Title 1">
             <a:extLst>
               <a:ext uri="{FF2B5EF4-FFF2-40B4-BE49-F238E27FC236}">
@@ -3784,9 +5091,1145 @@
           <a:lstStyle/>
           <a:p>
             <a:r>
-              <a:rPr lang="en-GB" dirty="0"/>
-              <a:t>Unit testing system</a:t>
+              <a:rPr lang="en-GB" dirty="0">
+                <a:solidFill>
+                  <a:schemeClr val="bg1"/>
+                </a:solidFill>
+              </a:rPr>
+              <a:t>Run time unit testing system</a:t>
             </a:r>
+          </a:p>
+        </p:txBody>
+      </p:sp>
+      <p:sp>
+        <p:nvSpPr>
+          <p:cNvPr id="9" name="Rectangle 8">
+            <a:extLst>
+              <a:ext uri="{FF2B5EF4-FFF2-40B4-BE49-F238E27FC236}">
+                <a16:creationId xmlns:a16="http://schemas.microsoft.com/office/drawing/2014/main" id="{EE215E07-E3A8-63BC-2FF9-6E3C144D146E}"/>
+              </a:ext>
+            </a:extLst>
+          </p:cNvPr>
+          <p:cNvSpPr/>
+          <p:nvPr/>
+        </p:nvSpPr>
+        <p:spPr>
+          <a:xfrm rot="21380994">
+            <a:off x="8297123" y="-300704"/>
+            <a:ext cx="4306128" cy="7357829"/>
+          </a:xfrm>
+          <a:prstGeom prst="rect">
+            <a:avLst/>
+          </a:prstGeom>
+          <a:solidFill>
+            <a:srgbClr val="000000"/>
+          </a:solidFill>
+          <a:ln>
+            <a:noFill/>
+          </a:ln>
+        </p:spPr>
+        <p:style>
+          <a:lnRef idx="2">
+            <a:schemeClr val="accent1">
+              <a:shade val="15000"/>
+            </a:schemeClr>
+          </a:lnRef>
+          <a:fillRef idx="1">
+            <a:schemeClr val="accent1"/>
+          </a:fillRef>
+          <a:effectRef idx="0">
+            <a:schemeClr val="accent1"/>
+          </a:effectRef>
+          <a:fontRef idx="minor">
+            <a:schemeClr val="lt1"/>
+          </a:fontRef>
+        </p:style>
+        <p:txBody>
+          <a:bodyPr rtlCol="0" anchor="ctr"/>
+          <a:lstStyle/>
+          <a:p>
+            <a:pPr algn="ctr"/>
+            <a:endParaRPr lang="en-GB"/>
+          </a:p>
+        </p:txBody>
+      </p:sp>
+      <p:sp>
+        <p:nvSpPr>
+          <p:cNvPr id="10" name="Rectangle 9">
+            <a:extLst>
+              <a:ext uri="{FF2B5EF4-FFF2-40B4-BE49-F238E27FC236}">
+                <a16:creationId xmlns:a16="http://schemas.microsoft.com/office/drawing/2014/main" id="{4DB92C35-A879-A1AD-A422-3EBFE143BDFD}"/>
+              </a:ext>
+            </a:extLst>
+          </p:cNvPr>
+          <p:cNvSpPr/>
+          <p:nvPr/>
+        </p:nvSpPr>
+        <p:spPr>
+          <a:xfrm rot="808827">
+            <a:off x="7989772" y="155290"/>
+            <a:ext cx="800950" cy="681037"/>
+          </a:xfrm>
+          <a:prstGeom prst="rect">
+            <a:avLst/>
+          </a:prstGeom>
+          <a:solidFill>
+            <a:schemeClr val="tx1"/>
+          </a:solidFill>
+          <a:ln>
+            <a:solidFill>
+              <a:schemeClr val="tx1"/>
+            </a:solidFill>
+          </a:ln>
+        </p:spPr>
+        <p:style>
+          <a:lnRef idx="2">
+            <a:schemeClr val="accent1">
+              <a:shade val="15000"/>
+            </a:schemeClr>
+          </a:lnRef>
+          <a:fillRef idx="1">
+            <a:schemeClr val="accent1"/>
+          </a:fillRef>
+          <a:effectRef idx="0">
+            <a:schemeClr val="accent1"/>
+          </a:effectRef>
+          <a:fontRef idx="minor">
+            <a:schemeClr val="lt1"/>
+          </a:fontRef>
+        </p:style>
+        <p:txBody>
+          <a:bodyPr rtlCol="0" anchor="ctr"/>
+          <a:lstStyle/>
+          <a:p>
+            <a:pPr algn="ctr"/>
+            <a:endParaRPr lang="en-GB"/>
+          </a:p>
+        </p:txBody>
+      </p:sp>
+      <p:sp>
+        <p:nvSpPr>
+          <p:cNvPr id="11" name="Rectangle 10">
+            <a:extLst>
+              <a:ext uri="{FF2B5EF4-FFF2-40B4-BE49-F238E27FC236}">
+                <a16:creationId xmlns:a16="http://schemas.microsoft.com/office/drawing/2014/main" id="{D695E43A-97EF-6D41-8CA5-704BBCBDE92D}"/>
+              </a:ext>
+            </a:extLst>
+          </p:cNvPr>
+          <p:cNvSpPr/>
+          <p:nvPr/>
+        </p:nvSpPr>
+        <p:spPr>
+          <a:xfrm rot="20508243">
+            <a:off x="7989772" y="776288"/>
+            <a:ext cx="800950" cy="681037"/>
+          </a:xfrm>
+          <a:prstGeom prst="rect">
+            <a:avLst/>
+          </a:prstGeom>
+          <a:solidFill>
+            <a:schemeClr val="tx1"/>
+          </a:solidFill>
+          <a:ln>
+            <a:solidFill>
+              <a:schemeClr val="tx1"/>
+            </a:solidFill>
+          </a:ln>
+        </p:spPr>
+        <p:style>
+          <a:lnRef idx="2">
+            <a:schemeClr val="accent1">
+              <a:shade val="15000"/>
+            </a:schemeClr>
+          </a:lnRef>
+          <a:fillRef idx="1">
+            <a:schemeClr val="accent1"/>
+          </a:fillRef>
+          <a:effectRef idx="0">
+            <a:schemeClr val="accent1"/>
+          </a:effectRef>
+          <a:fontRef idx="minor">
+            <a:schemeClr val="lt1"/>
+          </a:fontRef>
+        </p:style>
+        <p:txBody>
+          <a:bodyPr rtlCol="0" anchor="ctr"/>
+          <a:lstStyle/>
+          <a:p>
+            <a:pPr algn="ctr"/>
+            <a:endParaRPr lang="en-GB"/>
+          </a:p>
+        </p:txBody>
+      </p:sp>
+      <p:sp>
+        <p:nvSpPr>
+          <p:cNvPr id="12" name="Rectangle 11">
+            <a:extLst>
+              <a:ext uri="{FF2B5EF4-FFF2-40B4-BE49-F238E27FC236}">
+                <a16:creationId xmlns:a16="http://schemas.microsoft.com/office/drawing/2014/main" id="{A77CBB77-4C3E-5FFA-F696-2961EFBD9420}"/>
+              </a:ext>
+            </a:extLst>
+          </p:cNvPr>
+          <p:cNvSpPr/>
+          <p:nvPr/>
+        </p:nvSpPr>
+        <p:spPr>
+          <a:xfrm rot="2076192">
+            <a:off x="8137378" y="1452617"/>
+            <a:ext cx="800950" cy="681037"/>
+          </a:xfrm>
+          <a:prstGeom prst="rect">
+            <a:avLst/>
+          </a:prstGeom>
+          <a:solidFill>
+            <a:schemeClr val="tx1"/>
+          </a:solidFill>
+          <a:ln>
+            <a:solidFill>
+              <a:schemeClr val="tx1"/>
+            </a:solidFill>
+          </a:ln>
+        </p:spPr>
+        <p:style>
+          <a:lnRef idx="2">
+            <a:schemeClr val="accent1">
+              <a:shade val="15000"/>
+            </a:schemeClr>
+          </a:lnRef>
+          <a:fillRef idx="1">
+            <a:schemeClr val="accent1"/>
+          </a:fillRef>
+          <a:effectRef idx="0">
+            <a:schemeClr val="accent1"/>
+          </a:effectRef>
+          <a:fontRef idx="minor">
+            <a:schemeClr val="lt1"/>
+          </a:fontRef>
+        </p:style>
+        <p:txBody>
+          <a:bodyPr rtlCol="0" anchor="ctr"/>
+          <a:lstStyle/>
+          <a:p>
+            <a:pPr algn="ctr"/>
+            <a:endParaRPr lang="en-GB"/>
+          </a:p>
+        </p:txBody>
+      </p:sp>
+      <p:sp>
+        <p:nvSpPr>
+          <p:cNvPr id="13" name="Rectangle 12">
+            <a:extLst>
+              <a:ext uri="{FF2B5EF4-FFF2-40B4-BE49-F238E27FC236}">
+                <a16:creationId xmlns:a16="http://schemas.microsoft.com/office/drawing/2014/main" id="{D57669E0-4C1D-47C8-3D60-6CA5B36E4ED6}"/>
+              </a:ext>
+            </a:extLst>
+          </p:cNvPr>
+          <p:cNvSpPr/>
+          <p:nvPr/>
+        </p:nvSpPr>
+        <p:spPr>
+          <a:xfrm rot="20508243">
+            <a:off x="8226573" y="2367789"/>
+            <a:ext cx="800950" cy="681037"/>
+          </a:xfrm>
+          <a:prstGeom prst="rect">
+            <a:avLst/>
+          </a:prstGeom>
+          <a:solidFill>
+            <a:schemeClr val="tx1"/>
+          </a:solidFill>
+          <a:ln>
+            <a:solidFill>
+              <a:schemeClr val="tx1"/>
+            </a:solidFill>
+          </a:ln>
+        </p:spPr>
+        <p:style>
+          <a:lnRef idx="2">
+            <a:schemeClr val="accent1">
+              <a:shade val="15000"/>
+            </a:schemeClr>
+          </a:lnRef>
+          <a:fillRef idx="1">
+            <a:schemeClr val="accent1"/>
+          </a:fillRef>
+          <a:effectRef idx="0">
+            <a:schemeClr val="accent1"/>
+          </a:effectRef>
+          <a:fontRef idx="minor">
+            <a:schemeClr val="lt1"/>
+          </a:fontRef>
+        </p:style>
+        <p:txBody>
+          <a:bodyPr rtlCol="0" anchor="ctr"/>
+          <a:lstStyle/>
+          <a:p>
+            <a:pPr algn="ctr"/>
+            <a:endParaRPr lang="en-GB"/>
+          </a:p>
+        </p:txBody>
+      </p:sp>
+      <p:sp>
+        <p:nvSpPr>
+          <p:cNvPr id="14" name="Rectangle 13">
+            <a:extLst>
+              <a:ext uri="{FF2B5EF4-FFF2-40B4-BE49-F238E27FC236}">
+                <a16:creationId xmlns:a16="http://schemas.microsoft.com/office/drawing/2014/main" id="{E442B8F9-C0BF-2AAB-3709-E8FC807E59CE}"/>
+              </a:ext>
+            </a:extLst>
+          </p:cNvPr>
+          <p:cNvSpPr/>
+          <p:nvPr/>
+        </p:nvSpPr>
+        <p:spPr>
+          <a:xfrm rot="20508243">
+            <a:off x="8226574" y="2951273"/>
+            <a:ext cx="800950" cy="681037"/>
+          </a:xfrm>
+          <a:prstGeom prst="rect">
+            <a:avLst/>
+          </a:prstGeom>
+          <a:solidFill>
+            <a:schemeClr val="tx1"/>
+          </a:solidFill>
+          <a:ln>
+            <a:solidFill>
+              <a:schemeClr val="tx1"/>
+            </a:solidFill>
+          </a:ln>
+        </p:spPr>
+        <p:style>
+          <a:lnRef idx="2">
+            <a:schemeClr val="accent1">
+              <a:shade val="15000"/>
+            </a:schemeClr>
+          </a:lnRef>
+          <a:fillRef idx="1">
+            <a:schemeClr val="accent1"/>
+          </a:fillRef>
+          <a:effectRef idx="0">
+            <a:schemeClr val="accent1"/>
+          </a:effectRef>
+          <a:fontRef idx="minor">
+            <a:schemeClr val="lt1"/>
+          </a:fontRef>
+        </p:style>
+        <p:txBody>
+          <a:bodyPr rtlCol="0" anchor="ctr"/>
+          <a:lstStyle/>
+          <a:p>
+            <a:pPr algn="ctr"/>
+            <a:endParaRPr lang="en-GB"/>
+          </a:p>
+        </p:txBody>
+      </p:sp>
+      <p:sp>
+        <p:nvSpPr>
+          <p:cNvPr id="15" name="Rectangle 14">
+            <a:extLst>
+              <a:ext uri="{FF2B5EF4-FFF2-40B4-BE49-F238E27FC236}">
+                <a16:creationId xmlns:a16="http://schemas.microsoft.com/office/drawing/2014/main" id="{6ABB35B5-7A23-9104-E3A1-26C7E261ADE8}"/>
+              </a:ext>
+            </a:extLst>
+          </p:cNvPr>
+          <p:cNvSpPr/>
+          <p:nvPr/>
+        </p:nvSpPr>
+        <p:spPr>
+          <a:xfrm rot="20140826">
+            <a:off x="8209390" y="3721876"/>
+            <a:ext cx="800950" cy="681037"/>
+          </a:xfrm>
+          <a:prstGeom prst="rect">
+            <a:avLst/>
+          </a:prstGeom>
+          <a:solidFill>
+            <a:schemeClr val="tx1"/>
+          </a:solidFill>
+          <a:ln>
+            <a:solidFill>
+              <a:schemeClr val="tx1"/>
+            </a:solidFill>
+          </a:ln>
+        </p:spPr>
+        <p:style>
+          <a:lnRef idx="2">
+            <a:schemeClr val="accent1">
+              <a:shade val="15000"/>
+            </a:schemeClr>
+          </a:lnRef>
+          <a:fillRef idx="1">
+            <a:schemeClr val="accent1"/>
+          </a:fillRef>
+          <a:effectRef idx="0">
+            <a:schemeClr val="accent1"/>
+          </a:effectRef>
+          <a:fontRef idx="minor">
+            <a:schemeClr val="lt1"/>
+          </a:fontRef>
+        </p:style>
+        <p:txBody>
+          <a:bodyPr rtlCol="0" anchor="ctr"/>
+          <a:lstStyle/>
+          <a:p>
+            <a:pPr algn="ctr"/>
+            <a:endParaRPr lang="en-GB"/>
+          </a:p>
+        </p:txBody>
+      </p:sp>
+      <p:sp>
+        <p:nvSpPr>
+          <p:cNvPr id="17" name="Rectangle 16">
+            <a:extLst>
+              <a:ext uri="{FF2B5EF4-FFF2-40B4-BE49-F238E27FC236}">
+                <a16:creationId xmlns:a16="http://schemas.microsoft.com/office/drawing/2014/main" id="{A062A5B0-0E99-D2C8-AAAF-C1B076700949}"/>
+              </a:ext>
+            </a:extLst>
+          </p:cNvPr>
+          <p:cNvSpPr/>
+          <p:nvPr/>
+        </p:nvSpPr>
+        <p:spPr>
+          <a:xfrm rot="20779876">
+            <a:off x="8209391" y="4641960"/>
+            <a:ext cx="800950" cy="681037"/>
+          </a:xfrm>
+          <a:prstGeom prst="rect">
+            <a:avLst/>
+          </a:prstGeom>
+          <a:solidFill>
+            <a:schemeClr val="tx1"/>
+          </a:solidFill>
+          <a:ln>
+            <a:solidFill>
+              <a:schemeClr val="tx1"/>
+            </a:solidFill>
+          </a:ln>
+        </p:spPr>
+        <p:style>
+          <a:lnRef idx="2">
+            <a:schemeClr val="accent1">
+              <a:shade val="15000"/>
+            </a:schemeClr>
+          </a:lnRef>
+          <a:fillRef idx="1">
+            <a:schemeClr val="accent1"/>
+          </a:fillRef>
+          <a:effectRef idx="0">
+            <a:schemeClr val="accent1"/>
+          </a:effectRef>
+          <a:fontRef idx="minor">
+            <a:schemeClr val="lt1"/>
+          </a:fontRef>
+        </p:style>
+        <p:txBody>
+          <a:bodyPr rtlCol="0" anchor="ctr"/>
+          <a:lstStyle/>
+          <a:p>
+            <a:pPr algn="ctr"/>
+            <a:endParaRPr lang="en-GB"/>
+          </a:p>
+        </p:txBody>
+      </p:sp>
+      <p:sp>
+        <p:nvSpPr>
+          <p:cNvPr id="18" name="Rectangle 17">
+            <a:extLst>
+              <a:ext uri="{FF2B5EF4-FFF2-40B4-BE49-F238E27FC236}">
+                <a16:creationId xmlns:a16="http://schemas.microsoft.com/office/drawing/2014/main" id="{CFAC9222-50DF-58E4-D6E7-B1477BEE7ACC}"/>
+              </a:ext>
+            </a:extLst>
+          </p:cNvPr>
+          <p:cNvSpPr/>
+          <p:nvPr/>
+        </p:nvSpPr>
+        <p:spPr>
+          <a:xfrm>
+            <a:off x="8238619" y="5615830"/>
+            <a:ext cx="800950" cy="681037"/>
+          </a:xfrm>
+          <a:prstGeom prst="rect">
+            <a:avLst/>
+          </a:prstGeom>
+          <a:solidFill>
+            <a:schemeClr val="tx1"/>
+          </a:solidFill>
+          <a:ln>
+            <a:solidFill>
+              <a:schemeClr val="tx1"/>
+            </a:solidFill>
+          </a:ln>
+        </p:spPr>
+        <p:style>
+          <a:lnRef idx="2">
+            <a:schemeClr val="accent1">
+              <a:shade val="15000"/>
+            </a:schemeClr>
+          </a:lnRef>
+          <a:fillRef idx="1">
+            <a:schemeClr val="accent1"/>
+          </a:fillRef>
+          <a:effectRef idx="0">
+            <a:schemeClr val="accent1"/>
+          </a:effectRef>
+          <a:fontRef idx="minor">
+            <a:schemeClr val="lt1"/>
+          </a:fontRef>
+        </p:style>
+        <p:txBody>
+          <a:bodyPr rtlCol="0" anchor="ctr"/>
+          <a:lstStyle/>
+          <a:p>
+            <a:pPr algn="ctr"/>
+            <a:endParaRPr lang="en-GB"/>
+          </a:p>
+        </p:txBody>
+      </p:sp>
+      <p:sp>
+        <p:nvSpPr>
+          <p:cNvPr id="19" name="Rectangle 18">
+            <a:extLst>
+              <a:ext uri="{FF2B5EF4-FFF2-40B4-BE49-F238E27FC236}">
+                <a16:creationId xmlns:a16="http://schemas.microsoft.com/office/drawing/2014/main" id="{9261E5A3-6C0B-B5A9-DC48-8625C4DC5A71}"/>
+              </a:ext>
+            </a:extLst>
+          </p:cNvPr>
+          <p:cNvSpPr/>
+          <p:nvPr/>
+        </p:nvSpPr>
+        <p:spPr>
+          <a:xfrm rot="20695885">
+            <a:off x="8209390" y="6296867"/>
+            <a:ext cx="800950" cy="681037"/>
+          </a:xfrm>
+          <a:prstGeom prst="rect">
+            <a:avLst/>
+          </a:prstGeom>
+          <a:solidFill>
+            <a:schemeClr val="tx1"/>
+          </a:solidFill>
+          <a:ln>
+            <a:solidFill>
+              <a:schemeClr val="tx1"/>
+            </a:solidFill>
+          </a:ln>
+        </p:spPr>
+        <p:style>
+          <a:lnRef idx="2">
+            <a:schemeClr val="accent1">
+              <a:shade val="15000"/>
+            </a:schemeClr>
+          </a:lnRef>
+          <a:fillRef idx="1">
+            <a:schemeClr val="accent1"/>
+          </a:fillRef>
+          <a:effectRef idx="0">
+            <a:schemeClr val="accent1"/>
+          </a:effectRef>
+          <a:fontRef idx="minor">
+            <a:schemeClr val="lt1"/>
+          </a:fontRef>
+        </p:style>
+        <p:txBody>
+          <a:bodyPr rtlCol="0" anchor="ctr"/>
+          <a:lstStyle/>
+          <a:p>
+            <a:pPr algn="ctr"/>
+            <a:endParaRPr lang="en-GB"/>
+          </a:p>
+        </p:txBody>
+      </p:sp>
+      <p:sp>
+        <p:nvSpPr>
+          <p:cNvPr id="56" name="Rectangle 55">
+            <a:extLst>
+              <a:ext uri="{FF2B5EF4-FFF2-40B4-BE49-F238E27FC236}">
+                <a16:creationId xmlns:a16="http://schemas.microsoft.com/office/drawing/2014/main" id="{E6E0B203-1D45-1D0F-E198-DB1EFEA2B6CB}"/>
+              </a:ext>
+            </a:extLst>
+          </p:cNvPr>
+          <p:cNvSpPr/>
+          <p:nvPr/>
+        </p:nvSpPr>
+        <p:spPr>
+          <a:xfrm rot="20695885">
+            <a:off x="7919098" y="-344497"/>
+            <a:ext cx="800950" cy="956784"/>
+          </a:xfrm>
+          <a:prstGeom prst="rect">
+            <a:avLst/>
+          </a:prstGeom>
+          <a:solidFill>
+            <a:schemeClr val="tx1"/>
+          </a:solidFill>
+          <a:ln>
+            <a:solidFill>
+              <a:schemeClr val="tx1"/>
+            </a:solidFill>
+          </a:ln>
+        </p:spPr>
+        <p:style>
+          <a:lnRef idx="2">
+            <a:schemeClr val="accent1">
+              <a:shade val="15000"/>
+            </a:schemeClr>
+          </a:lnRef>
+          <a:fillRef idx="1">
+            <a:schemeClr val="accent1"/>
+          </a:fillRef>
+          <a:effectRef idx="0">
+            <a:schemeClr val="accent1"/>
+          </a:effectRef>
+          <a:fontRef idx="minor">
+            <a:schemeClr val="lt1"/>
+          </a:fontRef>
+        </p:style>
+        <p:txBody>
+          <a:bodyPr rtlCol="0" anchor="ctr"/>
+          <a:lstStyle/>
+          <a:p>
+            <a:pPr algn="ctr"/>
+            <a:endParaRPr lang="en-GB"/>
+          </a:p>
+        </p:txBody>
+      </p:sp>
+      <p:sp>
+        <p:nvSpPr>
+          <p:cNvPr id="89" name="Rectangle 88">
+            <a:extLst>
+              <a:ext uri="{FF2B5EF4-FFF2-40B4-BE49-F238E27FC236}">
+                <a16:creationId xmlns:a16="http://schemas.microsoft.com/office/drawing/2014/main" id="{CC14C567-75A2-D680-89E8-8FF9131177F5}"/>
+              </a:ext>
+            </a:extLst>
+          </p:cNvPr>
+          <p:cNvSpPr/>
+          <p:nvPr/>
+        </p:nvSpPr>
+        <p:spPr>
+          <a:xfrm rot="808827">
+            <a:off x="7685042" y="-6511794"/>
+            <a:ext cx="800950" cy="681037"/>
+          </a:xfrm>
+          <a:prstGeom prst="rect">
+            <a:avLst/>
+          </a:prstGeom>
+          <a:solidFill>
+            <a:schemeClr val="tx1"/>
+          </a:solidFill>
+          <a:ln>
+            <a:solidFill>
+              <a:schemeClr val="tx1"/>
+            </a:solidFill>
+          </a:ln>
+        </p:spPr>
+        <p:style>
+          <a:lnRef idx="2">
+            <a:schemeClr val="accent1">
+              <a:shade val="15000"/>
+            </a:schemeClr>
+          </a:lnRef>
+          <a:fillRef idx="1">
+            <a:schemeClr val="accent1"/>
+          </a:fillRef>
+          <a:effectRef idx="0">
+            <a:schemeClr val="accent1"/>
+          </a:effectRef>
+          <a:fontRef idx="minor">
+            <a:schemeClr val="lt1"/>
+          </a:fontRef>
+        </p:style>
+        <p:txBody>
+          <a:bodyPr rtlCol="0" anchor="ctr"/>
+          <a:lstStyle/>
+          <a:p>
+            <a:pPr algn="ctr"/>
+            <a:endParaRPr lang="en-GB"/>
+          </a:p>
+        </p:txBody>
+      </p:sp>
+      <p:sp>
+        <p:nvSpPr>
+          <p:cNvPr id="90" name="Rectangle 89">
+            <a:extLst>
+              <a:ext uri="{FF2B5EF4-FFF2-40B4-BE49-F238E27FC236}">
+                <a16:creationId xmlns:a16="http://schemas.microsoft.com/office/drawing/2014/main" id="{39245FA3-95B3-8D09-2B65-C5B89773A2D8}"/>
+              </a:ext>
+            </a:extLst>
+          </p:cNvPr>
+          <p:cNvSpPr/>
+          <p:nvPr/>
+        </p:nvSpPr>
+        <p:spPr>
+          <a:xfrm rot="20508243">
+            <a:off x="7685042" y="-5890796"/>
+            <a:ext cx="800950" cy="681037"/>
+          </a:xfrm>
+          <a:prstGeom prst="rect">
+            <a:avLst/>
+          </a:prstGeom>
+          <a:solidFill>
+            <a:schemeClr val="tx1"/>
+          </a:solidFill>
+          <a:ln>
+            <a:solidFill>
+              <a:schemeClr val="tx1"/>
+            </a:solidFill>
+          </a:ln>
+        </p:spPr>
+        <p:style>
+          <a:lnRef idx="2">
+            <a:schemeClr val="accent1">
+              <a:shade val="15000"/>
+            </a:schemeClr>
+          </a:lnRef>
+          <a:fillRef idx="1">
+            <a:schemeClr val="accent1"/>
+          </a:fillRef>
+          <a:effectRef idx="0">
+            <a:schemeClr val="accent1"/>
+          </a:effectRef>
+          <a:fontRef idx="minor">
+            <a:schemeClr val="lt1"/>
+          </a:fontRef>
+        </p:style>
+        <p:txBody>
+          <a:bodyPr rtlCol="0" anchor="ctr"/>
+          <a:lstStyle/>
+          <a:p>
+            <a:pPr algn="ctr"/>
+            <a:endParaRPr lang="en-GB"/>
+          </a:p>
+        </p:txBody>
+      </p:sp>
+      <p:sp>
+        <p:nvSpPr>
+          <p:cNvPr id="91" name="Rectangle 90">
+            <a:extLst>
+              <a:ext uri="{FF2B5EF4-FFF2-40B4-BE49-F238E27FC236}">
+                <a16:creationId xmlns:a16="http://schemas.microsoft.com/office/drawing/2014/main" id="{DA6E417A-B5DC-B257-8E5E-9EDB725B1DA2}"/>
+              </a:ext>
+            </a:extLst>
+          </p:cNvPr>
+          <p:cNvSpPr/>
+          <p:nvPr/>
+        </p:nvSpPr>
+        <p:spPr>
+          <a:xfrm rot="2076192">
+            <a:off x="7832648" y="-5214467"/>
+            <a:ext cx="800950" cy="681037"/>
+          </a:xfrm>
+          <a:prstGeom prst="rect">
+            <a:avLst/>
+          </a:prstGeom>
+          <a:solidFill>
+            <a:schemeClr val="tx1"/>
+          </a:solidFill>
+          <a:ln>
+            <a:solidFill>
+              <a:schemeClr val="tx1"/>
+            </a:solidFill>
+          </a:ln>
+        </p:spPr>
+        <p:style>
+          <a:lnRef idx="2">
+            <a:schemeClr val="accent1">
+              <a:shade val="15000"/>
+            </a:schemeClr>
+          </a:lnRef>
+          <a:fillRef idx="1">
+            <a:schemeClr val="accent1"/>
+          </a:fillRef>
+          <a:effectRef idx="0">
+            <a:schemeClr val="accent1"/>
+          </a:effectRef>
+          <a:fontRef idx="minor">
+            <a:schemeClr val="lt1"/>
+          </a:fontRef>
+        </p:style>
+        <p:txBody>
+          <a:bodyPr rtlCol="0" anchor="ctr"/>
+          <a:lstStyle/>
+          <a:p>
+            <a:pPr algn="ctr"/>
+            <a:endParaRPr lang="en-GB"/>
+          </a:p>
+        </p:txBody>
+      </p:sp>
+      <p:sp>
+        <p:nvSpPr>
+          <p:cNvPr id="92" name="Rectangle 91">
+            <a:extLst>
+              <a:ext uri="{FF2B5EF4-FFF2-40B4-BE49-F238E27FC236}">
+                <a16:creationId xmlns:a16="http://schemas.microsoft.com/office/drawing/2014/main" id="{22E3C395-9D7C-82E5-6931-A22AD3EF2281}"/>
+              </a:ext>
+            </a:extLst>
+          </p:cNvPr>
+          <p:cNvSpPr/>
+          <p:nvPr/>
+        </p:nvSpPr>
+        <p:spPr>
+          <a:xfrm rot="20508243">
+            <a:off x="7921843" y="-4299295"/>
+            <a:ext cx="800950" cy="681037"/>
+          </a:xfrm>
+          <a:prstGeom prst="rect">
+            <a:avLst/>
+          </a:prstGeom>
+          <a:solidFill>
+            <a:schemeClr val="tx1"/>
+          </a:solidFill>
+          <a:ln>
+            <a:solidFill>
+              <a:schemeClr val="tx1"/>
+            </a:solidFill>
+          </a:ln>
+        </p:spPr>
+        <p:style>
+          <a:lnRef idx="2">
+            <a:schemeClr val="accent1">
+              <a:shade val="15000"/>
+            </a:schemeClr>
+          </a:lnRef>
+          <a:fillRef idx="1">
+            <a:schemeClr val="accent1"/>
+          </a:fillRef>
+          <a:effectRef idx="0">
+            <a:schemeClr val="accent1"/>
+          </a:effectRef>
+          <a:fontRef idx="minor">
+            <a:schemeClr val="lt1"/>
+          </a:fontRef>
+        </p:style>
+        <p:txBody>
+          <a:bodyPr rtlCol="0" anchor="ctr"/>
+          <a:lstStyle/>
+          <a:p>
+            <a:pPr algn="ctr"/>
+            <a:endParaRPr lang="en-GB"/>
+          </a:p>
+        </p:txBody>
+      </p:sp>
+      <p:sp>
+        <p:nvSpPr>
+          <p:cNvPr id="93" name="Rectangle 92">
+            <a:extLst>
+              <a:ext uri="{FF2B5EF4-FFF2-40B4-BE49-F238E27FC236}">
+                <a16:creationId xmlns:a16="http://schemas.microsoft.com/office/drawing/2014/main" id="{A00FF6DE-CD04-B256-D6ED-DB4839881FFE}"/>
+              </a:ext>
+            </a:extLst>
+          </p:cNvPr>
+          <p:cNvSpPr/>
+          <p:nvPr/>
+        </p:nvSpPr>
+        <p:spPr>
+          <a:xfrm rot="20508243">
+            <a:off x="7921844" y="-3715811"/>
+            <a:ext cx="800950" cy="681037"/>
+          </a:xfrm>
+          <a:prstGeom prst="rect">
+            <a:avLst/>
+          </a:prstGeom>
+          <a:solidFill>
+            <a:schemeClr val="tx1"/>
+          </a:solidFill>
+          <a:ln>
+            <a:solidFill>
+              <a:schemeClr val="tx1"/>
+            </a:solidFill>
+          </a:ln>
+        </p:spPr>
+        <p:style>
+          <a:lnRef idx="2">
+            <a:schemeClr val="accent1">
+              <a:shade val="15000"/>
+            </a:schemeClr>
+          </a:lnRef>
+          <a:fillRef idx="1">
+            <a:schemeClr val="accent1"/>
+          </a:fillRef>
+          <a:effectRef idx="0">
+            <a:schemeClr val="accent1"/>
+          </a:effectRef>
+          <a:fontRef idx="minor">
+            <a:schemeClr val="lt1"/>
+          </a:fontRef>
+        </p:style>
+        <p:txBody>
+          <a:bodyPr rtlCol="0" anchor="ctr"/>
+          <a:lstStyle/>
+          <a:p>
+            <a:pPr algn="ctr"/>
+            <a:endParaRPr lang="en-GB"/>
+          </a:p>
+        </p:txBody>
+      </p:sp>
+      <p:sp>
+        <p:nvSpPr>
+          <p:cNvPr id="94" name="Rectangle 93">
+            <a:extLst>
+              <a:ext uri="{FF2B5EF4-FFF2-40B4-BE49-F238E27FC236}">
+                <a16:creationId xmlns:a16="http://schemas.microsoft.com/office/drawing/2014/main" id="{6D85D12D-D0FC-05E4-40A9-581D844265E4}"/>
+              </a:ext>
+            </a:extLst>
+          </p:cNvPr>
+          <p:cNvSpPr/>
+          <p:nvPr/>
+        </p:nvSpPr>
+        <p:spPr>
+          <a:xfrm rot="20140826">
+            <a:off x="7904660" y="-2945208"/>
+            <a:ext cx="800950" cy="681037"/>
+          </a:xfrm>
+          <a:prstGeom prst="rect">
+            <a:avLst/>
+          </a:prstGeom>
+          <a:solidFill>
+            <a:schemeClr val="tx1"/>
+          </a:solidFill>
+          <a:ln>
+            <a:solidFill>
+              <a:schemeClr val="tx1"/>
+            </a:solidFill>
+          </a:ln>
+        </p:spPr>
+        <p:style>
+          <a:lnRef idx="2">
+            <a:schemeClr val="accent1">
+              <a:shade val="15000"/>
+            </a:schemeClr>
+          </a:lnRef>
+          <a:fillRef idx="1">
+            <a:schemeClr val="accent1"/>
+          </a:fillRef>
+          <a:effectRef idx="0">
+            <a:schemeClr val="accent1"/>
+          </a:effectRef>
+          <a:fontRef idx="minor">
+            <a:schemeClr val="lt1"/>
+          </a:fontRef>
+        </p:style>
+        <p:txBody>
+          <a:bodyPr rtlCol="0" anchor="ctr"/>
+          <a:lstStyle/>
+          <a:p>
+            <a:pPr algn="ctr"/>
+            <a:endParaRPr lang="en-GB"/>
+          </a:p>
+        </p:txBody>
+      </p:sp>
+      <p:sp>
+        <p:nvSpPr>
+          <p:cNvPr id="95" name="Rectangle 94">
+            <a:extLst>
+              <a:ext uri="{FF2B5EF4-FFF2-40B4-BE49-F238E27FC236}">
+                <a16:creationId xmlns:a16="http://schemas.microsoft.com/office/drawing/2014/main" id="{6FF99DB0-3A2A-FE0F-1FD9-62FB285245AD}"/>
+              </a:ext>
+            </a:extLst>
+          </p:cNvPr>
+          <p:cNvSpPr/>
+          <p:nvPr/>
+        </p:nvSpPr>
+        <p:spPr>
+          <a:xfrm rot="20779876">
+            <a:off x="7904661" y="-2025124"/>
+            <a:ext cx="800950" cy="681037"/>
+          </a:xfrm>
+          <a:prstGeom prst="rect">
+            <a:avLst/>
+          </a:prstGeom>
+          <a:solidFill>
+            <a:schemeClr val="tx1"/>
+          </a:solidFill>
+          <a:ln>
+            <a:solidFill>
+              <a:schemeClr val="tx1"/>
+            </a:solidFill>
+          </a:ln>
+        </p:spPr>
+        <p:style>
+          <a:lnRef idx="2">
+            <a:schemeClr val="accent1">
+              <a:shade val="15000"/>
+            </a:schemeClr>
+          </a:lnRef>
+          <a:fillRef idx="1">
+            <a:schemeClr val="accent1"/>
+          </a:fillRef>
+          <a:effectRef idx="0">
+            <a:schemeClr val="accent1"/>
+          </a:effectRef>
+          <a:fontRef idx="minor">
+            <a:schemeClr val="lt1"/>
+          </a:fontRef>
+        </p:style>
+        <p:txBody>
+          <a:bodyPr rtlCol="0" anchor="ctr"/>
+          <a:lstStyle/>
+          <a:p>
+            <a:pPr algn="ctr"/>
+            <a:endParaRPr lang="en-GB"/>
+          </a:p>
+        </p:txBody>
+      </p:sp>
+      <p:sp>
+        <p:nvSpPr>
+          <p:cNvPr id="96" name="Rectangle 95">
+            <a:extLst>
+              <a:ext uri="{FF2B5EF4-FFF2-40B4-BE49-F238E27FC236}">
+                <a16:creationId xmlns:a16="http://schemas.microsoft.com/office/drawing/2014/main" id="{90B74BE0-1044-5702-C714-CCC81B702A2C}"/>
+              </a:ext>
+            </a:extLst>
+          </p:cNvPr>
+          <p:cNvSpPr/>
+          <p:nvPr/>
+        </p:nvSpPr>
+        <p:spPr>
+          <a:xfrm>
+            <a:off x="7933889" y="-1051254"/>
+            <a:ext cx="800950" cy="681037"/>
+          </a:xfrm>
+          <a:prstGeom prst="rect">
+            <a:avLst/>
+          </a:prstGeom>
+          <a:solidFill>
+            <a:schemeClr val="tx1"/>
+          </a:solidFill>
+          <a:ln>
+            <a:solidFill>
+              <a:schemeClr val="tx1"/>
+            </a:solidFill>
+          </a:ln>
+        </p:spPr>
+        <p:style>
+          <a:lnRef idx="2">
+            <a:schemeClr val="accent1">
+              <a:shade val="15000"/>
+            </a:schemeClr>
+          </a:lnRef>
+          <a:fillRef idx="1">
+            <a:schemeClr val="accent1"/>
+          </a:fillRef>
+          <a:effectRef idx="0">
+            <a:schemeClr val="accent1"/>
+          </a:effectRef>
+          <a:fontRef idx="minor">
+            <a:schemeClr val="lt1"/>
+          </a:fontRef>
+        </p:style>
+        <p:txBody>
+          <a:bodyPr rtlCol="0" anchor="ctr"/>
+          <a:lstStyle/>
+          <a:p>
+            <a:pPr algn="ctr"/>
+            <a:endParaRPr lang="en-GB"/>
+          </a:p>
+        </p:txBody>
+      </p:sp>
+      <p:sp>
+        <p:nvSpPr>
+          <p:cNvPr id="97" name="Rectangle 96">
+            <a:extLst>
+              <a:ext uri="{FF2B5EF4-FFF2-40B4-BE49-F238E27FC236}">
+                <a16:creationId xmlns:a16="http://schemas.microsoft.com/office/drawing/2014/main" id="{2FF188AD-7BDF-8183-2507-6F0295DE09B9}"/>
+              </a:ext>
+            </a:extLst>
+          </p:cNvPr>
+          <p:cNvSpPr/>
+          <p:nvPr/>
+        </p:nvSpPr>
+        <p:spPr>
+          <a:xfrm rot="20695885">
+            <a:off x="7904660" y="-370217"/>
+            <a:ext cx="800950" cy="681037"/>
+          </a:xfrm>
+          <a:prstGeom prst="rect">
+            <a:avLst/>
+          </a:prstGeom>
+          <a:solidFill>
+            <a:schemeClr val="tx1"/>
+          </a:solidFill>
+          <a:ln>
+            <a:solidFill>
+              <a:schemeClr val="tx1"/>
+            </a:solidFill>
+          </a:ln>
+        </p:spPr>
+        <p:style>
+          <a:lnRef idx="2">
+            <a:schemeClr val="accent1">
+              <a:shade val="15000"/>
+            </a:schemeClr>
+          </a:lnRef>
+          <a:fillRef idx="1">
+            <a:schemeClr val="accent1"/>
+          </a:fillRef>
+          <a:effectRef idx="0">
+            <a:schemeClr val="accent1"/>
+          </a:effectRef>
+          <a:fontRef idx="minor">
+            <a:schemeClr val="lt1"/>
+          </a:fontRef>
+        </p:style>
+        <p:txBody>
+          <a:bodyPr rtlCol="0" anchor="ctr"/>
+          <a:lstStyle/>
+          <a:p>
+            <a:pPr algn="ctr"/>
+            <a:endParaRPr lang="en-GB"/>
+          </a:p>
+        </p:txBody>
+      </p:sp>
+      <p:sp>
+        <p:nvSpPr>
+          <p:cNvPr id="98" name="Rectangle 97">
+            <a:extLst>
+              <a:ext uri="{FF2B5EF4-FFF2-40B4-BE49-F238E27FC236}">
+                <a16:creationId xmlns:a16="http://schemas.microsoft.com/office/drawing/2014/main" id="{766FBD50-3705-C199-59F7-84275ABA7054}"/>
+              </a:ext>
+            </a:extLst>
+          </p:cNvPr>
+          <p:cNvSpPr/>
+          <p:nvPr/>
+        </p:nvSpPr>
+        <p:spPr>
+          <a:xfrm rot="20695885">
+            <a:off x="7614368" y="-7011581"/>
+            <a:ext cx="800950" cy="956784"/>
+          </a:xfrm>
+          <a:prstGeom prst="rect">
+            <a:avLst/>
+          </a:prstGeom>
+          <a:solidFill>
+            <a:schemeClr val="tx1"/>
+          </a:solidFill>
+          <a:ln>
+            <a:solidFill>
+              <a:schemeClr val="tx1"/>
+            </a:solidFill>
+          </a:ln>
+        </p:spPr>
+        <p:style>
+          <a:lnRef idx="2">
+            <a:schemeClr val="accent1">
+              <a:shade val="15000"/>
+            </a:schemeClr>
+          </a:lnRef>
+          <a:fillRef idx="1">
+            <a:schemeClr val="accent1"/>
+          </a:fillRef>
+          <a:effectRef idx="0">
+            <a:schemeClr val="accent1"/>
+          </a:effectRef>
+          <a:fontRef idx="minor">
+            <a:schemeClr val="lt1"/>
+          </a:fontRef>
+        </p:style>
+        <p:txBody>
+          <a:bodyPr rtlCol="0" anchor="ctr"/>
+          <a:lstStyle/>
+          <a:p>
+            <a:pPr algn="ctr"/>
+            <a:endParaRPr lang="en-GB"/>
           </a:p>
         </p:txBody>
       </p:sp>
@@ -3806,15 +6249,194 @@
             <p:ph idx="1"/>
           </p:nvPr>
         </p:nvSpPr>
-        <p:spPr/>
-        <p:txBody>
-          <a:bodyPr/>
-          <a:lstStyle/>
-          <a:p>
-            <a:endParaRPr lang="en-GB"/>
-          </a:p>
-        </p:txBody>
-      </p:sp>
+        <p:spPr>
+          <a:xfrm>
+            <a:off x="838201" y="1825625"/>
+            <a:ext cx="7454900" cy="4351338"/>
+          </a:xfrm>
+        </p:spPr>
+        <p:txBody>
+          <a:bodyPr>
+            <a:normAutofit fontScale="77500" lnSpcReduction="20000"/>
+          </a:bodyPr>
+          <a:lstStyle/>
+          <a:p>
+            <a:r>
+              <a:rPr lang="en-GB" dirty="0">
+                <a:solidFill>
+                  <a:schemeClr val="bg1"/>
+                </a:solidFill>
+              </a:rPr>
+              <a:t>The run time unit testing system is a unit testing library which contains two main classes which are </a:t>
+            </a:r>
+            <a:r>
+              <a:rPr lang="en-GB" dirty="0" err="1">
+                <a:solidFill>
+                  <a:schemeClr val="bg1"/>
+                </a:solidFill>
+              </a:rPr>
+              <a:t>RTUTSTreeConstructor</a:t>
+            </a:r>
+            <a:r>
+              <a:rPr lang="en-GB" dirty="0">
+                <a:solidFill>
+                  <a:schemeClr val="bg1"/>
+                </a:solidFill>
+              </a:rPr>
+              <a:t>, and </a:t>
+            </a:r>
+            <a:r>
+              <a:rPr lang="en-GB" dirty="0" err="1">
+                <a:solidFill>
+                  <a:schemeClr val="bg1"/>
+                </a:solidFill>
+              </a:rPr>
+              <a:t>RTUTSBindedListConstructor</a:t>
+            </a:r>
+            <a:r>
+              <a:rPr lang="en-GB" dirty="0">
+                <a:solidFill>
+                  <a:schemeClr val="bg1"/>
+                </a:solidFill>
+              </a:rPr>
+              <a:t>.</a:t>
+            </a:r>
+          </a:p>
+          <a:p>
+            <a:endParaRPr lang="en-GB" dirty="0">
+              <a:solidFill>
+                <a:schemeClr val="bg1"/>
+              </a:solidFill>
+            </a:endParaRPr>
+          </a:p>
+          <a:p>
+            <a:r>
+              <a:rPr lang="en-GB" dirty="0">
+                <a:solidFill>
+                  <a:schemeClr val="bg1"/>
+                </a:solidFill>
+              </a:rPr>
+              <a:t>When a object of theses classes is created, function names can then be passed to it then those functions/test will be executed if they also return </a:t>
+            </a:r>
+            <a:r>
+              <a:rPr lang="en-GB" dirty="0" err="1">
+                <a:solidFill>
+                  <a:schemeClr val="bg1"/>
+                </a:solidFill>
+              </a:rPr>
+              <a:t>RTUTSUnitTestResults</a:t>
+            </a:r>
+            <a:r>
+              <a:rPr lang="en-GB" dirty="0">
+                <a:solidFill>
+                  <a:schemeClr val="bg1"/>
+                </a:solidFill>
+              </a:rPr>
+              <a:t> which is a object that can contain anything you wish to be returned from a test.</a:t>
+            </a:r>
+          </a:p>
+          <a:p>
+            <a:endParaRPr lang="en-GB" dirty="0">
+              <a:solidFill>
+                <a:schemeClr val="bg1"/>
+              </a:solidFill>
+            </a:endParaRPr>
+          </a:p>
+          <a:p>
+            <a:r>
+              <a:rPr lang="en-GB" dirty="0">
+                <a:solidFill>
+                  <a:schemeClr val="bg1"/>
+                </a:solidFill>
+              </a:rPr>
+              <a:t>Once </a:t>
+            </a:r>
+            <a:r>
+              <a:rPr lang="en-GB" dirty="0" err="1">
+                <a:solidFill>
+                  <a:schemeClr val="bg1"/>
+                </a:solidFill>
+              </a:rPr>
+              <a:t>RunTests</a:t>
+            </a:r>
+            <a:r>
+              <a:rPr lang="en-GB" dirty="0">
+                <a:solidFill>
+                  <a:schemeClr val="bg1"/>
+                </a:solidFill>
+              </a:rPr>
+              <a:t> has been executed on the object the results can then be sent out to the console by sending the constructors data container to </a:t>
+            </a:r>
+            <a:r>
+              <a:rPr lang="en-GB" dirty="0" err="1">
+                <a:solidFill>
+                  <a:schemeClr val="bg1"/>
+                </a:solidFill>
+              </a:rPr>
+              <a:t>ConOutputTestResults</a:t>
+            </a:r>
+            <a:r>
+              <a:rPr lang="en-GB" dirty="0">
+                <a:solidFill>
+                  <a:schemeClr val="bg1"/>
+                </a:solidFill>
+              </a:rPr>
+              <a:t>.</a:t>
+            </a:r>
+          </a:p>
+          <a:p>
+            <a:endParaRPr lang="en-GB" dirty="0">
+              <a:solidFill>
+                <a:schemeClr val="bg1"/>
+              </a:solidFill>
+            </a:endParaRPr>
+          </a:p>
+          <a:p>
+            <a:endParaRPr lang="en-GB" dirty="0">
+              <a:solidFill>
+                <a:schemeClr val="bg1"/>
+              </a:solidFill>
+            </a:endParaRPr>
+          </a:p>
+        </p:txBody>
+      </p:sp>
+      <p:pic>
+        <p:nvPicPr>
+          <p:cNvPr id="8" name="Picture 7">
+            <a:extLst>
+              <a:ext uri="{FF2B5EF4-FFF2-40B4-BE49-F238E27FC236}">
+                <a16:creationId xmlns:a16="http://schemas.microsoft.com/office/drawing/2014/main" id="{9D8306CF-6A10-16B0-50DE-BCE5E69B3AA4}"/>
+              </a:ext>
+            </a:extLst>
+          </p:cNvPr>
+          <p:cNvPicPr>
+            <a:picLocks noChangeAspect="1"/>
+          </p:cNvPicPr>
+          <p:nvPr/>
+        </p:nvPicPr>
+        <p:blipFill>
+          <a:blip r:embed="rId4">
+            <a:extLst>
+              <a:ext uri="{28A0092B-C50C-407E-A947-70E740481C1C}">
+                <a14:useLocalDpi xmlns:a14="http://schemas.microsoft.com/office/drawing/2010/main" val="0"/>
+              </a:ext>
+            </a:extLst>
+          </a:blip>
+          <a:srcRect r="57812"/>
+          <a:stretch>
+            <a:fillRect/>
+          </a:stretch>
+        </p:blipFill>
+        <p:spPr>
+          <a:xfrm>
+            <a:off x="8544560" y="1825625"/>
+            <a:ext cx="3520439" cy="3915569"/>
+          </a:xfrm>
+          <a:prstGeom prst="rect">
+            <a:avLst/>
+          </a:prstGeom>
+        </p:spPr>
+      </p:pic>
     </p:spTree>
     <p:extLst>
       <p:ext uri="{BB962C8B-B14F-4D97-AF65-F5344CB8AC3E}">
@@ -3825,6 +6447,519 @@
   <p:clrMapOvr>
     <a:masterClrMapping/>
   </p:clrMapOvr>
+  <p:timing>
+    <p:tnLst>
+      <p:par>
+        <p:cTn id="1" dur="indefinite" restart="never" nodeType="tmRoot">
+          <p:childTnLst>
+            <p:seq concurrent="1" nextAc="seek">
+              <p:cTn id="2" dur="indefinite" nodeType="mainSeq">
+                <p:childTnLst>
+                  <p:par>
+                    <p:cTn id="3" fill="hold">
+                      <p:stCondLst>
+                        <p:cond delay="indefinite"/>
+                        <p:cond evt="onBegin" delay="0">
+                          <p:tn val="2"/>
+                        </p:cond>
+                      </p:stCondLst>
+                      <p:childTnLst>
+                        <p:par>
+                          <p:cTn id="4" fill="hold">
+                            <p:stCondLst>
+                              <p:cond delay="0"/>
+                            </p:stCondLst>
+                            <p:childTnLst>
+                              <p:par>
+                                <p:cTn id="5" presetID="42" presetClass="path" presetSubtype="0" repeatCount="indefinite" autoRev="1" fill="hold" grpId="0" nodeType="withEffect">
+                                  <p:stCondLst>
+                                    <p:cond delay="0"/>
+                                  </p:stCondLst>
+                                  <p:childTnLst>
+                                    <p:animMotion origin="layout" path="M -1.04167E-6 -2.22222E-6 L 0.02253 0.95556 " pathEditMode="relative" rAng="0" ptsTypes="AA">
+                                      <p:cBhvr>
+                                        <p:cTn id="6" dur="40000" fill="hold"/>
+                                        <p:tgtEl>
+                                          <p:spTgt spid="10"/>
+                                        </p:tgtEl>
+                                        <p:attrNameLst>
+                                          <p:attrName>ppt_x</p:attrName>
+                                          <p:attrName>ppt_y</p:attrName>
+                                        </p:attrNameLst>
+                                      </p:cBhvr>
+                                      <p:rCtr x="1120" y="47778"/>
+                                    </p:animMotion>
+                                  </p:childTnLst>
+                                </p:cTn>
+                              </p:par>
+                              <p:par>
+                                <p:cTn id="7" presetID="42" presetClass="path" presetSubtype="0" repeatCount="indefinite" autoRev="1" fill="hold" grpId="0" nodeType="withEffect">
+                                  <p:stCondLst>
+                                    <p:cond delay="0"/>
+                                  </p:stCondLst>
+                                  <p:childTnLst>
+                                    <p:animMotion origin="layout" path="M -1.04167E-6 -1.48148E-6 L 0.02253 0.95556 " pathEditMode="relative" rAng="0" ptsTypes="AA">
+                                      <p:cBhvr>
+                                        <p:cTn id="8" dur="40000" fill="hold"/>
+                                        <p:tgtEl>
+                                          <p:spTgt spid="11"/>
+                                        </p:tgtEl>
+                                        <p:attrNameLst>
+                                          <p:attrName>ppt_x</p:attrName>
+                                          <p:attrName>ppt_y</p:attrName>
+                                        </p:attrNameLst>
+                                      </p:cBhvr>
+                                      <p:rCtr x="1120" y="47778"/>
+                                    </p:animMotion>
+                                  </p:childTnLst>
+                                </p:cTn>
+                              </p:par>
+                              <p:par>
+                                <p:cTn id="9" presetID="42" presetClass="path" presetSubtype="0" repeatCount="indefinite" autoRev="1" fill="hold" grpId="0" nodeType="withEffect">
+                                  <p:stCondLst>
+                                    <p:cond delay="0"/>
+                                  </p:stCondLst>
+                                  <p:childTnLst>
+                                    <p:animMotion origin="layout" path="M -4.16667E-7 -2.59259E-6 L 0.02253 0.95556 " pathEditMode="relative" rAng="0" ptsTypes="AA">
+                                      <p:cBhvr>
+                                        <p:cTn id="10" dur="40000" fill="hold"/>
+                                        <p:tgtEl>
+                                          <p:spTgt spid="12"/>
+                                        </p:tgtEl>
+                                        <p:attrNameLst>
+                                          <p:attrName>ppt_x</p:attrName>
+                                          <p:attrName>ppt_y</p:attrName>
+                                        </p:attrNameLst>
+                                      </p:cBhvr>
+                                      <p:rCtr x="1120" y="47778"/>
+                                    </p:animMotion>
+                                  </p:childTnLst>
+                                </p:cTn>
+                              </p:par>
+                              <p:par>
+                                <p:cTn id="11" presetID="42" presetClass="path" presetSubtype="0" repeatCount="indefinite" autoRev="1" fill="hold" grpId="0" nodeType="withEffect">
+                                  <p:stCondLst>
+                                    <p:cond delay="0"/>
+                                  </p:stCondLst>
+                                  <p:childTnLst>
+                                    <p:animMotion origin="layout" path="M -2.08333E-6 2.59259E-6 L 0.02253 0.95555 " pathEditMode="relative" rAng="0" ptsTypes="AA">
+                                      <p:cBhvr>
+                                        <p:cTn id="12" dur="40000" fill="hold"/>
+                                        <p:tgtEl>
+                                          <p:spTgt spid="13"/>
+                                        </p:tgtEl>
+                                        <p:attrNameLst>
+                                          <p:attrName>ppt_x</p:attrName>
+                                          <p:attrName>ppt_y</p:attrName>
+                                        </p:attrNameLst>
+                                      </p:cBhvr>
+                                      <p:rCtr x="1120" y="47778"/>
+                                    </p:animMotion>
+                                  </p:childTnLst>
+                                </p:cTn>
+                              </p:par>
+                              <p:par>
+                                <p:cTn id="13" presetID="42" presetClass="path" presetSubtype="0" repeatCount="indefinite" autoRev="1" fill="hold" grpId="0" nodeType="withEffect">
+                                  <p:stCondLst>
+                                    <p:cond delay="0"/>
+                                  </p:stCondLst>
+                                  <p:childTnLst>
+                                    <p:animMotion origin="layout" path="M -2.08333E-6 -1.11111E-6 L 0.02253 0.95556 " pathEditMode="relative" rAng="0" ptsTypes="AA">
+                                      <p:cBhvr>
+                                        <p:cTn id="14" dur="40000" fill="hold"/>
+                                        <p:tgtEl>
+                                          <p:spTgt spid="14"/>
+                                        </p:tgtEl>
+                                        <p:attrNameLst>
+                                          <p:attrName>ppt_x</p:attrName>
+                                          <p:attrName>ppt_y</p:attrName>
+                                        </p:attrNameLst>
+                                      </p:cBhvr>
+                                      <p:rCtr x="1120" y="47778"/>
+                                    </p:animMotion>
+                                  </p:childTnLst>
+                                </p:cTn>
+                              </p:par>
+                              <p:par>
+                                <p:cTn id="15" presetID="42" presetClass="path" presetSubtype="0" repeatCount="indefinite" autoRev="1" fill="hold" grpId="0" nodeType="withEffect">
+                                  <p:stCondLst>
+                                    <p:cond delay="0"/>
+                                  </p:stCondLst>
+                                  <p:childTnLst>
+                                    <p:animMotion origin="layout" path="M 2.08333E-7 3.7037E-7 L 0.02253 0.95556 " pathEditMode="relative" rAng="0" ptsTypes="AA">
+                                      <p:cBhvr>
+                                        <p:cTn id="16" dur="40000" fill="hold"/>
+                                        <p:tgtEl>
+                                          <p:spTgt spid="15"/>
+                                        </p:tgtEl>
+                                        <p:attrNameLst>
+                                          <p:attrName>ppt_x</p:attrName>
+                                          <p:attrName>ppt_y</p:attrName>
+                                        </p:attrNameLst>
+                                      </p:cBhvr>
+                                      <p:rCtr x="1120" y="47778"/>
+                                    </p:animMotion>
+                                  </p:childTnLst>
+                                </p:cTn>
+                              </p:par>
+                              <p:par>
+                                <p:cTn id="17" presetID="42" presetClass="path" presetSubtype="0" repeatCount="indefinite" autoRev="1" fill="hold" grpId="0" nodeType="withEffect">
+                                  <p:stCondLst>
+                                    <p:cond delay="0"/>
+                                  </p:stCondLst>
+                                  <p:childTnLst>
+                                    <p:animMotion origin="layout" path="M 2.08333E-7 1.11111E-6 L 0.02253 0.95555 " pathEditMode="relative" rAng="0" ptsTypes="AA">
+                                      <p:cBhvr>
+                                        <p:cTn id="18" dur="40000" fill="hold"/>
+                                        <p:tgtEl>
+                                          <p:spTgt spid="17"/>
+                                        </p:tgtEl>
+                                        <p:attrNameLst>
+                                          <p:attrName>ppt_x</p:attrName>
+                                          <p:attrName>ppt_y</p:attrName>
+                                        </p:attrNameLst>
+                                      </p:cBhvr>
+                                      <p:rCtr x="1120" y="47778"/>
+                                    </p:animMotion>
+                                  </p:childTnLst>
+                                </p:cTn>
+                              </p:par>
+                              <p:par>
+                                <p:cTn id="19" presetID="42" presetClass="path" presetSubtype="0" repeatCount="indefinite" autoRev="1" fill="hold" grpId="0" nodeType="withEffect">
+                                  <p:stCondLst>
+                                    <p:cond delay="0"/>
+                                  </p:stCondLst>
+                                  <p:childTnLst>
+                                    <p:animMotion origin="layout" path="M -3.75E-6 1.48148E-6 L 0.02253 0.95555 " pathEditMode="relative" rAng="0" ptsTypes="AA">
+                                      <p:cBhvr>
+                                        <p:cTn id="20" dur="40000" fill="hold"/>
+                                        <p:tgtEl>
+                                          <p:spTgt spid="18"/>
+                                        </p:tgtEl>
+                                        <p:attrNameLst>
+                                          <p:attrName>ppt_x</p:attrName>
+                                          <p:attrName>ppt_y</p:attrName>
+                                        </p:attrNameLst>
+                                      </p:cBhvr>
+                                      <p:rCtr x="1120" y="47778"/>
+                                    </p:animMotion>
+                                  </p:childTnLst>
+                                </p:cTn>
+                              </p:par>
+                              <p:par>
+                                <p:cTn id="21" presetID="42" presetClass="path" presetSubtype="0" repeatCount="indefinite" autoRev="1" fill="hold" grpId="0" nodeType="withEffect">
+                                  <p:stCondLst>
+                                    <p:cond delay="0"/>
+                                  </p:stCondLst>
+                                  <p:childTnLst>
+                                    <p:animMotion origin="layout" path="M 2.08333E-7 -4.07407E-6 L 0.02253 0.95556 " pathEditMode="relative" rAng="0" ptsTypes="AA">
+                                      <p:cBhvr>
+                                        <p:cTn id="22" dur="40000" fill="hold"/>
+                                        <p:tgtEl>
+                                          <p:spTgt spid="19"/>
+                                        </p:tgtEl>
+                                        <p:attrNameLst>
+                                          <p:attrName>ppt_x</p:attrName>
+                                          <p:attrName>ppt_y</p:attrName>
+                                        </p:attrNameLst>
+                                      </p:cBhvr>
+                                      <p:rCtr x="1120" y="47778"/>
+                                    </p:animMotion>
+                                  </p:childTnLst>
+                                </p:cTn>
+                              </p:par>
+                              <p:par>
+                                <p:cTn id="23" presetID="42" presetClass="path" presetSubtype="0" repeatCount="indefinite" autoRev="1" fill="hold" grpId="0" nodeType="withEffect">
+                                  <p:stCondLst>
+                                    <p:cond delay="0"/>
+                                  </p:stCondLst>
+                                  <p:childTnLst>
+                                    <p:animMotion origin="layout" path="M -1.66667E-6 -4.44444E-6 L 0.02253 0.95556 " pathEditMode="relative" rAng="0" ptsTypes="AA">
+                                      <p:cBhvr>
+                                        <p:cTn id="24" dur="40000" fill="hold"/>
+                                        <p:tgtEl>
+                                          <p:spTgt spid="56"/>
+                                        </p:tgtEl>
+                                        <p:attrNameLst>
+                                          <p:attrName>ppt_x</p:attrName>
+                                          <p:attrName>ppt_y</p:attrName>
+                                        </p:attrNameLst>
+                                      </p:cBhvr>
+                                      <p:rCtr x="1120" y="47778"/>
+                                    </p:animMotion>
+                                  </p:childTnLst>
+                                </p:cTn>
+                              </p:par>
+                              <p:par>
+                                <p:cTn id="25" presetID="42" presetClass="path" presetSubtype="0" repeatCount="indefinite" autoRev="1" fill="hold" grpId="0" nodeType="withEffect">
+                                  <p:stCondLst>
+                                    <p:cond delay="0"/>
+                                  </p:stCondLst>
+                                  <p:childTnLst>
+                                    <p:animMotion origin="layout" path="M -1.04167E-6 -1.48148E-6 L 0.02253 0.95556 " pathEditMode="relative" rAng="0" ptsTypes="AA">
+                                      <p:cBhvr>
+                                        <p:cTn id="26" dur="40000" fill="hold"/>
+                                        <p:tgtEl>
+                                          <p:spTgt spid="89"/>
+                                        </p:tgtEl>
+                                        <p:attrNameLst>
+                                          <p:attrName>ppt_x</p:attrName>
+                                          <p:attrName>ppt_y</p:attrName>
+                                        </p:attrNameLst>
+                                      </p:cBhvr>
+                                      <p:rCtr x="1120" y="47778"/>
+                                    </p:animMotion>
+                                  </p:childTnLst>
+                                </p:cTn>
+                              </p:par>
+                              <p:par>
+                                <p:cTn id="27" presetID="42" presetClass="path" presetSubtype="0" repeatCount="indefinite" autoRev="1" fill="hold" grpId="0" nodeType="withEffect">
+                                  <p:stCondLst>
+                                    <p:cond delay="0"/>
+                                  </p:stCondLst>
+                                  <p:childTnLst>
+                                    <p:animMotion origin="layout" path="M -1.04167E-6 -7.40741E-7 L 0.02253 0.95556 " pathEditMode="relative" rAng="0" ptsTypes="AA">
+                                      <p:cBhvr>
+                                        <p:cTn id="28" dur="40000" fill="hold"/>
+                                        <p:tgtEl>
+                                          <p:spTgt spid="90"/>
+                                        </p:tgtEl>
+                                        <p:attrNameLst>
+                                          <p:attrName>ppt_x</p:attrName>
+                                          <p:attrName>ppt_y</p:attrName>
+                                        </p:attrNameLst>
+                                      </p:cBhvr>
+                                      <p:rCtr x="1120" y="47778"/>
+                                    </p:animMotion>
+                                  </p:childTnLst>
+                                </p:cTn>
+                              </p:par>
+                              <p:par>
+                                <p:cTn id="29" presetID="42" presetClass="path" presetSubtype="0" repeatCount="indefinite" autoRev="1" fill="hold" grpId="0" nodeType="withEffect">
+                                  <p:stCondLst>
+                                    <p:cond delay="0"/>
+                                  </p:stCondLst>
+                                  <p:childTnLst>
+                                    <p:animMotion origin="layout" path="M -4.16667E-7 -1.85185E-6 L 0.02253 0.95556 " pathEditMode="relative" rAng="0" ptsTypes="AA">
+                                      <p:cBhvr>
+                                        <p:cTn id="30" dur="40000" fill="hold"/>
+                                        <p:tgtEl>
+                                          <p:spTgt spid="91"/>
+                                        </p:tgtEl>
+                                        <p:attrNameLst>
+                                          <p:attrName>ppt_x</p:attrName>
+                                          <p:attrName>ppt_y</p:attrName>
+                                        </p:attrNameLst>
+                                      </p:cBhvr>
+                                      <p:rCtr x="1120" y="47778"/>
+                                    </p:animMotion>
+                                  </p:childTnLst>
+                                </p:cTn>
+                              </p:par>
+                              <p:par>
+                                <p:cTn id="31" presetID="42" presetClass="path" presetSubtype="0" repeatCount="indefinite" autoRev="1" fill="hold" grpId="0" nodeType="withEffect">
+                                  <p:stCondLst>
+                                    <p:cond delay="0"/>
+                                  </p:stCondLst>
+                                  <p:childTnLst>
+                                    <p:animMotion origin="layout" path="M -2.08333E-6 3.33333E-6 L 0.02253 0.95555 " pathEditMode="relative" rAng="0" ptsTypes="AA">
+                                      <p:cBhvr>
+                                        <p:cTn id="32" dur="40000" fill="hold"/>
+                                        <p:tgtEl>
+                                          <p:spTgt spid="92"/>
+                                        </p:tgtEl>
+                                        <p:attrNameLst>
+                                          <p:attrName>ppt_x</p:attrName>
+                                          <p:attrName>ppt_y</p:attrName>
+                                        </p:attrNameLst>
+                                      </p:cBhvr>
+                                      <p:rCtr x="1120" y="47778"/>
+                                    </p:animMotion>
+                                  </p:childTnLst>
+                                </p:cTn>
+                              </p:par>
+                              <p:par>
+                                <p:cTn id="33" presetID="42" presetClass="path" presetSubtype="0" repeatCount="indefinite" autoRev="1" fill="hold" grpId="0" nodeType="withEffect">
+                                  <p:stCondLst>
+                                    <p:cond delay="0"/>
+                                  </p:stCondLst>
+                                  <p:childTnLst>
+                                    <p:animMotion origin="layout" path="M -2.08333E-6 -3.7037E-7 L 0.02253 0.95556 " pathEditMode="relative" rAng="0" ptsTypes="AA">
+                                      <p:cBhvr>
+                                        <p:cTn id="34" dur="40000" fill="hold"/>
+                                        <p:tgtEl>
+                                          <p:spTgt spid="93"/>
+                                        </p:tgtEl>
+                                        <p:attrNameLst>
+                                          <p:attrName>ppt_x</p:attrName>
+                                          <p:attrName>ppt_y</p:attrName>
+                                        </p:attrNameLst>
+                                      </p:cBhvr>
+                                      <p:rCtr x="1120" y="47778"/>
+                                    </p:animMotion>
+                                  </p:childTnLst>
+                                </p:cTn>
+                              </p:par>
+                              <p:par>
+                                <p:cTn id="35" presetID="42" presetClass="path" presetSubtype="0" repeatCount="indefinite" autoRev="1" fill="hold" grpId="0" nodeType="withEffect">
+                                  <p:stCondLst>
+                                    <p:cond delay="0"/>
+                                  </p:stCondLst>
+                                  <p:childTnLst>
+                                    <p:animMotion origin="layout" path="M 2.08333E-7 -3.7037E-7 L 0.02253 0.95556 " pathEditMode="relative" rAng="0" ptsTypes="AA">
+                                      <p:cBhvr>
+                                        <p:cTn id="36" dur="40000" fill="hold"/>
+                                        <p:tgtEl>
+                                          <p:spTgt spid="94"/>
+                                        </p:tgtEl>
+                                        <p:attrNameLst>
+                                          <p:attrName>ppt_x</p:attrName>
+                                          <p:attrName>ppt_y</p:attrName>
+                                        </p:attrNameLst>
+                                      </p:cBhvr>
+                                      <p:rCtr x="1120" y="47778"/>
+                                    </p:animMotion>
+                                  </p:childTnLst>
+                                </p:cTn>
+                              </p:par>
+                              <p:par>
+                                <p:cTn id="37" presetID="42" presetClass="path" presetSubtype="0" repeatCount="indefinite" autoRev="1" fill="hold" grpId="0" nodeType="withEffect">
+                                  <p:stCondLst>
+                                    <p:cond delay="0"/>
+                                  </p:stCondLst>
+                                  <p:childTnLst>
+                                    <p:animMotion origin="layout" path="M 2.08333E-7 1.85185E-6 L 0.02253 0.95555 " pathEditMode="relative" rAng="0" ptsTypes="AA">
+                                      <p:cBhvr>
+                                        <p:cTn id="38" dur="40000" fill="hold"/>
+                                        <p:tgtEl>
+                                          <p:spTgt spid="95"/>
+                                        </p:tgtEl>
+                                        <p:attrNameLst>
+                                          <p:attrName>ppt_x</p:attrName>
+                                          <p:attrName>ppt_y</p:attrName>
+                                        </p:attrNameLst>
+                                      </p:cBhvr>
+                                      <p:rCtr x="1120" y="47778"/>
+                                    </p:animMotion>
+                                  </p:childTnLst>
+                                </p:cTn>
+                              </p:par>
+                              <p:par>
+                                <p:cTn id="39" presetID="42" presetClass="path" presetSubtype="0" repeatCount="indefinite" autoRev="1" fill="hold" grpId="0" nodeType="withEffect">
+                                  <p:stCondLst>
+                                    <p:cond delay="0"/>
+                                  </p:stCondLst>
+                                  <p:childTnLst>
+                                    <p:animMotion origin="layout" path="M -3.75E-6 2.22222E-6 L 0.02253 0.95555 " pathEditMode="relative" rAng="0" ptsTypes="AA">
+                                      <p:cBhvr>
+                                        <p:cTn id="40" dur="40000" fill="hold"/>
+                                        <p:tgtEl>
+                                          <p:spTgt spid="96"/>
+                                        </p:tgtEl>
+                                        <p:attrNameLst>
+                                          <p:attrName>ppt_x</p:attrName>
+                                          <p:attrName>ppt_y</p:attrName>
+                                        </p:attrNameLst>
+                                      </p:cBhvr>
+                                      <p:rCtr x="1120" y="47778"/>
+                                    </p:animMotion>
+                                  </p:childTnLst>
+                                </p:cTn>
+                              </p:par>
+                              <p:par>
+                                <p:cTn id="41" presetID="42" presetClass="path" presetSubtype="0" repeatCount="indefinite" autoRev="1" fill="hold" grpId="0" nodeType="withEffect">
+                                  <p:stCondLst>
+                                    <p:cond delay="0"/>
+                                  </p:stCondLst>
+                                  <p:childTnLst>
+                                    <p:animMotion origin="layout" path="M 2.08333E-7 -3.33333E-6 L 0.02253 0.95556 " pathEditMode="relative" rAng="0" ptsTypes="AA">
+                                      <p:cBhvr>
+                                        <p:cTn id="42" dur="40000" fill="hold"/>
+                                        <p:tgtEl>
+                                          <p:spTgt spid="97"/>
+                                        </p:tgtEl>
+                                        <p:attrNameLst>
+                                          <p:attrName>ppt_x</p:attrName>
+                                          <p:attrName>ppt_y</p:attrName>
+                                        </p:attrNameLst>
+                                      </p:cBhvr>
+                                      <p:rCtr x="1120" y="47778"/>
+                                    </p:animMotion>
+                                  </p:childTnLst>
+                                </p:cTn>
+                              </p:par>
+                              <p:par>
+                                <p:cTn id="43" presetID="42" presetClass="path" presetSubtype="0" repeatCount="indefinite" autoRev="1" fill="hold" grpId="0" nodeType="withEffect">
+                                  <p:stCondLst>
+                                    <p:cond delay="0"/>
+                                  </p:stCondLst>
+                                  <p:childTnLst>
+                                    <p:animMotion origin="layout" path="M -1.66667E-6 -3.7037E-6 L 0.02253 0.95556 " pathEditMode="relative" rAng="0" ptsTypes="AA">
+                                      <p:cBhvr>
+                                        <p:cTn id="44" dur="40000" fill="hold"/>
+                                        <p:tgtEl>
+                                          <p:spTgt spid="98"/>
+                                        </p:tgtEl>
+                                        <p:attrNameLst>
+                                          <p:attrName>ppt_x</p:attrName>
+                                          <p:attrName>ppt_y</p:attrName>
+                                        </p:attrNameLst>
+                                      </p:cBhvr>
+                                      <p:rCtr x="1120" y="47778"/>
+                                    </p:animMotion>
+                                  </p:childTnLst>
+                                </p:cTn>
+                              </p:par>
+                            </p:childTnLst>
+                          </p:cTn>
+                        </p:par>
+                      </p:childTnLst>
+                    </p:cTn>
+                  </p:par>
+                </p:childTnLst>
+              </p:cTn>
+              <p:prevCondLst>
+                <p:cond evt="onPrev" delay="0">
+                  <p:tgtEl>
+                    <p:sldTgt/>
+                  </p:tgtEl>
+                </p:cond>
+              </p:prevCondLst>
+              <p:nextCondLst>
+                <p:cond evt="onNext" delay="0">
+                  <p:tgtEl>
+                    <p:sldTgt/>
+                  </p:tgtEl>
+                </p:cond>
+              </p:nextCondLst>
+            </p:seq>
+          </p:childTnLst>
+        </p:cTn>
+      </p:par>
+    </p:tnLst>
+    <p:bldLst>
+      <p:bldP spid="10" grpId="0" animBg="1"/>
+      <p:bldP spid="11" grpId="0" animBg="1"/>
+      <p:bldP spid="12" grpId="0" animBg="1"/>
+      <p:bldP spid="13" grpId="0" animBg="1"/>
+      <p:bldP spid="14" grpId="0" animBg="1"/>
+      <p:bldP spid="15" grpId="0" animBg="1"/>
+      <p:bldP spid="17" grpId="0" animBg="1"/>
+      <p:bldP spid="18" grpId="0" animBg="1"/>
+      <p:bldP spid="19" grpId="0" animBg="1"/>
+      <p:bldP spid="56" grpId="0" animBg="1"/>
+      <p:bldP spid="89" grpId="0" animBg="1"/>
+      <p:bldP spid="90" grpId="0" animBg="1"/>
+      <p:bldP spid="91" grpId="0" animBg="1"/>
+      <p:bldP spid="92" grpId="0" animBg="1"/>
+      <p:bldP spid="93" grpId="0" animBg="1"/>
+      <p:bldP spid="94" grpId="0" animBg="1"/>
+      <p:bldP spid="95" grpId="0" animBg="1"/>
+      <p:bldP spid="96" grpId="0" animBg="1"/>
+      <p:bldP spid="97" grpId="0" animBg="1"/>
+      <p:bldP spid="98" grpId="0" animBg="1"/>
+    </p:bldLst>
+  </p:timing>
 </p:sld>
 </file>
 
@@ -3853,6 +6988,1553 @@
       </p:grpSpPr>
       <p:sp>
         <p:nvSpPr>
+          <p:cNvPr id="4" name="Rectangle 3">
+            <a:extLst>
+              <a:ext uri="{FF2B5EF4-FFF2-40B4-BE49-F238E27FC236}">
+                <a16:creationId xmlns:a16="http://schemas.microsoft.com/office/drawing/2014/main" id="{0438DAA3-E097-A8A5-A3F3-615EAEB00C5E}"/>
+              </a:ext>
+            </a:extLst>
+          </p:cNvPr>
+          <p:cNvSpPr/>
+          <p:nvPr/>
+        </p:nvSpPr>
+        <p:spPr>
+          <a:xfrm>
+            <a:off x="0" y="0"/>
+            <a:ext cx="12192000" cy="6858000"/>
+          </a:xfrm>
+          <a:prstGeom prst="rect">
+            <a:avLst/>
+          </a:prstGeom>
+          <a:gradFill flip="none" rotWithShape="1">
+            <a:gsLst>
+              <a:gs pos="0">
+                <a:schemeClr val="tx1">
+                  <a:lumMod val="65000"/>
+                  <a:lumOff val="35000"/>
+                  <a:shade val="30000"/>
+                  <a:satMod val="115000"/>
+                </a:schemeClr>
+              </a:gs>
+              <a:gs pos="50000">
+                <a:schemeClr val="tx1">
+                  <a:lumMod val="65000"/>
+                  <a:lumOff val="35000"/>
+                  <a:shade val="67500"/>
+                  <a:satMod val="115000"/>
+                </a:schemeClr>
+              </a:gs>
+              <a:gs pos="100000">
+                <a:schemeClr val="tx1">
+                  <a:lumMod val="65000"/>
+                  <a:lumOff val="35000"/>
+                  <a:shade val="100000"/>
+                  <a:satMod val="115000"/>
+                </a:schemeClr>
+              </a:gs>
+            </a:gsLst>
+            <a:lin ang="5400000" scaled="1"/>
+            <a:tileRect/>
+          </a:gradFill>
+          <a:ln>
+            <a:noFill/>
+          </a:ln>
+        </p:spPr>
+        <p:style>
+          <a:lnRef idx="2">
+            <a:schemeClr val="accent1">
+              <a:shade val="15000"/>
+            </a:schemeClr>
+          </a:lnRef>
+          <a:fillRef idx="1">
+            <a:schemeClr val="accent1"/>
+          </a:fillRef>
+          <a:effectRef idx="0">
+            <a:schemeClr val="accent1"/>
+          </a:effectRef>
+          <a:fontRef idx="minor">
+            <a:schemeClr val="lt1"/>
+          </a:fontRef>
+        </p:style>
+        <p:txBody>
+          <a:bodyPr rtlCol="0" anchor="ctr"/>
+          <a:lstStyle/>
+          <a:p>
+            <a:pPr algn="ctr"/>
+            <a:endParaRPr lang="en-GB">
+              <a:gradFill flip="none" rotWithShape="1">
+                <a:gsLst>
+                  <a:gs pos="0">
+                    <a:schemeClr val="accent4">
+                      <a:lumMod val="40000"/>
+                      <a:lumOff val="60000"/>
+                    </a:schemeClr>
+                  </a:gs>
+                  <a:gs pos="46000">
+                    <a:schemeClr val="accent4">
+                      <a:lumMod val="95000"/>
+                      <a:lumOff val="5000"/>
+                    </a:schemeClr>
+                  </a:gs>
+                  <a:gs pos="100000">
+                    <a:schemeClr val="accent4">
+                      <a:lumMod val="60000"/>
+                    </a:schemeClr>
+                  </a:gs>
+                </a:gsLst>
+                <a:path path="circle">
+                  <a:fillToRect l="50000" t="130000" r="50000" b="-30000"/>
+                </a:path>
+                <a:tileRect/>
+              </a:gradFill>
+            </a:endParaRPr>
+          </a:p>
+        </p:txBody>
+      </p:sp>
+      <p:pic>
+        <p:nvPicPr>
+          <p:cNvPr id="7" name="Picture 6">
+            <a:extLst>
+              <a:ext uri="{FF2B5EF4-FFF2-40B4-BE49-F238E27FC236}">
+                <a16:creationId xmlns:a16="http://schemas.microsoft.com/office/drawing/2014/main" id="{887ED78D-2E1F-55AC-6377-218292470EF2}"/>
+              </a:ext>
+            </a:extLst>
+          </p:cNvPr>
+          <p:cNvPicPr>
+            <a:picLocks noChangeAspect="1"/>
+          </p:cNvPicPr>
+          <p:nvPr/>
+        </p:nvPicPr>
+        <p:blipFill>
+          <a:blip r:embed="rId3">
+            <a:alphaModFix amt="20000"/>
+            <a:extLst>
+              <a:ext uri="{BEBA8EAE-BF5A-486C-A8C5-ECC9F3942E4B}">
+                <a14:imgProps xmlns:a14="http://schemas.microsoft.com/office/drawing/2010/main">
+                  <a14:imgLayer r:embed="rId4">
+                    <a14:imgEffect>
+                      <a14:sharpenSoften amount="-30000"/>
+                    </a14:imgEffect>
+                  </a14:imgLayer>
+                </a14:imgProps>
+              </a:ext>
+              <a:ext uri="{28A0092B-C50C-407E-A947-70E740481C1C}">
+                <a14:useLocalDpi xmlns:a14="http://schemas.microsoft.com/office/drawing/2010/main" val="0"/>
+              </a:ext>
+            </a:extLst>
+          </a:blip>
+          <a:stretch>
+            <a:fillRect/>
+          </a:stretch>
+        </p:blipFill>
+        <p:spPr>
+          <a:xfrm>
+            <a:off x="0" y="0"/>
+            <a:ext cx="12192000" cy="6858000"/>
+          </a:xfrm>
+          <a:prstGeom prst="rect">
+            <a:avLst/>
+          </a:prstGeom>
+        </p:spPr>
+      </p:pic>
+      <p:sp>
+        <p:nvSpPr>
+          <p:cNvPr id="5" name="Rectangle 4">
+            <a:extLst>
+              <a:ext uri="{FF2B5EF4-FFF2-40B4-BE49-F238E27FC236}">
+                <a16:creationId xmlns:a16="http://schemas.microsoft.com/office/drawing/2014/main" id="{BB4C07BE-3DE8-272B-F2F0-BE3D610E0B66}"/>
+              </a:ext>
+            </a:extLst>
+          </p:cNvPr>
+          <p:cNvSpPr/>
+          <p:nvPr/>
+        </p:nvSpPr>
+        <p:spPr>
+          <a:xfrm rot="726871">
+            <a:off x="8990839" y="-300110"/>
+            <a:ext cx="4306128" cy="7765843"/>
+          </a:xfrm>
+          <a:prstGeom prst="rect">
+            <a:avLst/>
+          </a:prstGeom>
+          <a:solidFill>
+            <a:srgbClr val="000000"/>
+          </a:solidFill>
+          <a:ln>
+            <a:noFill/>
+          </a:ln>
+        </p:spPr>
+        <p:style>
+          <a:lnRef idx="2">
+            <a:schemeClr val="accent1">
+              <a:shade val="15000"/>
+            </a:schemeClr>
+          </a:lnRef>
+          <a:fillRef idx="1">
+            <a:schemeClr val="accent1"/>
+          </a:fillRef>
+          <a:effectRef idx="0">
+            <a:schemeClr val="accent1"/>
+          </a:effectRef>
+          <a:fontRef idx="minor">
+            <a:schemeClr val="lt1"/>
+          </a:fontRef>
+        </p:style>
+        <p:txBody>
+          <a:bodyPr rtlCol="0" anchor="ctr"/>
+          <a:lstStyle/>
+          <a:p>
+            <a:pPr algn="ctr"/>
+            <a:endParaRPr lang="en-GB"/>
+          </a:p>
+        </p:txBody>
+      </p:sp>
+      <p:sp>
+        <p:nvSpPr>
+          <p:cNvPr id="3" name="Content Placeholder 2">
+            <a:extLst>
+              <a:ext uri="{FF2B5EF4-FFF2-40B4-BE49-F238E27FC236}">
+                <a16:creationId xmlns:a16="http://schemas.microsoft.com/office/drawing/2014/main" id="{A87D70AF-8C54-0610-4C5A-1F63060551C6}"/>
+              </a:ext>
+            </a:extLst>
+          </p:cNvPr>
+          <p:cNvSpPr>
+            <a:spLocks noGrp="1"/>
+          </p:cNvSpPr>
+          <p:nvPr>
+            <p:ph idx="1"/>
+          </p:nvPr>
+        </p:nvSpPr>
+        <p:spPr>
+          <a:xfrm>
+            <a:off x="838200" y="1825625"/>
+            <a:ext cx="7213600" cy="4351338"/>
+          </a:xfrm>
+        </p:spPr>
+        <p:txBody>
+          <a:bodyPr>
+            <a:normAutofit fontScale="92500" lnSpcReduction="20000"/>
+          </a:bodyPr>
+          <a:lstStyle/>
+          <a:p>
+            <a:r>
+              <a:rPr lang="en-GB" dirty="0">
+                <a:solidFill>
+                  <a:schemeClr val="bg1"/>
+                </a:solidFill>
+              </a:rPr>
+              <a:t>This is a program that  I made, and I made as a means of handling data sent out by </a:t>
+            </a:r>
+            <a:r>
+              <a:rPr lang="en-GB" dirty="0" err="1">
+                <a:solidFill>
+                  <a:schemeClr val="bg1"/>
+                </a:solidFill>
+              </a:rPr>
+              <a:t>ExtOutputTestResults</a:t>
+            </a:r>
+            <a:r>
+              <a:rPr lang="en-GB" dirty="0">
+                <a:solidFill>
+                  <a:schemeClr val="bg1"/>
+                </a:solidFill>
+              </a:rPr>
+              <a:t>, particularly all the stuff that is unique to this unit testing system because the visual studios test view isn’t very good at handling unique data such as issue descriptions than can change base on test results and severity codes.</a:t>
+            </a:r>
+          </a:p>
+          <a:p>
+            <a:endParaRPr lang="en-GB" dirty="0">
+              <a:solidFill>
+                <a:schemeClr val="bg1"/>
+              </a:solidFill>
+            </a:endParaRPr>
+          </a:p>
+          <a:p>
+            <a:r>
+              <a:rPr lang="en-GB" dirty="0">
+                <a:solidFill>
+                  <a:schemeClr val="bg1"/>
+                </a:solidFill>
+              </a:rPr>
+              <a:t>The program can consolidate all the results from different parts of the engine into one output and it can provide more help to track down issues than the normal console output.</a:t>
+            </a:r>
+          </a:p>
+        </p:txBody>
+      </p:sp>
+      <p:sp>
+        <p:nvSpPr>
+          <p:cNvPr id="18" name="Hexagon 17">
+            <a:extLst>
+              <a:ext uri="{FF2B5EF4-FFF2-40B4-BE49-F238E27FC236}">
+                <a16:creationId xmlns:a16="http://schemas.microsoft.com/office/drawing/2014/main" id="{B295EC86-2BED-3C11-9D3D-8A84ADDDF76A}"/>
+              </a:ext>
+            </a:extLst>
+          </p:cNvPr>
+          <p:cNvSpPr/>
+          <p:nvPr/>
+        </p:nvSpPr>
+        <p:spPr>
+          <a:xfrm>
+            <a:off x="9384755" y="-582324"/>
+            <a:ext cx="949136" cy="829189"/>
+          </a:xfrm>
+          <a:prstGeom prst="hexagon">
+            <a:avLst/>
+          </a:prstGeom>
+          <a:solidFill>
+            <a:schemeClr val="tx1"/>
+          </a:solidFill>
+          <a:ln>
+            <a:noFill/>
+          </a:ln>
+        </p:spPr>
+        <p:style>
+          <a:lnRef idx="2">
+            <a:schemeClr val="accent1">
+              <a:shade val="15000"/>
+            </a:schemeClr>
+          </a:lnRef>
+          <a:fillRef idx="1">
+            <a:schemeClr val="accent1"/>
+          </a:fillRef>
+          <a:effectRef idx="0">
+            <a:schemeClr val="accent1"/>
+          </a:effectRef>
+          <a:fontRef idx="minor">
+            <a:schemeClr val="lt1"/>
+          </a:fontRef>
+        </p:style>
+        <p:txBody>
+          <a:bodyPr rtlCol="0" anchor="ctr"/>
+          <a:lstStyle/>
+          <a:p>
+            <a:pPr algn="ctr"/>
+            <a:endParaRPr lang="en-GB"/>
+          </a:p>
+        </p:txBody>
+      </p:sp>
+      <p:sp>
+        <p:nvSpPr>
+          <p:cNvPr id="34" name="Hexagon 33">
+            <a:extLst>
+              <a:ext uri="{FF2B5EF4-FFF2-40B4-BE49-F238E27FC236}">
+                <a16:creationId xmlns:a16="http://schemas.microsoft.com/office/drawing/2014/main" id="{723AE3B7-E1D6-E7A6-9D7D-AA84484C140F}"/>
+              </a:ext>
+            </a:extLst>
+          </p:cNvPr>
+          <p:cNvSpPr/>
+          <p:nvPr/>
+        </p:nvSpPr>
+        <p:spPr>
+          <a:xfrm rot="19264623">
+            <a:off x="9223575" y="133433"/>
+            <a:ext cx="949136" cy="829189"/>
+          </a:xfrm>
+          <a:prstGeom prst="hexagon">
+            <a:avLst/>
+          </a:prstGeom>
+          <a:solidFill>
+            <a:schemeClr val="tx1"/>
+          </a:solidFill>
+          <a:ln>
+            <a:noFill/>
+          </a:ln>
+        </p:spPr>
+        <p:style>
+          <a:lnRef idx="2">
+            <a:schemeClr val="accent1">
+              <a:shade val="15000"/>
+            </a:schemeClr>
+          </a:lnRef>
+          <a:fillRef idx="1">
+            <a:schemeClr val="accent1"/>
+          </a:fillRef>
+          <a:effectRef idx="0">
+            <a:schemeClr val="accent1"/>
+          </a:effectRef>
+          <a:fontRef idx="minor">
+            <a:schemeClr val="lt1"/>
+          </a:fontRef>
+        </p:style>
+        <p:txBody>
+          <a:bodyPr rtlCol="0" anchor="ctr"/>
+          <a:lstStyle/>
+          <a:p>
+            <a:pPr algn="ctr"/>
+            <a:endParaRPr lang="en-GB"/>
+          </a:p>
+        </p:txBody>
+      </p:sp>
+      <p:sp>
+        <p:nvSpPr>
+          <p:cNvPr id="35" name="Hexagon 34">
+            <a:extLst>
+              <a:ext uri="{FF2B5EF4-FFF2-40B4-BE49-F238E27FC236}">
+                <a16:creationId xmlns:a16="http://schemas.microsoft.com/office/drawing/2014/main" id="{3D729799-3A9A-8663-E53A-C7B9CDDB7454}"/>
+              </a:ext>
+            </a:extLst>
+          </p:cNvPr>
+          <p:cNvSpPr/>
+          <p:nvPr/>
+        </p:nvSpPr>
+        <p:spPr>
+          <a:xfrm rot="2400449">
+            <a:off x="9051831" y="1295048"/>
+            <a:ext cx="949136" cy="829189"/>
+          </a:xfrm>
+          <a:prstGeom prst="hexagon">
+            <a:avLst/>
+          </a:prstGeom>
+          <a:solidFill>
+            <a:schemeClr val="tx1"/>
+          </a:solidFill>
+          <a:ln>
+            <a:noFill/>
+          </a:ln>
+        </p:spPr>
+        <p:style>
+          <a:lnRef idx="2">
+            <a:schemeClr val="accent1">
+              <a:shade val="15000"/>
+            </a:schemeClr>
+          </a:lnRef>
+          <a:fillRef idx="1">
+            <a:schemeClr val="accent1"/>
+          </a:fillRef>
+          <a:effectRef idx="0">
+            <a:schemeClr val="accent1"/>
+          </a:effectRef>
+          <a:fontRef idx="minor">
+            <a:schemeClr val="lt1"/>
+          </a:fontRef>
+        </p:style>
+        <p:txBody>
+          <a:bodyPr rtlCol="0" anchor="ctr"/>
+          <a:lstStyle/>
+          <a:p>
+            <a:pPr algn="ctr"/>
+            <a:endParaRPr lang="en-GB"/>
+          </a:p>
+        </p:txBody>
+      </p:sp>
+      <p:sp>
+        <p:nvSpPr>
+          <p:cNvPr id="36" name="Hexagon 35">
+            <a:extLst>
+              <a:ext uri="{FF2B5EF4-FFF2-40B4-BE49-F238E27FC236}">
+                <a16:creationId xmlns:a16="http://schemas.microsoft.com/office/drawing/2014/main" id="{DA0E4879-3C9A-912F-D103-F0C7B998735B}"/>
+              </a:ext>
+            </a:extLst>
+          </p:cNvPr>
+          <p:cNvSpPr/>
+          <p:nvPr/>
+        </p:nvSpPr>
+        <p:spPr>
+          <a:xfrm rot="4603860">
+            <a:off x="8852778" y="2420721"/>
+            <a:ext cx="949136" cy="829189"/>
+          </a:xfrm>
+          <a:prstGeom prst="hexagon">
+            <a:avLst/>
+          </a:prstGeom>
+          <a:solidFill>
+            <a:schemeClr val="tx1"/>
+          </a:solidFill>
+          <a:ln>
+            <a:noFill/>
+          </a:ln>
+        </p:spPr>
+        <p:style>
+          <a:lnRef idx="2">
+            <a:schemeClr val="accent1">
+              <a:shade val="15000"/>
+            </a:schemeClr>
+          </a:lnRef>
+          <a:fillRef idx="1">
+            <a:schemeClr val="accent1"/>
+          </a:fillRef>
+          <a:effectRef idx="0">
+            <a:schemeClr val="accent1"/>
+          </a:effectRef>
+          <a:fontRef idx="minor">
+            <a:schemeClr val="lt1"/>
+          </a:fontRef>
+        </p:style>
+        <p:txBody>
+          <a:bodyPr rtlCol="0" anchor="ctr"/>
+          <a:lstStyle/>
+          <a:p>
+            <a:pPr algn="ctr"/>
+            <a:endParaRPr lang="en-GB"/>
+          </a:p>
+        </p:txBody>
+      </p:sp>
+      <p:sp>
+        <p:nvSpPr>
+          <p:cNvPr id="37" name="Hexagon 36">
+            <a:extLst>
+              <a:ext uri="{FF2B5EF4-FFF2-40B4-BE49-F238E27FC236}">
+                <a16:creationId xmlns:a16="http://schemas.microsoft.com/office/drawing/2014/main" id="{823C9178-9A2F-ACAC-E967-D9631AE58248}"/>
+              </a:ext>
+            </a:extLst>
+          </p:cNvPr>
+          <p:cNvSpPr/>
+          <p:nvPr/>
+        </p:nvSpPr>
+        <p:spPr>
+          <a:xfrm rot="7419595">
+            <a:off x="8547446" y="3565350"/>
+            <a:ext cx="949136" cy="829189"/>
+          </a:xfrm>
+          <a:prstGeom prst="hexagon">
+            <a:avLst/>
+          </a:prstGeom>
+          <a:solidFill>
+            <a:schemeClr val="tx1"/>
+          </a:solidFill>
+          <a:ln>
+            <a:noFill/>
+          </a:ln>
+        </p:spPr>
+        <p:style>
+          <a:lnRef idx="2">
+            <a:schemeClr val="accent1">
+              <a:shade val="15000"/>
+            </a:schemeClr>
+          </a:lnRef>
+          <a:fillRef idx="1">
+            <a:schemeClr val="accent1"/>
+          </a:fillRef>
+          <a:effectRef idx="0">
+            <a:schemeClr val="accent1"/>
+          </a:effectRef>
+          <a:fontRef idx="minor">
+            <a:schemeClr val="lt1"/>
+          </a:fontRef>
+        </p:style>
+        <p:txBody>
+          <a:bodyPr rtlCol="0" anchor="ctr"/>
+          <a:lstStyle/>
+          <a:p>
+            <a:pPr algn="ctr"/>
+            <a:endParaRPr lang="en-GB"/>
+          </a:p>
+        </p:txBody>
+      </p:sp>
+      <p:sp>
+        <p:nvSpPr>
+          <p:cNvPr id="38" name="Hexagon 37">
+            <a:extLst>
+              <a:ext uri="{FF2B5EF4-FFF2-40B4-BE49-F238E27FC236}">
+                <a16:creationId xmlns:a16="http://schemas.microsoft.com/office/drawing/2014/main" id="{C8AA2036-173F-8698-2C56-766114E17BAE}"/>
+              </a:ext>
+            </a:extLst>
+          </p:cNvPr>
+          <p:cNvSpPr/>
+          <p:nvPr/>
+        </p:nvSpPr>
+        <p:spPr>
+          <a:xfrm rot="588707">
+            <a:off x="8230516" y="4931806"/>
+            <a:ext cx="949136" cy="829189"/>
+          </a:xfrm>
+          <a:prstGeom prst="hexagon">
+            <a:avLst/>
+          </a:prstGeom>
+          <a:solidFill>
+            <a:schemeClr val="tx1"/>
+          </a:solidFill>
+          <a:ln>
+            <a:noFill/>
+          </a:ln>
+        </p:spPr>
+        <p:style>
+          <a:lnRef idx="2">
+            <a:schemeClr val="accent1">
+              <a:shade val="15000"/>
+            </a:schemeClr>
+          </a:lnRef>
+          <a:fillRef idx="1">
+            <a:schemeClr val="accent1"/>
+          </a:fillRef>
+          <a:effectRef idx="0">
+            <a:schemeClr val="accent1"/>
+          </a:effectRef>
+          <a:fontRef idx="minor">
+            <a:schemeClr val="lt1"/>
+          </a:fontRef>
+        </p:style>
+        <p:txBody>
+          <a:bodyPr rtlCol="0" anchor="ctr"/>
+          <a:lstStyle/>
+          <a:p>
+            <a:pPr algn="ctr"/>
+            <a:endParaRPr lang="en-GB"/>
+          </a:p>
+        </p:txBody>
+      </p:sp>
+      <p:sp>
+        <p:nvSpPr>
+          <p:cNvPr id="39" name="Hexagon 38">
+            <a:extLst>
+              <a:ext uri="{FF2B5EF4-FFF2-40B4-BE49-F238E27FC236}">
+                <a16:creationId xmlns:a16="http://schemas.microsoft.com/office/drawing/2014/main" id="{E61B0017-FDA9-87AE-27F2-E727672FDE2D}"/>
+              </a:ext>
+            </a:extLst>
+          </p:cNvPr>
+          <p:cNvSpPr/>
+          <p:nvPr/>
+        </p:nvSpPr>
+        <p:spPr>
+          <a:xfrm rot="20352799">
+            <a:off x="8112534" y="5910308"/>
+            <a:ext cx="949136" cy="829189"/>
+          </a:xfrm>
+          <a:prstGeom prst="hexagon">
+            <a:avLst/>
+          </a:prstGeom>
+          <a:solidFill>
+            <a:schemeClr val="tx1"/>
+          </a:solidFill>
+          <a:ln>
+            <a:noFill/>
+          </a:ln>
+        </p:spPr>
+        <p:style>
+          <a:lnRef idx="2">
+            <a:schemeClr val="accent1">
+              <a:shade val="15000"/>
+            </a:schemeClr>
+          </a:lnRef>
+          <a:fillRef idx="1">
+            <a:schemeClr val="accent1"/>
+          </a:fillRef>
+          <a:effectRef idx="0">
+            <a:schemeClr val="accent1"/>
+          </a:effectRef>
+          <a:fontRef idx="minor">
+            <a:schemeClr val="lt1"/>
+          </a:fontRef>
+        </p:style>
+        <p:txBody>
+          <a:bodyPr rtlCol="0" anchor="ctr"/>
+          <a:lstStyle/>
+          <a:p>
+            <a:pPr algn="ctr"/>
+            <a:endParaRPr lang="en-GB"/>
+          </a:p>
+        </p:txBody>
+      </p:sp>
+      <p:sp>
+        <p:nvSpPr>
+          <p:cNvPr id="40" name="Hexagon 39">
+            <a:extLst>
+              <a:ext uri="{FF2B5EF4-FFF2-40B4-BE49-F238E27FC236}">
+                <a16:creationId xmlns:a16="http://schemas.microsoft.com/office/drawing/2014/main" id="{21747EBA-B811-109F-B46A-493B55ABE979}"/>
+              </a:ext>
+            </a:extLst>
+          </p:cNvPr>
+          <p:cNvSpPr/>
+          <p:nvPr/>
+        </p:nvSpPr>
+        <p:spPr>
+          <a:xfrm rot="20716380">
+            <a:off x="8278460" y="5591428"/>
+            <a:ext cx="949136" cy="829189"/>
+          </a:xfrm>
+          <a:prstGeom prst="hexagon">
+            <a:avLst/>
+          </a:prstGeom>
+          <a:solidFill>
+            <a:schemeClr val="tx1"/>
+          </a:solidFill>
+          <a:ln>
+            <a:noFill/>
+          </a:ln>
+        </p:spPr>
+        <p:style>
+          <a:lnRef idx="2">
+            <a:schemeClr val="accent1">
+              <a:shade val="15000"/>
+            </a:schemeClr>
+          </a:lnRef>
+          <a:fillRef idx="1">
+            <a:schemeClr val="accent1"/>
+          </a:fillRef>
+          <a:effectRef idx="0">
+            <a:schemeClr val="accent1"/>
+          </a:effectRef>
+          <a:fontRef idx="minor">
+            <a:schemeClr val="lt1"/>
+          </a:fontRef>
+        </p:style>
+        <p:txBody>
+          <a:bodyPr rtlCol="0" anchor="ctr"/>
+          <a:lstStyle/>
+          <a:p>
+            <a:pPr algn="ctr"/>
+            <a:endParaRPr lang="en-GB"/>
+          </a:p>
+        </p:txBody>
+      </p:sp>
+      <p:sp>
+        <p:nvSpPr>
+          <p:cNvPr id="41" name="Hexagon 40">
+            <a:extLst>
+              <a:ext uri="{FF2B5EF4-FFF2-40B4-BE49-F238E27FC236}">
+                <a16:creationId xmlns:a16="http://schemas.microsoft.com/office/drawing/2014/main" id="{CC6588E1-B368-56F7-5990-8F2DC8A8013D}"/>
+              </a:ext>
+            </a:extLst>
+          </p:cNvPr>
+          <p:cNvSpPr/>
+          <p:nvPr/>
+        </p:nvSpPr>
+        <p:spPr>
+          <a:xfrm rot="588707">
+            <a:off x="8836560" y="2977779"/>
+            <a:ext cx="949136" cy="829189"/>
+          </a:xfrm>
+          <a:prstGeom prst="hexagon">
+            <a:avLst/>
+          </a:prstGeom>
+          <a:solidFill>
+            <a:schemeClr val="tx1"/>
+          </a:solidFill>
+          <a:ln>
+            <a:noFill/>
+          </a:ln>
+        </p:spPr>
+        <p:style>
+          <a:lnRef idx="2">
+            <a:schemeClr val="accent1">
+              <a:shade val="15000"/>
+            </a:schemeClr>
+          </a:lnRef>
+          <a:fillRef idx="1">
+            <a:schemeClr val="accent1"/>
+          </a:fillRef>
+          <a:effectRef idx="0">
+            <a:schemeClr val="accent1"/>
+          </a:effectRef>
+          <a:fontRef idx="minor">
+            <a:schemeClr val="lt1"/>
+          </a:fontRef>
+        </p:style>
+        <p:txBody>
+          <a:bodyPr rtlCol="0" anchor="ctr"/>
+          <a:lstStyle/>
+          <a:p>
+            <a:pPr algn="ctr"/>
+            <a:endParaRPr lang="en-GB"/>
+          </a:p>
+        </p:txBody>
+      </p:sp>
+      <p:sp>
+        <p:nvSpPr>
+          <p:cNvPr id="52" name="Hexagon 51">
+            <a:extLst>
+              <a:ext uri="{FF2B5EF4-FFF2-40B4-BE49-F238E27FC236}">
+                <a16:creationId xmlns:a16="http://schemas.microsoft.com/office/drawing/2014/main" id="{FE26F332-0495-1E20-E050-AF2E02A8FDF2}"/>
+              </a:ext>
+            </a:extLst>
+          </p:cNvPr>
+          <p:cNvSpPr/>
+          <p:nvPr/>
+        </p:nvSpPr>
+        <p:spPr>
+          <a:xfrm>
+            <a:off x="10802401" y="-6466804"/>
+            <a:ext cx="949136" cy="829189"/>
+          </a:xfrm>
+          <a:prstGeom prst="hexagon">
+            <a:avLst/>
+          </a:prstGeom>
+          <a:solidFill>
+            <a:schemeClr val="tx1"/>
+          </a:solidFill>
+          <a:ln>
+            <a:noFill/>
+          </a:ln>
+        </p:spPr>
+        <p:style>
+          <a:lnRef idx="2">
+            <a:schemeClr val="accent1">
+              <a:shade val="15000"/>
+            </a:schemeClr>
+          </a:lnRef>
+          <a:fillRef idx="1">
+            <a:schemeClr val="accent1"/>
+          </a:fillRef>
+          <a:effectRef idx="0">
+            <a:schemeClr val="accent1"/>
+          </a:effectRef>
+          <a:fontRef idx="minor">
+            <a:schemeClr val="lt1"/>
+          </a:fontRef>
+        </p:style>
+        <p:txBody>
+          <a:bodyPr rtlCol="0" anchor="ctr"/>
+          <a:lstStyle/>
+          <a:p>
+            <a:pPr algn="ctr"/>
+            <a:endParaRPr lang="en-GB"/>
+          </a:p>
+        </p:txBody>
+      </p:sp>
+      <p:sp>
+        <p:nvSpPr>
+          <p:cNvPr id="53" name="Hexagon 52">
+            <a:extLst>
+              <a:ext uri="{FF2B5EF4-FFF2-40B4-BE49-F238E27FC236}">
+                <a16:creationId xmlns:a16="http://schemas.microsoft.com/office/drawing/2014/main" id="{91F4FF0C-95FA-3972-5336-FBDB7912B4F0}"/>
+              </a:ext>
+            </a:extLst>
+          </p:cNvPr>
+          <p:cNvSpPr/>
+          <p:nvPr/>
+        </p:nvSpPr>
+        <p:spPr>
+          <a:xfrm rot="19264623">
+            <a:off x="10641221" y="-5751047"/>
+            <a:ext cx="949136" cy="829189"/>
+          </a:xfrm>
+          <a:prstGeom prst="hexagon">
+            <a:avLst/>
+          </a:prstGeom>
+          <a:solidFill>
+            <a:schemeClr val="tx1"/>
+          </a:solidFill>
+          <a:ln>
+            <a:noFill/>
+          </a:ln>
+        </p:spPr>
+        <p:style>
+          <a:lnRef idx="2">
+            <a:schemeClr val="accent1">
+              <a:shade val="15000"/>
+            </a:schemeClr>
+          </a:lnRef>
+          <a:fillRef idx="1">
+            <a:schemeClr val="accent1"/>
+          </a:fillRef>
+          <a:effectRef idx="0">
+            <a:schemeClr val="accent1"/>
+          </a:effectRef>
+          <a:fontRef idx="minor">
+            <a:schemeClr val="lt1"/>
+          </a:fontRef>
+        </p:style>
+        <p:txBody>
+          <a:bodyPr rtlCol="0" anchor="ctr"/>
+          <a:lstStyle/>
+          <a:p>
+            <a:pPr algn="ctr"/>
+            <a:endParaRPr lang="en-GB"/>
+          </a:p>
+        </p:txBody>
+      </p:sp>
+      <p:sp>
+        <p:nvSpPr>
+          <p:cNvPr id="54" name="Hexagon 53">
+            <a:extLst>
+              <a:ext uri="{FF2B5EF4-FFF2-40B4-BE49-F238E27FC236}">
+                <a16:creationId xmlns:a16="http://schemas.microsoft.com/office/drawing/2014/main" id="{CB5CDDAB-9D26-9EFE-AB3F-8C31A28E84CB}"/>
+              </a:ext>
+            </a:extLst>
+          </p:cNvPr>
+          <p:cNvSpPr/>
+          <p:nvPr/>
+        </p:nvSpPr>
+        <p:spPr>
+          <a:xfrm rot="2400449">
+            <a:off x="10469477" y="-4589432"/>
+            <a:ext cx="949136" cy="829189"/>
+          </a:xfrm>
+          <a:prstGeom prst="hexagon">
+            <a:avLst/>
+          </a:prstGeom>
+          <a:solidFill>
+            <a:schemeClr val="tx1"/>
+          </a:solidFill>
+          <a:ln>
+            <a:noFill/>
+          </a:ln>
+        </p:spPr>
+        <p:style>
+          <a:lnRef idx="2">
+            <a:schemeClr val="accent1">
+              <a:shade val="15000"/>
+            </a:schemeClr>
+          </a:lnRef>
+          <a:fillRef idx="1">
+            <a:schemeClr val="accent1"/>
+          </a:fillRef>
+          <a:effectRef idx="0">
+            <a:schemeClr val="accent1"/>
+          </a:effectRef>
+          <a:fontRef idx="minor">
+            <a:schemeClr val="lt1"/>
+          </a:fontRef>
+        </p:style>
+        <p:txBody>
+          <a:bodyPr rtlCol="0" anchor="ctr"/>
+          <a:lstStyle/>
+          <a:p>
+            <a:pPr algn="ctr"/>
+            <a:endParaRPr lang="en-GB"/>
+          </a:p>
+        </p:txBody>
+      </p:sp>
+      <p:sp>
+        <p:nvSpPr>
+          <p:cNvPr id="55" name="Hexagon 54">
+            <a:extLst>
+              <a:ext uri="{FF2B5EF4-FFF2-40B4-BE49-F238E27FC236}">
+                <a16:creationId xmlns:a16="http://schemas.microsoft.com/office/drawing/2014/main" id="{248F9CB1-9E73-A70A-DF44-8D32D3D0B1D8}"/>
+              </a:ext>
+            </a:extLst>
+          </p:cNvPr>
+          <p:cNvSpPr/>
+          <p:nvPr/>
+        </p:nvSpPr>
+        <p:spPr>
+          <a:xfrm rot="4603860">
+            <a:off x="10270424" y="-3463759"/>
+            <a:ext cx="949136" cy="829189"/>
+          </a:xfrm>
+          <a:prstGeom prst="hexagon">
+            <a:avLst/>
+          </a:prstGeom>
+          <a:solidFill>
+            <a:schemeClr val="tx1"/>
+          </a:solidFill>
+          <a:ln>
+            <a:noFill/>
+          </a:ln>
+        </p:spPr>
+        <p:style>
+          <a:lnRef idx="2">
+            <a:schemeClr val="accent1">
+              <a:shade val="15000"/>
+            </a:schemeClr>
+          </a:lnRef>
+          <a:fillRef idx="1">
+            <a:schemeClr val="accent1"/>
+          </a:fillRef>
+          <a:effectRef idx="0">
+            <a:schemeClr val="accent1"/>
+          </a:effectRef>
+          <a:fontRef idx="minor">
+            <a:schemeClr val="lt1"/>
+          </a:fontRef>
+        </p:style>
+        <p:txBody>
+          <a:bodyPr rtlCol="0" anchor="ctr"/>
+          <a:lstStyle/>
+          <a:p>
+            <a:pPr algn="ctr"/>
+            <a:endParaRPr lang="en-GB"/>
+          </a:p>
+        </p:txBody>
+      </p:sp>
+      <p:sp>
+        <p:nvSpPr>
+          <p:cNvPr id="56" name="Hexagon 55">
+            <a:extLst>
+              <a:ext uri="{FF2B5EF4-FFF2-40B4-BE49-F238E27FC236}">
+                <a16:creationId xmlns:a16="http://schemas.microsoft.com/office/drawing/2014/main" id="{575D56C0-D2E3-5B5E-75CB-761063C2D293}"/>
+              </a:ext>
+            </a:extLst>
+          </p:cNvPr>
+          <p:cNvSpPr/>
+          <p:nvPr/>
+        </p:nvSpPr>
+        <p:spPr>
+          <a:xfrm rot="7419595">
+            <a:off x="9965092" y="-2319130"/>
+            <a:ext cx="949136" cy="829189"/>
+          </a:xfrm>
+          <a:prstGeom prst="hexagon">
+            <a:avLst/>
+          </a:prstGeom>
+          <a:solidFill>
+            <a:schemeClr val="tx1"/>
+          </a:solidFill>
+          <a:ln>
+            <a:noFill/>
+          </a:ln>
+        </p:spPr>
+        <p:style>
+          <a:lnRef idx="2">
+            <a:schemeClr val="accent1">
+              <a:shade val="15000"/>
+            </a:schemeClr>
+          </a:lnRef>
+          <a:fillRef idx="1">
+            <a:schemeClr val="accent1"/>
+          </a:fillRef>
+          <a:effectRef idx="0">
+            <a:schemeClr val="accent1"/>
+          </a:effectRef>
+          <a:fontRef idx="minor">
+            <a:schemeClr val="lt1"/>
+          </a:fontRef>
+        </p:style>
+        <p:txBody>
+          <a:bodyPr rtlCol="0" anchor="ctr"/>
+          <a:lstStyle/>
+          <a:p>
+            <a:pPr algn="ctr"/>
+            <a:endParaRPr lang="en-GB"/>
+          </a:p>
+        </p:txBody>
+      </p:sp>
+      <p:sp>
+        <p:nvSpPr>
+          <p:cNvPr id="57" name="Hexagon 56">
+            <a:extLst>
+              <a:ext uri="{FF2B5EF4-FFF2-40B4-BE49-F238E27FC236}">
+                <a16:creationId xmlns:a16="http://schemas.microsoft.com/office/drawing/2014/main" id="{AE5E216C-939C-DFD5-7F90-E7CFB01EE7E6}"/>
+              </a:ext>
+            </a:extLst>
+          </p:cNvPr>
+          <p:cNvSpPr/>
+          <p:nvPr/>
+        </p:nvSpPr>
+        <p:spPr>
+          <a:xfrm rot="588707">
+            <a:off x="9648162" y="-952674"/>
+            <a:ext cx="949136" cy="829189"/>
+          </a:xfrm>
+          <a:prstGeom prst="hexagon">
+            <a:avLst/>
+          </a:prstGeom>
+          <a:solidFill>
+            <a:schemeClr val="tx1"/>
+          </a:solidFill>
+          <a:ln>
+            <a:noFill/>
+          </a:ln>
+        </p:spPr>
+        <p:style>
+          <a:lnRef idx="2">
+            <a:schemeClr val="accent1">
+              <a:shade val="15000"/>
+            </a:schemeClr>
+          </a:lnRef>
+          <a:fillRef idx="1">
+            <a:schemeClr val="accent1"/>
+          </a:fillRef>
+          <a:effectRef idx="0">
+            <a:schemeClr val="accent1"/>
+          </a:effectRef>
+          <a:fontRef idx="minor">
+            <a:schemeClr val="lt1"/>
+          </a:fontRef>
+        </p:style>
+        <p:txBody>
+          <a:bodyPr rtlCol="0" anchor="ctr"/>
+          <a:lstStyle/>
+          <a:p>
+            <a:pPr algn="ctr"/>
+            <a:endParaRPr lang="en-GB"/>
+          </a:p>
+        </p:txBody>
+      </p:sp>
+      <p:sp>
+        <p:nvSpPr>
+          <p:cNvPr id="58" name="Hexagon 57">
+            <a:extLst>
+              <a:ext uri="{FF2B5EF4-FFF2-40B4-BE49-F238E27FC236}">
+                <a16:creationId xmlns:a16="http://schemas.microsoft.com/office/drawing/2014/main" id="{19C7AC3E-74DC-FAEA-FA19-C9767EE4A958}"/>
+              </a:ext>
+            </a:extLst>
+          </p:cNvPr>
+          <p:cNvSpPr/>
+          <p:nvPr/>
+        </p:nvSpPr>
+        <p:spPr>
+          <a:xfrm rot="20352799">
+            <a:off x="9530180" y="25828"/>
+            <a:ext cx="949136" cy="829189"/>
+          </a:xfrm>
+          <a:prstGeom prst="hexagon">
+            <a:avLst/>
+          </a:prstGeom>
+          <a:solidFill>
+            <a:schemeClr val="tx1"/>
+          </a:solidFill>
+          <a:ln>
+            <a:noFill/>
+          </a:ln>
+        </p:spPr>
+        <p:style>
+          <a:lnRef idx="2">
+            <a:schemeClr val="accent1">
+              <a:shade val="15000"/>
+            </a:schemeClr>
+          </a:lnRef>
+          <a:fillRef idx="1">
+            <a:schemeClr val="accent1"/>
+          </a:fillRef>
+          <a:effectRef idx="0">
+            <a:schemeClr val="accent1"/>
+          </a:effectRef>
+          <a:fontRef idx="minor">
+            <a:schemeClr val="lt1"/>
+          </a:fontRef>
+        </p:style>
+        <p:txBody>
+          <a:bodyPr rtlCol="0" anchor="ctr"/>
+          <a:lstStyle/>
+          <a:p>
+            <a:pPr algn="ctr"/>
+            <a:endParaRPr lang="en-GB"/>
+          </a:p>
+        </p:txBody>
+      </p:sp>
+      <p:sp>
+        <p:nvSpPr>
+          <p:cNvPr id="59" name="Hexagon 58">
+            <a:extLst>
+              <a:ext uri="{FF2B5EF4-FFF2-40B4-BE49-F238E27FC236}">
+                <a16:creationId xmlns:a16="http://schemas.microsoft.com/office/drawing/2014/main" id="{05F87AF2-5262-CF11-DAA1-9051B989C161}"/>
+              </a:ext>
+            </a:extLst>
+          </p:cNvPr>
+          <p:cNvSpPr/>
+          <p:nvPr/>
+        </p:nvSpPr>
+        <p:spPr>
+          <a:xfrm rot="20716380">
+            <a:off x="9696106" y="-293052"/>
+            <a:ext cx="949136" cy="829189"/>
+          </a:xfrm>
+          <a:prstGeom prst="hexagon">
+            <a:avLst/>
+          </a:prstGeom>
+          <a:solidFill>
+            <a:schemeClr val="tx1"/>
+          </a:solidFill>
+          <a:ln>
+            <a:noFill/>
+          </a:ln>
+        </p:spPr>
+        <p:style>
+          <a:lnRef idx="2">
+            <a:schemeClr val="accent1">
+              <a:shade val="15000"/>
+            </a:schemeClr>
+          </a:lnRef>
+          <a:fillRef idx="1">
+            <a:schemeClr val="accent1"/>
+          </a:fillRef>
+          <a:effectRef idx="0">
+            <a:schemeClr val="accent1"/>
+          </a:effectRef>
+          <a:fontRef idx="minor">
+            <a:schemeClr val="lt1"/>
+          </a:fontRef>
+        </p:style>
+        <p:txBody>
+          <a:bodyPr rtlCol="0" anchor="ctr"/>
+          <a:lstStyle/>
+          <a:p>
+            <a:pPr algn="ctr"/>
+            <a:endParaRPr lang="en-GB"/>
+          </a:p>
+        </p:txBody>
+      </p:sp>
+      <p:sp>
+        <p:nvSpPr>
+          <p:cNvPr id="60" name="Hexagon 59">
+            <a:extLst>
+              <a:ext uri="{FF2B5EF4-FFF2-40B4-BE49-F238E27FC236}">
+                <a16:creationId xmlns:a16="http://schemas.microsoft.com/office/drawing/2014/main" id="{75973E3D-EDBE-6646-53A7-5B6987F0B41C}"/>
+              </a:ext>
+            </a:extLst>
+          </p:cNvPr>
+          <p:cNvSpPr/>
+          <p:nvPr/>
+        </p:nvSpPr>
+        <p:spPr>
+          <a:xfrm rot="588707">
+            <a:off x="10254206" y="-2906701"/>
+            <a:ext cx="949136" cy="829189"/>
+          </a:xfrm>
+          <a:prstGeom prst="hexagon">
+            <a:avLst/>
+          </a:prstGeom>
+          <a:solidFill>
+            <a:schemeClr val="tx1"/>
+          </a:solidFill>
+          <a:ln>
+            <a:noFill/>
+          </a:ln>
+        </p:spPr>
+        <p:style>
+          <a:lnRef idx="2">
+            <a:schemeClr val="accent1">
+              <a:shade val="15000"/>
+            </a:schemeClr>
+          </a:lnRef>
+          <a:fillRef idx="1">
+            <a:schemeClr val="accent1"/>
+          </a:fillRef>
+          <a:effectRef idx="0">
+            <a:schemeClr val="accent1"/>
+          </a:effectRef>
+          <a:fontRef idx="minor">
+            <a:schemeClr val="lt1"/>
+          </a:fontRef>
+        </p:style>
+        <p:txBody>
+          <a:bodyPr rtlCol="0" anchor="ctr"/>
+          <a:lstStyle/>
+          <a:p>
+            <a:pPr algn="ctr"/>
+            <a:endParaRPr lang="en-GB"/>
+          </a:p>
+        </p:txBody>
+      </p:sp>
+      <p:sp>
+        <p:nvSpPr>
+          <p:cNvPr id="61" name="Hexagon 60">
+            <a:extLst>
+              <a:ext uri="{FF2B5EF4-FFF2-40B4-BE49-F238E27FC236}">
+                <a16:creationId xmlns:a16="http://schemas.microsoft.com/office/drawing/2014/main" id="{AD34D3D2-383F-309D-3DBB-002E7B6E8CC3}"/>
+              </a:ext>
+            </a:extLst>
+          </p:cNvPr>
+          <p:cNvSpPr/>
+          <p:nvPr/>
+        </p:nvSpPr>
+        <p:spPr>
+          <a:xfrm>
+            <a:off x="11031273" y="-7189308"/>
+            <a:ext cx="949136" cy="829189"/>
+          </a:xfrm>
+          <a:prstGeom prst="hexagon">
+            <a:avLst/>
+          </a:prstGeom>
+          <a:solidFill>
+            <a:schemeClr val="tx1"/>
+          </a:solidFill>
+          <a:ln>
+            <a:noFill/>
+          </a:ln>
+        </p:spPr>
+        <p:style>
+          <a:lnRef idx="2">
+            <a:schemeClr val="accent1">
+              <a:shade val="15000"/>
+            </a:schemeClr>
+          </a:lnRef>
+          <a:fillRef idx="1">
+            <a:schemeClr val="accent1"/>
+          </a:fillRef>
+          <a:effectRef idx="0">
+            <a:schemeClr val="accent1"/>
+          </a:effectRef>
+          <a:fontRef idx="minor">
+            <a:schemeClr val="lt1"/>
+          </a:fontRef>
+        </p:style>
+        <p:txBody>
+          <a:bodyPr rtlCol="0" anchor="ctr"/>
+          <a:lstStyle/>
+          <a:p>
+            <a:pPr algn="ctr"/>
+            <a:endParaRPr lang="en-GB"/>
+          </a:p>
+        </p:txBody>
+      </p:sp>
+      <p:sp>
+        <p:nvSpPr>
+          <p:cNvPr id="62" name="Hexagon 61">
+            <a:extLst>
+              <a:ext uri="{FF2B5EF4-FFF2-40B4-BE49-F238E27FC236}">
+                <a16:creationId xmlns:a16="http://schemas.microsoft.com/office/drawing/2014/main" id="{3E090B48-5402-4FCB-2F60-9AA53F99B87E}"/>
+              </a:ext>
+            </a:extLst>
+          </p:cNvPr>
+          <p:cNvSpPr/>
+          <p:nvPr/>
+        </p:nvSpPr>
+        <p:spPr>
+          <a:xfrm rot="19025841">
+            <a:off x="11260145" y="-7949914"/>
+            <a:ext cx="949136" cy="829189"/>
+          </a:xfrm>
+          <a:prstGeom prst="hexagon">
+            <a:avLst/>
+          </a:prstGeom>
+          <a:solidFill>
+            <a:schemeClr val="tx1"/>
+          </a:solidFill>
+          <a:ln>
+            <a:noFill/>
+          </a:ln>
+        </p:spPr>
+        <p:style>
+          <a:lnRef idx="2">
+            <a:schemeClr val="accent1">
+              <a:shade val="15000"/>
+            </a:schemeClr>
+          </a:lnRef>
+          <a:fillRef idx="1">
+            <a:schemeClr val="accent1"/>
+          </a:fillRef>
+          <a:effectRef idx="0">
+            <a:schemeClr val="accent1"/>
+          </a:effectRef>
+          <a:fontRef idx="minor">
+            <a:schemeClr val="lt1"/>
+          </a:fontRef>
+        </p:style>
+        <p:txBody>
+          <a:bodyPr rtlCol="0" anchor="ctr"/>
+          <a:lstStyle/>
+          <a:p>
+            <a:pPr algn="ctr"/>
+            <a:endParaRPr lang="en-GB"/>
+          </a:p>
+        </p:txBody>
+      </p:sp>
+      <p:sp>
+        <p:nvSpPr>
+          <p:cNvPr id="63" name="Hexagon 62">
+            <a:extLst>
+              <a:ext uri="{FF2B5EF4-FFF2-40B4-BE49-F238E27FC236}">
+                <a16:creationId xmlns:a16="http://schemas.microsoft.com/office/drawing/2014/main" id="{826E071C-5FC5-AA02-B8BE-22167719EFB7}"/>
+              </a:ext>
+            </a:extLst>
+          </p:cNvPr>
+          <p:cNvSpPr/>
+          <p:nvPr/>
+        </p:nvSpPr>
+        <p:spPr>
+          <a:xfrm>
+            <a:off x="11424044" y="-8600278"/>
+            <a:ext cx="949136" cy="829189"/>
+          </a:xfrm>
+          <a:prstGeom prst="hexagon">
+            <a:avLst/>
+          </a:prstGeom>
+          <a:solidFill>
+            <a:schemeClr val="tx1"/>
+          </a:solidFill>
+          <a:ln>
+            <a:noFill/>
+          </a:ln>
+        </p:spPr>
+        <p:style>
+          <a:lnRef idx="2">
+            <a:schemeClr val="accent1">
+              <a:shade val="15000"/>
+            </a:schemeClr>
+          </a:lnRef>
+          <a:fillRef idx="1">
+            <a:schemeClr val="accent1"/>
+          </a:fillRef>
+          <a:effectRef idx="0">
+            <a:schemeClr val="accent1"/>
+          </a:effectRef>
+          <a:fontRef idx="minor">
+            <a:schemeClr val="lt1"/>
+          </a:fontRef>
+        </p:style>
+        <p:txBody>
+          <a:bodyPr rtlCol="0" anchor="ctr"/>
+          <a:lstStyle/>
+          <a:p>
+            <a:pPr algn="ctr"/>
+            <a:endParaRPr lang="en-GB"/>
+          </a:p>
+        </p:txBody>
+      </p:sp>
+      <p:pic>
+        <p:nvPicPr>
+          <p:cNvPr id="10" name="Picture 9">
+            <a:extLst>
+              <a:ext uri="{FF2B5EF4-FFF2-40B4-BE49-F238E27FC236}">
+                <a16:creationId xmlns:a16="http://schemas.microsoft.com/office/drawing/2014/main" id="{534D7AFF-16D6-8FD2-AC01-5A11EAB7F0F8}"/>
+              </a:ext>
+            </a:extLst>
+          </p:cNvPr>
+          <p:cNvPicPr>
+            <a:picLocks noChangeAspect="1"/>
+          </p:cNvPicPr>
+          <p:nvPr/>
+        </p:nvPicPr>
+        <p:blipFill>
+          <a:blip r:embed="rId5">
+            <a:extLst>
+              <a:ext uri="{28A0092B-C50C-407E-A947-70E740481C1C}">
+                <a14:useLocalDpi xmlns:a14="http://schemas.microsoft.com/office/drawing/2010/main" val="0"/>
+              </a:ext>
+            </a:extLst>
+          </a:blip>
+          <a:stretch>
+            <a:fillRect/>
+          </a:stretch>
+        </p:blipFill>
+        <p:spPr>
+          <a:xfrm rot="728952">
+            <a:off x="9133491" y="2720684"/>
+            <a:ext cx="3681486" cy="2044700"/>
+          </a:xfrm>
+          <a:prstGeom prst="rect">
+            <a:avLst/>
+          </a:prstGeom>
+        </p:spPr>
+      </p:pic>
+      <p:pic>
+        <p:nvPicPr>
+          <p:cNvPr id="12" name="Picture 11">
+            <a:extLst>
+              <a:ext uri="{FF2B5EF4-FFF2-40B4-BE49-F238E27FC236}">
+                <a16:creationId xmlns:a16="http://schemas.microsoft.com/office/drawing/2014/main" id="{F126F8C0-A8D9-7851-A49C-243DFC2A63F6}"/>
+              </a:ext>
+            </a:extLst>
+          </p:cNvPr>
+          <p:cNvPicPr>
+            <a:picLocks noChangeAspect="1"/>
+          </p:cNvPicPr>
+          <p:nvPr/>
+        </p:nvPicPr>
+        <p:blipFill>
+          <a:blip r:embed="rId5">
+            <a:extLst>
+              <a:ext uri="{28A0092B-C50C-407E-A947-70E740481C1C}">
+                <a14:useLocalDpi xmlns:a14="http://schemas.microsoft.com/office/drawing/2010/main" val="0"/>
+              </a:ext>
+            </a:extLst>
+          </a:blip>
+          <a:stretch>
+            <a:fillRect/>
+          </a:stretch>
+        </p:blipFill>
+        <p:spPr>
+          <a:xfrm rot="728952">
+            <a:off x="10033258" y="-1464554"/>
+            <a:ext cx="3681486" cy="2044700"/>
+          </a:xfrm>
+          <a:prstGeom prst="rect">
+            <a:avLst/>
+          </a:prstGeom>
+        </p:spPr>
+      </p:pic>
+      <p:pic>
+        <p:nvPicPr>
+          <p:cNvPr id="13" name="Picture 12">
+            <a:extLst>
+              <a:ext uri="{FF2B5EF4-FFF2-40B4-BE49-F238E27FC236}">
+                <a16:creationId xmlns:a16="http://schemas.microsoft.com/office/drawing/2014/main" id="{48AA941D-E738-6945-0C51-837854DDC061}"/>
+              </a:ext>
+            </a:extLst>
+          </p:cNvPr>
+          <p:cNvPicPr>
+            <a:picLocks noChangeAspect="1"/>
+          </p:cNvPicPr>
+          <p:nvPr/>
+        </p:nvPicPr>
+        <p:blipFill>
+          <a:blip r:embed="rId5">
+            <a:extLst>
+              <a:ext uri="{28A0092B-C50C-407E-A947-70E740481C1C}">
+                <a14:useLocalDpi xmlns:a14="http://schemas.microsoft.com/office/drawing/2010/main" val="0"/>
+              </a:ext>
+            </a:extLst>
+          </a:blip>
+          <a:stretch>
+            <a:fillRect/>
+          </a:stretch>
+        </p:blipFill>
+        <p:spPr>
+          <a:xfrm rot="728952">
+            <a:off x="8225737" y="6905919"/>
+            <a:ext cx="3681486" cy="2044700"/>
+          </a:xfrm>
+          <a:prstGeom prst="rect">
+            <a:avLst/>
+          </a:prstGeom>
+        </p:spPr>
+      </p:pic>
+      <p:pic>
+        <p:nvPicPr>
+          <p:cNvPr id="15" name="Picture 14">
+            <a:extLst>
+              <a:ext uri="{FF2B5EF4-FFF2-40B4-BE49-F238E27FC236}">
+                <a16:creationId xmlns:a16="http://schemas.microsoft.com/office/drawing/2014/main" id="{774A9075-FA80-BF8A-1525-9A60A184242E}"/>
+              </a:ext>
+            </a:extLst>
+          </p:cNvPr>
+          <p:cNvPicPr>
+            <a:picLocks noChangeAspect="1"/>
+          </p:cNvPicPr>
+          <p:nvPr/>
+        </p:nvPicPr>
+        <p:blipFill>
+          <a:blip r:embed="rId6">
+            <a:extLst>
+              <a:ext uri="{28A0092B-C50C-407E-A947-70E740481C1C}">
+                <a14:useLocalDpi xmlns:a14="http://schemas.microsoft.com/office/drawing/2010/main" val="0"/>
+              </a:ext>
+            </a:extLst>
+          </a:blip>
+          <a:stretch>
+            <a:fillRect/>
+          </a:stretch>
+        </p:blipFill>
+        <p:spPr>
+          <a:xfrm rot="720000">
+            <a:off x="8699766" y="4836409"/>
+            <a:ext cx="3664425" cy="2044310"/>
+          </a:xfrm>
+          <a:prstGeom prst="rect">
+            <a:avLst/>
+          </a:prstGeom>
+        </p:spPr>
+      </p:pic>
+      <p:pic>
+        <p:nvPicPr>
+          <p:cNvPr id="17" name="Picture 16">
+            <a:extLst>
+              <a:ext uri="{FF2B5EF4-FFF2-40B4-BE49-F238E27FC236}">
+                <a16:creationId xmlns:a16="http://schemas.microsoft.com/office/drawing/2014/main" id="{D062FD40-C1D6-42A2-26B8-68FD35D1F18D}"/>
+              </a:ext>
+            </a:extLst>
+          </p:cNvPr>
+          <p:cNvPicPr>
+            <a:picLocks noChangeAspect="1"/>
+          </p:cNvPicPr>
+          <p:nvPr/>
+        </p:nvPicPr>
+        <p:blipFill>
+          <a:blip r:embed="rId7">
+            <a:extLst>
+              <a:ext uri="{28A0092B-C50C-407E-A947-70E740481C1C}">
+                <a14:useLocalDpi xmlns:a14="http://schemas.microsoft.com/office/drawing/2010/main" val="0"/>
+              </a:ext>
+            </a:extLst>
+          </a:blip>
+          <a:stretch>
+            <a:fillRect/>
+          </a:stretch>
+        </p:blipFill>
+        <p:spPr>
+          <a:xfrm rot="720000">
+            <a:off x="9591190" y="604246"/>
+            <a:ext cx="3668148" cy="2095863"/>
+          </a:xfrm>
+          <a:prstGeom prst="rect">
+            <a:avLst/>
+          </a:prstGeom>
+        </p:spPr>
+      </p:pic>
+      <p:sp>
+        <p:nvSpPr>
           <p:cNvPr id="2" name="Title 1">
             <a:extLst>
               <a:ext uri="{FF2B5EF4-FFF2-40B4-BE49-F238E27FC236}">
@@ -3873,34 +8555,13 @@
           <a:lstStyle/>
           <a:p>
             <a:r>
-              <a:rPr lang="en-GB" dirty="0"/>
-              <a:t>Unit testing system program</a:t>
+              <a:rPr lang="en-GB" dirty="0">
+                <a:solidFill>
+                  <a:schemeClr val="bg1"/>
+                </a:solidFill>
+              </a:rPr>
+              <a:t>Run time unit testing system program</a:t>
             </a:r>
-          </a:p>
-        </p:txBody>
-      </p:sp>
-      <p:sp>
-        <p:nvSpPr>
-          <p:cNvPr id="3" name="Content Placeholder 2">
-            <a:extLst>
-              <a:ext uri="{FF2B5EF4-FFF2-40B4-BE49-F238E27FC236}">
-                <a16:creationId xmlns:a16="http://schemas.microsoft.com/office/drawing/2014/main" id="{A87D70AF-8C54-0610-4C5A-1F63060551C6}"/>
-              </a:ext>
-            </a:extLst>
-          </p:cNvPr>
-          <p:cNvSpPr>
-            <a:spLocks noGrp="1"/>
-          </p:cNvSpPr>
-          <p:nvPr>
-            <p:ph idx="1"/>
-          </p:nvPr>
-        </p:nvSpPr>
-        <p:spPr/>
-        <p:txBody>
-          <a:bodyPr/>
-          <a:lstStyle/>
-          <a:p>
-            <a:endParaRPr lang="en-GB"/>
           </a:p>
         </p:txBody>
       </p:sp>
@@ -3914,6 +8575,689 @@
   <p:clrMapOvr>
     <a:masterClrMapping/>
   </p:clrMapOvr>
+  <p:timing>
+    <p:tnLst>
+      <p:par>
+        <p:cTn id="1" dur="indefinite" restart="never" nodeType="tmRoot">
+          <p:childTnLst>
+            <p:seq concurrent="1" nextAc="seek">
+              <p:cTn id="2" dur="indefinite" nodeType="mainSeq">
+                <p:childTnLst>
+                  <p:par>
+                    <p:cTn id="3" fill="hold">
+                      <p:stCondLst>
+                        <p:cond delay="indefinite"/>
+                        <p:cond evt="onBegin" delay="0">
+                          <p:tn val="2"/>
+                        </p:cond>
+                      </p:stCondLst>
+                      <p:childTnLst>
+                        <p:par>
+                          <p:cTn id="4" fill="hold">
+                            <p:stCondLst>
+                              <p:cond delay="0"/>
+                            </p:stCondLst>
+                            <p:childTnLst>
+                              <p:par>
+                                <p:cTn id="5" presetID="42" presetClass="path" presetSubtype="0" repeatCount="indefinite" autoRev="1" fill="hold" grpId="0" nodeType="withEffect">
+                                  <p:stCondLst>
+                                    <p:cond delay="0"/>
+                                  </p:stCondLst>
+                                  <p:endCondLst>
+                                    <p:cond evt="onNext" delay="0">
+                                      <p:tgtEl>
+                                        <p:sldTgt/>
+                                      </p:tgtEl>
+                                    </p:cond>
+                                  </p:endCondLst>
+                                  <p:childTnLst>
+                                    <p:animMotion origin="layout" path="M -3.95833E-6 -4.44444E-6 L -0.16445 1.23889 " pathEditMode="relative" rAng="0" ptsTypes="AA">
+                                      <p:cBhvr>
+                                        <p:cTn id="6" dur="40000" fill="hold"/>
+                                        <p:tgtEl>
+                                          <p:spTgt spid="18"/>
+                                        </p:tgtEl>
+                                        <p:attrNameLst>
+                                          <p:attrName>ppt_x</p:attrName>
+                                          <p:attrName>ppt_y</p:attrName>
+                                        </p:attrNameLst>
+                                      </p:cBhvr>
+                                      <p:rCtr x="-8229" y="61944"/>
+                                    </p:animMotion>
+                                  </p:childTnLst>
+                                </p:cTn>
+                              </p:par>
+                              <p:par>
+                                <p:cTn id="7" presetID="42" presetClass="path" presetSubtype="0" repeatCount="indefinite" autoRev="1" fill="hold" grpId="0" nodeType="withEffect">
+                                  <p:stCondLst>
+                                    <p:cond delay="0"/>
+                                  </p:stCondLst>
+                                  <p:endCondLst>
+                                    <p:cond evt="onNext" delay="0">
+                                      <p:tgtEl>
+                                        <p:sldTgt/>
+                                      </p:tgtEl>
+                                    </p:cond>
+                                  </p:endCondLst>
+                                  <p:childTnLst>
+                                    <p:animMotion origin="layout" path="M -2.70833E-6 -1.11111E-6 L -0.16445 1.23889 " pathEditMode="relative" rAng="0" ptsTypes="AA">
+                                      <p:cBhvr>
+                                        <p:cTn id="8" dur="40000" fill="hold"/>
+                                        <p:tgtEl>
+                                          <p:spTgt spid="34"/>
+                                        </p:tgtEl>
+                                        <p:attrNameLst>
+                                          <p:attrName>ppt_x</p:attrName>
+                                          <p:attrName>ppt_y</p:attrName>
+                                        </p:attrNameLst>
+                                      </p:cBhvr>
+                                      <p:rCtr x="-8229" y="61944"/>
+                                    </p:animMotion>
+                                  </p:childTnLst>
+                                </p:cTn>
+                              </p:par>
+                              <p:par>
+                                <p:cTn id="9" presetID="42" presetClass="path" presetSubtype="0" repeatCount="indefinite" autoRev="1" fill="hold" grpId="0" nodeType="withEffect">
+                                  <p:stCondLst>
+                                    <p:cond delay="0"/>
+                                  </p:stCondLst>
+                                  <p:endCondLst>
+                                    <p:cond evt="onNext" delay="0">
+                                      <p:tgtEl>
+                                        <p:sldTgt/>
+                                      </p:tgtEl>
+                                    </p:cond>
+                                  </p:endCondLst>
+                                  <p:childTnLst>
+                                    <p:animMotion origin="layout" path="M -2.08333E-7 4.44444E-6 L -0.16445 1.23888 " pathEditMode="relative" rAng="0" ptsTypes="AA">
+                                      <p:cBhvr>
+                                        <p:cTn id="10" dur="40000" fill="hold"/>
+                                        <p:tgtEl>
+                                          <p:spTgt spid="35"/>
+                                        </p:tgtEl>
+                                        <p:attrNameLst>
+                                          <p:attrName>ppt_x</p:attrName>
+                                          <p:attrName>ppt_y</p:attrName>
+                                        </p:attrNameLst>
+                                      </p:cBhvr>
+                                      <p:rCtr x="-8229" y="61944"/>
+                                    </p:animMotion>
+                                  </p:childTnLst>
+                                </p:cTn>
+                              </p:par>
+                              <p:par>
+                                <p:cTn id="11" presetID="42" presetClass="path" presetSubtype="0" repeatCount="indefinite" autoRev="1" fill="hold" grpId="0" nodeType="withEffect">
+                                  <p:stCondLst>
+                                    <p:cond delay="0"/>
+                                  </p:stCondLst>
+                                  <p:endCondLst>
+                                    <p:cond evt="onNext" delay="0">
+                                      <p:tgtEl>
+                                        <p:sldTgt/>
+                                      </p:tgtEl>
+                                    </p:cond>
+                                  </p:endCondLst>
+                                  <p:childTnLst>
+                                    <p:animMotion origin="layout" path="M -3.95833E-6 4.07407E-6 L -0.16445 1.23888 " pathEditMode="relative" rAng="0" ptsTypes="AA">
+                                      <p:cBhvr>
+                                        <p:cTn id="12" dur="40000" fill="hold"/>
+                                        <p:tgtEl>
+                                          <p:spTgt spid="36"/>
+                                        </p:tgtEl>
+                                        <p:attrNameLst>
+                                          <p:attrName>ppt_x</p:attrName>
+                                          <p:attrName>ppt_y</p:attrName>
+                                        </p:attrNameLst>
+                                      </p:cBhvr>
+                                      <p:rCtr x="-8229" y="61944"/>
+                                    </p:animMotion>
+                                  </p:childTnLst>
+                                </p:cTn>
+                              </p:par>
+                              <p:par>
+                                <p:cTn id="13" presetID="42" presetClass="path" presetSubtype="0" repeatCount="indefinite" autoRev="1" fill="hold" grpId="0" nodeType="withEffect">
+                                  <p:stCondLst>
+                                    <p:cond delay="0"/>
+                                  </p:stCondLst>
+                                  <p:endCondLst>
+                                    <p:cond evt="onNext" delay="0">
+                                      <p:tgtEl>
+                                        <p:sldTgt/>
+                                      </p:tgtEl>
+                                    </p:cond>
+                                  </p:endCondLst>
+                                  <p:childTnLst>
+                                    <p:animMotion origin="layout" path="M -3.95833E-6 -4.07407E-6 L -0.16445 1.23889 " pathEditMode="relative" rAng="0" ptsTypes="AA">
+                                      <p:cBhvr>
+                                        <p:cTn id="14" dur="40000" fill="hold"/>
+                                        <p:tgtEl>
+                                          <p:spTgt spid="37"/>
+                                        </p:tgtEl>
+                                        <p:attrNameLst>
+                                          <p:attrName>ppt_x</p:attrName>
+                                          <p:attrName>ppt_y</p:attrName>
+                                        </p:attrNameLst>
+                                      </p:cBhvr>
+                                      <p:rCtr x="-8229" y="61944"/>
+                                    </p:animMotion>
+                                  </p:childTnLst>
+                                </p:cTn>
+                              </p:par>
+                              <p:par>
+                                <p:cTn id="15" presetID="42" presetClass="path" presetSubtype="0" repeatCount="indefinite" autoRev="1" fill="hold" grpId="0" nodeType="withEffect">
+                                  <p:stCondLst>
+                                    <p:cond delay="0"/>
+                                  </p:stCondLst>
+                                  <p:endCondLst>
+                                    <p:cond evt="onNext" delay="0">
+                                      <p:tgtEl>
+                                        <p:sldTgt/>
+                                      </p:tgtEl>
+                                    </p:cond>
+                                  </p:endCondLst>
+                                  <p:childTnLst>
+                                    <p:animMotion origin="layout" path="M -2.29167E-6 3.7037E-7 L -0.16445 1.23889 " pathEditMode="relative" rAng="0" ptsTypes="AA">
+                                      <p:cBhvr>
+                                        <p:cTn id="16" dur="40000" fill="hold"/>
+                                        <p:tgtEl>
+                                          <p:spTgt spid="38"/>
+                                        </p:tgtEl>
+                                        <p:attrNameLst>
+                                          <p:attrName>ppt_x</p:attrName>
+                                          <p:attrName>ppt_y</p:attrName>
+                                        </p:attrNameLst>
+                                      </p:cBhvr>
+                                      <p:rCtr x="-8229" y="61944"/>
+                                    </p:animMotion>
+                                  </p:childTnLst>
+                                </p:cTn>
+                              </p:par>
+                              <p:par>
+                                <p:cTn id="17" presetID="42" presetClass="path" presetSubtype="0" repeatCount="indefinite" autoRev="1" fill="hold" grpId="0" nodeType="withEffect">
+                                  <p:stCondLst>
+                                    <p:cond delay="0"/>
+                                  </p:stCondLst>
+                                  <p:endCondLst>
+                                    <p:cond evt="onNext" delay="0">
+                                      <p:tgtEl>
+                                        <p:sldTgt/>
+                                      </p:tgtEl>
+                                    </p:cond>
+                                  </p:endCondLst>
+                                  <p:childTnLst>
+                                    <p:animMotion origin="layout" path="M 3.125E-6 -2.22222E-6 L -0.16446 1.23889 " pathEditMode="relative" rAng="0" ptsTypes="AA">
+                                      <p:cBhvr>
+                                        <p:cTn id="18" dur="40000" fill="hold"/>
+                                        <p:tgtEl>
+                                          <p:spTgt spid="39"/>
+                                        </p:tgtEl>
+                                        <p:attrNameLst>
+                                          <p:attrName>ppt_x</p:attrName>
+                                          <p:attrName>ppt_y</p:attrName>
+                                        </p:attrNameLst>
+                                      </p:cBhvr>
+                                      <p:rCtr x="-8229" y="61944"/>
+                                    </p:animMotion>
+                                  </p:childTnLst>
+                                </p:cTn>
+                              </p:par>
+                              <p:par>
+                                <p:cTn id="19" presetID="42" presetClass="path" presetSubtype="0" repeatCount="indefinite" autoRev="1" fill="hold" grpId="0" nodeType="withEffect">
+                                  <p:stCondLst>
+                                    <p:cond delay="0"/>
+                                  </p:stCondLst>
+                                  <p:endCondLst>
+                                    <p:cond evt="onNext" delay="0">
+                                      <p:tgtEl>
+                                        <p:sldTgt/>
+                                      </p:tgtEl>
+                                    </p:cond>
+                                  </p:endCondLst>
+                                  <p:childTnLst>
+                                    <p:animMotion origin="layout" path="M 1.25E-6 -4.44444E-6 L -0.16445 1.23889 " pathEditMode="relative" rAng="0" ptsTypes="AA">
+                                      <p:cBhvr>
+                                        <p:cTn id="20" dur="40000" fill="hold"/>
+                                        <p:tgtEl>
+                                          <p:spTgt spid="40"/>
+                                        </p:tgtEl>
+                                        <p:attrNameLst>
+                                          <p:attrName>ppt_x</p:attrName>
+                                          <p:attrName>ppt_y</p:attrName>
+                                        </p:attrNameLst>
+                                      </p:cBhvr>
+                                      <p:rCtr x="-8229" y="61944"/>
+                                    </p:animMotion>
+                                  </p:childTnLst>
+                                </p:cTn>
+                              </p:par>
+                              <p:par>
+                                <p:cTn id="21" presetID="42" presetClass="path" presetSubtype="0" repeatCount="indefinite" autoRev="1" fill="hold" grpId="0" nodeType="withEffect">
+                                  <p:stCondLst>
+                                    <p:cond delay="0"/>
+                                  </p:stCondLst>
+                                  <p:endCondLst>
+                                    <p:cond evt="onNext" delay="0">
+                                      <p:tgtEl>
+                                        <p:sldTgt/>
+                                      </p:tgtEl>
+                                    </p:cond>
+                                  </p:endCondLst>
+                                  <p:childTnLst>
+                                    <p:animMotion origin="layout" path="M -1.875E-6 4.07407E-6 L -0.16445 1.23888 " pathEditMode="relative" rAng="0" ptsTypes="AA">
+                                      <p:cBhvr>
+                                        <p:cTn id="22" dur="40000" fill="hold"/>
+                                        <p:tgtEl>
+                                          <p:spTgt spid="41"/>
+                                        </p:tgtEl>
+                                        <p:attrNameLst>
+                                          <p:attrName>ppt_x</p:attrName>
+                                          <p:attrName>ppt_y</p:attrName>
+                                        </p:attrNameLst>
+                                      </p:cBhvr>
+                                      <p:rCtr x="-8229" y="61944"/>
+                                    </p:animMotion>
+                                  </p:childTnLst>
+                                </p:cTn>
+                              </p:par>
+                              <p:par>
+                                <p:cTn id="23" presetID="42" presetClass="path" presetSubtype="0" repeatCount="indefinite" autoRev="1" fill="hold" grpId="0" nodeType="withEffect">
+                                  <p:stCondLst>
+                                    <p:cond delay="0"/>
+                                  </p:stCondLst>
+                                  <p:endCondLst>
+                                    <p:cond evt="onNext" delay="0">
+                                      <p:tgtEl>
+                                        <p:sldTgt/>
+                                      </p:tgtEl>
+                                    </p:cond>
+                                  </p:endCondLst>
+                                  <p:childTnLst>
+                                    <p:animMotion origin="layout" path="M 1.11022E-16 -2.59259E-6 L -0.16445 1.23889 " pathEditMode="relative" rAng="0" ptsTypes="AA">
+                                      <p:cBhvr>
+                                        <p:cTn id="24" dur="40000" fill="hold"/>
+                                        <p:tgtEl>
+                                          <p:spTgt spid="52"/>
+                                        </p:tgtEl>
+                                        <p:attrNameLst>
+                                          <p:attrName>ppt_x</p:attrName>
+                                          <p:attrName>ppt_y</p:attrName>
+                                        </p:attrNameLst>
+                                      </p:cBhvr>
+                                      <p:rCtr x="-8229" y="61944"/>
+                                    </p:animMotion>
+                                  </p:childTnLst>
+                                </p:cTn>
+                              </p:par>
+                              <p:par>
+                                <p:cTn id="25" presetID="42" presetClass="path" presetSubtype="0" repeatCount="indefinite" autoRev="1" fill="hold" grpId="0" nodeType="withEffect">
+                                  <p:stCondLst>
+                                    <p:cond delay="0"/>
+                                  </p:stCondLst>
+                                  <p:endCondLst>
+                                    <p:cond evt="onNext" delay="0">
+                                      <p:tgtEl>
+                                        <p:sldTgt/>
+                                      </p:tgtEl>
+                                    </p:cond>
+                                  </p:endCondLst>
+                                  <p:childTnLst>
+                                    <p:animMotion origin="layout" path="M 1.25E-6 -7.40741E-7 L -0.16445 1.23889 " pathEditMode="relative" rAng="0" ptsTypes="AA">
+                                      <p:cBhvr>
+                                        <p:cTn id="26" dur="40000" fill="hold"/>
+                                        <p:tgtEl>
+                                          <p:spTgt spid="53"/>
+                                        </p:tgtEl>
+                                        <p:attrNameLst>
+                                          <p:attrName>ppt_x</p:attrName>
+                                          <p:attrName>ppt_y</p:attrName>
+                                        </p:attrNameLst>
+                                      </p:cBhvr>
+                                      <p:rCtr x="-8229" y="61944"/>
+                                    </p:animMotion>
+                                  </p:childTnLst>
+                                </p:cTn>
+                              </p:par>
+                              <p:par>
+                                <p:cTn id="27" presetID="42" presetClass="path" presetSubtype="0" repeatCount="indefinite" autoRev="1" fill="hold" grpId="0" nodeType="withEffect">
+                                  <p:stCondLst>
+                                    <p:cond delay="0"/>
+                                  </p:stCondLst>
+                                  <p:endCondLst>
+                                    <p:cond evt="onNext" delay="0">
+                                      <p:tgtEl>
+                                        <p:sldTgt/>
+                                      </p:tgtEl>
+                                    </p:cond>
+                                  </p:endCondLst>
+                                  <p:childTnLst>
+                                    <p:animMotion origin="layout" path="M 3.75E-6 -3.7037E-6 L -0.16446 1.23889 " pathEditMode="relative" rAng="0" ptsTypes="AA">
+                                      <p:cBhvr>
+                                        <p:cTn id="28" dur="40000" fill="hold"/>
+                                        <p:tgtEl>
+                                          <p:spTgt spid="54"/>
+                                        </p:tgtEl>
+                                        <p:attrNameLst>
+                                          <p:attrName>ppt_x</p:attrName>
+                                          <p:attrName>ppt_y</p:attrName>
+                                        </p:attrNameLst>
+                                      </p:cBhvr>
+                                      <p:rCtr x="-8229" y="61944"/>
+                                    </p:animMotion>
+                                  </p:childTnLst>
+                                </p:cTn>
+                              </p:par>
+                              <p:par>
+                                <p:cTn id="29" presetID="42" presetClass="path" presetSubtype="0" repeatCount="indefinite" autoRev="1" fill="hold" grpId="0" nodeType="withEffect">
+                                  <p:stCondLst>
+                                    <p:cond delay="0"/>
+                                  </p:stCondLst>
+                                  <p:endCondLst>
+                                    <p:cond evt="onNext" delay="0">
+                                      <p:tgtEl>
+                                        <p:sldTgt/>
+                                      </p:tgtEl>
+                                    </p:cond>
+                                  </p:endCondLst>
+                                  <p:childTnLst>
+                                    <p:animMotion origin="layout" path="M 1.11022E-16 -4.07407E-6 L -0.16445 1.23889 " pathEditMode="relative" rAng="0" ptsTypes="AA">
+                                      <p:cBhvr>
+                                        <p:cTn id="30" dur="40000" fill="hold"/>
+                                        <p:tgtEl>
+                                          <p:spTgt spid="55"/>
+                                        </p:tgtEl>
+                                        <p:attrNameLst>
+                                          <p:attrName>ppt_x</p:attrName>
+                                          <p:attrName>ppt_y</p:attrName>
+                                        </p:attrNameLst>
+                                      </p:cBhvr>
+                                      <p:rCtr x="-8229" y="61944"/>
+                                    </p:animMotion>
+                                  </p:childTnLst>
+                                </p:cTn>
+                              </p:par>
+                              <p:par>
+                                <p:cTn id="31" presetID="42" presetClass="path" presetSubtype="0" repeatCount="indefinite" autoRev="1" fill="hold" grpId="0" nodeType="withEffect">
+                                  <p:stCondLst>
+                                    <p:cond delay="0"/>
+                                  </p:stCondLst>
+                                  <p:endCondLst>
+                                    <p:cond evt="onNext" delay="0">
+                                      <p:tgtEl>
+                                        <p:sldTgt/>
+                                      </p:tgtEl>
+                                    </p:cond>
+                                  </p:endCondLst>
+                                  <p:childTnLst>
+                                    <p:animMotion origin="layout" path="M 1.11022E-16 -2.22222E-6 L -0.16445 1.23889 " pathEditMode="relative" rAng="0" ptsTypes="AA">
+                                      <p:cBhvr>
+                                        <p:cTn id="32" dur="40000" fill="hold"/>
+                                        <p:tgtEl>
+                                          <p:spTgt spid="56"/>
+                                        </p:tgtEl>
+                                        <p:attrNameLst>
+                                          <p:attrName>ppt_x</p:attrName>
+                                          <p:attrName>ppt_y</p:attrName>
+                                        </p:attrNameLst>
+                                      </p:cBhvr>
+                                      <p:rCtr x="-8229" y="61944"/>
+                                    </p:animMotion>
+                                  </p:childTnLst>
+                                </p:cTn>
+                              </p:par>
+                              <p:par>
+                                <p:cTn id="33" presetID="42" presetClass="path" presetSubtype="0" repeatCount="indefinite" autoRev="1" fill="hold" grpId="0" nodeType="withEffect">
+                                  <p:stCondLst>
+                                    <p:cond delay="0"/>
+                                  </p:stCondLst>
+                                  <p:endCondLst>
+                                    <p:cond evt="onNext" delay="0">
+                                      <p:tgtEl>
+                                        <p:sldTgt/>
+                                      </p:tgtEl>
+                                    </p:cond>
+                                  </p:endCondLst>
+                                  <p:childTnLst>
+                                    <p:animMotion origin="layout" path="M 1.66667E-6 2.22222E-6 L -0.16445 1.23889 " pathEditMode="relative" rAng="0" ptsTypes="AA">
+                                      <p:cBhvr>
+                                        <p:cTn id="34" dur="40000" fill="hold"/>
+                                        <p:tgtEl>
+                                          <p:spTgt spid="57"/>
+                                        </p:tgtEl>
+                                        <p:attrNameLst>
+                                          <p:attrName>ppt_x</p:attrName>
+                                          <p:attrName>ppt_y</p:attrName>
+                                        </p:attrNameLst>
+                                      </p:cBhvr>
+                                      <p:rCtr x="-8229" y="61944"/>
+                                    </p:animMotion>
+                                  </p:childTnLst>
+                                </p:cTn>
+                              </p:par>
+                              <p:par>
+                                <p:cTn id="35" presetID="42" presetClass="path" presetSubtype="0" repeatCount="indefinite" autoRev="1" fill="hold" grpId="0" nodeType="withEffect">
+                                  <p:stCondLst>
+                                    <p:cond delay="0"/>
+                                  </p:stCondLst>
+                                  <p:endCondLst>
+                                    <p:cond evt="onNext" delay="0">
+                                      <p:tgtEl>
+                                        <p:sldTgt/>
+                                      </p:tgtEl>
+                                    </p:cond>
+                                  </p:endCondLst>
+                                  <p:childTnLst>
+                                    <p:animMotion origin="layout" path="M -2.91667E-6 -3.7037E-7 L -0.16445 1.23889 " pathEditMode="relative" rAng="0" ptsTypes="AA">
+                                      <p:cBhvr>
+                                        <p:cTn id="36" dur="40000" fill="hold"/>
+                                        <p:tgtEl>
+                                          <p:spTgt spid="58"/>
+                                        </p:tgtEl>
+                                        <p:attrNameLst>
+                                          <p:attrName>ppt_x</p:attrName>
+                                          <p:attrName>ppt_y</p:attrName>
+                                        </p:attrNameLst>
+                                      </p:cBhvr>
+                                      <p:rCtr x="-8229" y="61944"/>
+                                    </p:animMotion>
+                                  </p:childTnLst>
+                                </p:cTn>
+                              </p:par>
+                              <p:par>
+                                <p:cTn id="37" presetID="42" presetClass="path" presetSubtype="0" repeatCount="indefinite" autoRev="1" fill="hold" grpId="0" nodeType="withEffect">
+                                  <p:stCondLst>
+                                    <p:cond delay="0"/>
+                                  </p:stCondLst>
+                                  <p:endCondLst>
+                                    <p:cond evt="onNext" delay="0">
+                                      <p:tgtEl>
+                                        <p:sldTgt/>
+                                      </p:tgtEl>
+                                    </p:cond>
+                                  </p:endCondLst>
+                                  <p:childTnLst>
+                                    <p:animMotion origin="layout" path="M -4.79167E-6 -2.59259E-6 L -0.16445 1.23889 " pathEditMode="relative" rAng="0" ptsTypes="AA">
+                                      <p:cBhvr>
+                                        <p:cTn id="38" dur="40000" fill="hold"/>
+                                        <p:tgtEl>
+                                          <p:spTgt spid="59"/>
+                                        </p:tgtEl>
+                                        <p:attrNameLst>
+                                          <p:attrName>ppt_x</p:attrName>
+                                          <p:attrName>ppt_y</p:attrName>
+                                        </p:attrNameLst>
+                                      </p:cBhvr>
+                                      <p:rCtr x="-8229" y="61944"/>
+                                    </p:animMotion>
+                                  </p:childTnLst>
+                                </p:cTn>
+                              </p:par>
+                              <p:par>
+                                <p:cTn id="39" presetID="42" presetClass="path" presetSubtype="0" repeatCount="indefinite" autoRev="1" fill="hold" grpId="0" nodeType="withEffect">
+                                  <p:stCondLst>
+                                    <p:cond delay="0"/>
+                                  </p:stCondLst>
+                                  <p:endCondLst>
+                                    <p:cond evt="onNext" delay="0">
+                                      <p:tgtEl>
+                                        <p:sldTgt/>
+                                      </p:tgtEl>
+                                    </p:cond>
+                                  </p:endCondLst>
+                                  <p:childTnLst>
+                                    <p:animMotion origin="layout" path="M 2.08333E-6 -4.07407E-6 L -0.16446 1.23889 " pathEditMode="relative" rAng="0" ptsTypes="AA">
+                                      <p:cBhvr>
+                                        <p:cTn id="40" dur="40000" fill="hold"/>
+                                        <p:tgtEl>
+                                          <p:spTgt spid="60"/>
+                                        </p:tgtEl>
+                                        <p:attrNameLst>
+                                          <p:attrName>ppt_x</p:attrName>
+                                          <p:attrName>ppt_y</p:attrName>
+                                        </p:attrNameLst>
+                                      </p:cBhvr>
+                                      <p:rCtr x="-8229" y="61944"/>
+                                    </p:animMotion>
+                                  </p:childTnLst>
+                                </p:cTn>
+                              </p:par>
+                              <p:par>
+                                <p:cTn id="41" presetID="42" presetClass="path" presetSubtype="0" repeatCount="indefinite" autoRev="1" fill="hold" grpId="0" nodeType="withEffect">
+                                  <p:stCondLst>
+                                    <p:cond delay="0"/>
+                                  </p:stCondLst>
+                                  <p:endCondLst>
+                                    <p:cond evt="onNext" delay="0">
+                                      <p:tgtEl>
+                                        <p:sldTgt/>
+                                      </p:tgtEl>
+                                    </p:cond>
+                                  </p:endCondLst>
+                                  <p:childTnLst>
+                                    <p:animMotion origin="layout" path="M 1.11022E-16 1.48148E-6 L -0.16445 1.23889 " pathEditMode="relative" rAng="0" ptsTypes="AA">
+                                      <p:cBhvr>
+                                        <p:cTn id="42" dur="40000" fill="hold"/>
+                                        <p:tgtEl>
+                                          <p:spTgt spid="61"/>
+                                        </p:tgtEl>
+                                        <p:attrNameLst>
+                                          <p:attrName>ppt_x</p:attrName>
+                                          <p:attrName>ppt_y</p:attrName>
+                                        </p:attrNameLst>
+                                      </p:cBhvr>
+                                      <p:rCtr x="-8229" y="61944"/>
+                                    </p:animMotion>
+                                  </p:childTnLst>
+                                </p:cTn>
+                              </p:par>
+                              <p:par>
+                                <p:cTn id="43" presetID="42" presetClass="path" presetSubtype="0" repeatCount="indefinite" autoRev="1" fill="hold" grpId="0" nodeType="withEffect">
+                                  <p:stCondLst>
+                                    <p:cond delay="0"/>
+                                  </p:stCondLst>
+                                  <p:endCondLst>
+                                    <p:cond evt="onNext" delay="0">
+                                      <p:tgtEl>
+                                        <p:sldTgt/>
+                                      </p:tgtEl>
+                                    </p:cond>
+                                  </p:endCondLst>
+                                  <p:childTnLst>
+                                    <p:animMotion origin="layout" path="M 0 1.11111E-6 L -0.16445 1.23889 " pathEditMode="relative" rAng="0" ptsTypes="AA">
+                                      <p:cBhvr>
+                                        <p:cTn id="44" dur="40000" fill="hold"/>
+                                        <p:tgtEl>
+                                          <p:spTgt spid="62"/>
+                                        </p:tgtEl>
+                                        <p:attrNameLst>
+                                          <p:attrName>ppt_x</p:attrName>
+                                          <p:attrName>ppt_y</p:attrName>
+                                        </p:attrNameLst>
+                                      </p:cBhvr>
+                                      <p:rCtr x="-8229" y="61944"/>
+                                    </p:animMotion>
+                                  </p:childTnLst>
+                                </p:cTn>
+                              </p:par>
+                              <p:par>
+                                <p:cTn id="45" presetID="42" presetClass="path" presetSubtype="0" repeatCount="indefinite" autoRev="1" fill="hold" grpId="0" nodeType="withEffect">
+                                  <p:stCondLst>
+                                    <p:cond delay="0"/>
+                                  </p:stCondLst>
+                                  <p:endCondLst>
+                                    <p:cond evt="onNext" delay="0">
+                                      <p:tgtEl>
+                                        <p:sldTgt/>
+                                      </p:tgtEl>
+                                    </p:cond>
+                                  </p:endCondLst>
+                                  <p:childTnLst>
+                                    <p:animMotion origin="layout" path="M -1.45833E-6 -1.48148E-6 L -0.16445 1.23889 " pathEditMode="relative" rAng="0" ptsTypes="AA">
+                                      <p:cBhvr>
+                                        <p:cTn id="46" dur="40000" fill="hold"/>
+                                        <p:tgtEl>
+                                          <p:spTgt spid="63"/>
+                                        </p:tgtEl>
+                                        <p:attrNameLst>
+                                          <p:attrName>ppt_x</p:attrName>
+                                          <p:attrName>ppt_y</p:attrName>
+                                        </p:attrNameLst>
+                                      </p:cBhvr>
+                                      <p:rCtr x="-8229" y="61944"/>
+                                    </p:animMotion>
+                                  </p:childTnLst>
+                                </p:cTn>
+                              </p:par>
+                            </p:childTnLst>
+                          </p:cTn>
+                        </p:par>
+                      </p:childTnLst>
+                    </p:cTn>
+                  </p:par>
+                </p:childTnLst>
+              </p:cTn>
+              <p:prevCondLst>
+                <p:cond evt="onPrev" delay="0">
+                  <p:tgtEl>
+                    <p:sldTgt/>
+                  </p:tgtEl>
+                </p:cond>
+              </p:prevCondLst>
+              <p:nextCondLst>
+                <p:cond evt="onNext" delay="0">
+                  <p:tgtEl>
+                    <p:sldTgt/>
+                  </p:tgtEl>
+                </p:cond>
+              </p:nextCondLst>
+            </p:seq>
+          </p:childTnLst>
+        </p:cTn>
+      </p:par>
+    </p:tnLst>
+    <p:bldLst>
+      <p:bldP spid="18" grpId="0" animBg="1"/>
+      <p:bldP spid="34" grpId="0" animBg="1"/>
+      <p:bldP spid="35" grpId="0" animBg="1"/>
+      <p:bldP spid="36" grpId="0" animBg="1"/>
+      <p:bldP spid="37" grpId="0" animBg="1"/>
+      <p:bldP spid="38" grpId="0" animBg="1"/>
+      <p:bldP spid="39" grpId="0" animBg="1"/>
+      <p:bldP spid="40" grpId="0" animBg="1"/>
+      <p:bldP spid="41" grpId="0" animBg="1"/>
+      <p:bldP spid="52" grpId="0" animBg="1"/>
+      <p:bldP spid="53" grpId="0" animBg="1"/>
+      <p:bldP spid="54" grpId="0" animBg="1"/>
+      <p:bldP spid="55" grpId="0" animBg="1"/>
+      <p:bldP spid="56" grpId="0" animBg="1"/>
+      <p:bldP spid="57" grpId="0" animBg="1"/>
+      <p:bldP spid="58" grpId="0" animBg="1"/>
+      <p:bldP spid="59" grpId="0" animBg="1"/>
+      <p:bldP spid="60" grpId="0" animBg="1"/>
+      <p:bldP spid="61" grpId="0" animBg="1"/>
+      <p:bldP spid="62" grpId="0" animBg="1"/>
+      <p:bldP spid="63" grpId="0" animBg="1"/>
+    </p:bldLst>
+  </p:timing>
 </p:sld>
 </file>
 
@@ -3942,6 +9286,159 @@
       </p:grpSpPr>
       <p:sp>
         <p:nvSpPr>
+          <p:cNvPr id="4" name="Rectangle 3">
+            <a:extLst>
+              <a:ext uri="{FF2B5EF4-FFF2-40B4-BE49-F238E27FC236}">
+                <a16:creationId xmlns:a16="http://schemas.microsoft.com/office/drawing/2014/main" id="{2AE89533-A111-436A-8AC6-E6F40A0D4D4D}"/>
+              </a:ext>
+            </a:extLst>
+          </p:cNvPr>
+          <p:cNvSpPr/>
+          <p:nvPr/>
+        </p:nvSpPr>
+        <p:spPr>
+          <a:xfrm>
+            <a:off x="0" y="0"/>
+            <a:ext cx="12192000" cy="6858000"/>
+          </a:xfrm>
+          <a:prstGeom prst="rect">
+            <a:avLst/>
+          </a:prstGeom>
+          <a:gradFill flip="none" rotWithShape="1">
+            <a:gsLst>
+              <a:gs pos="0">
+                <a:schemeClr val="tx1">
+                  <a:lumMod val="65000"/>
+                  <a:lumOff val="35000"/>
+                  <a:shade val="30000"/>
+                  <a:satMod val="115000"/>
+                </a:schemeClr>
+              </a:gs>
+              <a:gs pos="50000">
+                <a:schemeClr val="tx1">
+                  <a:lumMod val="65000"/>
+                  <a:lumOff val="35000"/>
+                  <a:shade val="67500"/>
+                  <a:satMod val="115000"/>
+                </a:schemeClr>
+              </a:gs>
+              <a:gs pos="100000">
+                <a:schemeClr val="tx1">
+                  <a:lumMod val="65000"/>
+                  <a:lumOff val="35000"/>
+                  <a:shade val="100000"/>
+                  <a:satMod val="115000"/>
+                </a:schemeClr>
+              </a:gs>
+            </a:gsLst>
+            <a:lin ang="5400000" scaled="1"/>
+            <a:tileRect/>
+          </a:gradFill>
+          <a:ln>
+            <a:noFill/>
+          </a:ln>
+        </p:spPr>
+        <p:style>
+          <a:lnRef idx="2">
+            <a:schemeClr val="accent1">
+              <a:shade val="15000"/>
+            </a:schemeClr>
+          </a:lnRef>
+          <a:fillRef idx="1">
+            <a:schemeClr val="accent1"/>
+          </a:fillRef>
+          <a:effectRef idx="0">
+            <a:schemeClr val="accent1"/>
+          </a:effectRef>
+          <a:fontRef idx="minor">
+            <a:schemeClr val="lt1"/>
+          </a:fontRef>
+        </p:style>
+        <p:txBody>
+          <a:bodyPr rtlCol="0" anchor="ctr"/>
+          <a:lstStyle/>
+          <a:p>
+            <a:pPr algn="ctr"/>
+            <a:endParaRPr lang="en-GB">
+              <a:gradFill flip="none" rotWithShape="1">
+                <a:gsLst>
+                  <a:gs pos="0">
+                    <a:schemeClr val="accent4">
+                      <a:lumMod val="40000"/>
+                      <a:lumOff val="60000"/>
+                    </a:schemeClr>
+                  </a:gs>
+                  <a:gs pos="46000">
+                    <a:schemeClr val="accent4">
+                      <a:lumMod val="95000"/>
+                      <a:lumOff val="5000"/>
+                    </a:schemeClr>
+                  </a:gs>
+                  <a:gs pos="100000">
+                    <a:schemeClr val="accent4">
+                      <a:lumMod val="60000"/>
+                    </a:schemeClr>
+                  </a:gs>
+                </a:gsLst>
+                <a:path path="circle">
+                  <a:fillToRect l="50000" t="130000" r="50000" b="-30000"/>
+                </a:path>
+                <a:tileRect/>
+              </a:gradFill>
+            </a:endParaRPr>
+          </a:p>
+        </p:txBody>
+      </p:sp>
+      <p:pic>
+        <p:nvPicPr>
+          <p:cNvPr id="7170" name="Picture 2" descr="Unreal Engine 4 AI Programming Essentials">
+            <a:extLst>
+              <a:ext uri="{FF2B5EF4-FFF2-40B4-BE49-F238E27FC236}">
+                <a16:creationId xmlns:a16="http://schemas.microsoft.com/office/drawing/2014/main" id="{3BC632D3-78C7-D97D-0618-DFC6E714463F}"/>
+              </a:ext>
+            </a:extLst>
+          </p:cNvPr>
+          <p:cNvPicPr>
+            <a:picLocks noChangeAspect="1" noChangeArrowheads="1"/>
+          </p:cNvPicPr>
+          <p:nvPr/>
+        </p:nvPicPr>
+        <p:blipFill>
+          <a:blip r:embed="rId2">
+            <a:alphaModFix amt="20000"/>
+            <a:extLst>
+              <a:ext uri="{28A0092B-C50C-407E-A947-70E740481C1C}">
+                <a14:useLocalDpi xmlns:a14="http://schemas.microsoft.com/office/drawing/2010/main" val="0"/>
+              </a:ext>
+            </a:extLst>
+          </a:blip>
+          <a:srcRect/>
+          <a:stretch>
+            <a:fillRect/>
+          </a:stretch>
+        </p:blipFill>
+        <p:spPr bwMode="auto">
+          <a:xfrm>
+            <a:off x="-1" y="0"/>
+            <a:ext cx="10375188" cy="6857999"/>
+          </a:xfrm>
+          <a:prstGeom prst="rect">
+            <a:avLst/>
+          </a:prstGeom>
+          <a:noFill/>
+          <a:extLst>
+            <a:ext uri="{909E8E84-426E-40DD-AFC4-6F175D3DCCD1}">
+              <a14:hiddenFill xmlns:a14="http://schemas.microsoft.com/office/drawing/2010/main">
+                <a:solidFill>
+                  <a:srgbClr val="FFFFFF"/>
+                </a:solidFill>
+              </a14:hiddenFill>
+            </a:ext>
+          </a:extLst>
+        </p:spPr>
+      </p:pic>
+      <p:sp>
+        <p:nvSpPr>
           <p:cNvPr id="2" name="Title 1">
             <a:extLst>
               <a:ext uri="{FF2B5EF4-FFF2-40B4-BE49-F238E27FC236}">
@@ -3962,7 +9459,11 @@
           <a:lstStyle/>
           <a:p>
             <a:r>
-              <a:rPr lang="en-GB" dirty="0"/>
+              <a:rPr lang="en-GB" dirty="0">
+                <a:solidFill>
+                  <a:schemeClr val="bg1"/>
+                </a:solidFill>
+              </a:rPr>
               <a:t>AI behaviour Trees</a:t>
             </a:r>
           </a:p>
@@ -3984,11 +9485,1138 @@
             <p:ph idx="1"/>
           </p:nvPr>
         </p:nvSpPr>
-        <p:spPr/>
+        <p:spPr>
+          <a:xfrm>
+            <a:off x="838200" y="1825625"/>
+            <a:ext cx="8204200" cy="4351338"/>
+          </a:xfrm>
+        </p:spPr>
         <p:txBody>
           <a:bodyPr/>
           <a:lstStyle/>
           <a:p>
+            <a:r>
+              <a:rPr lang="en-GB" dirty="0">
+                <a:solidFill>
+                  <a:schemeClr val="bg1"/>
+                </a:solidFill>
+              </a:rPr>
+              <a:t>The behaviour trees can be process in two was forwards and backwards.</a:t>
+            </a:r>
+          </a:p>
+          <a:p>
+            <a:endParaRPr lang="en-GB" dirty="0">
+              <a:solidFill>
+                <a:schemeClr val="bg1"/>
+              </a:solidFill>
+            </a:endParaRPr>
+          </a:p>
+          <a:p>
+            <a:r>
+              <a:rPr lang="en-GB" dirty="0">
+                <a:solidFill>
+                  <a:schemeClr val="bg1"/>
+                </a:solidFill>
+              </a:rPr>
+              <a:t>In forwards processing we go down as fast as we can and then when we can go down no more we go back to the root. And in backwards we do the same thing, but when we reach an end, we start going back up until we don’t need to anymore then we go back down.</a:t>
+            </a:r>
+          </a:p>
+        </p:txBody>
+      </p:sp>
+      <p:sp>
+        <p:nvSpPr>
+          <p:cNvPr id="5" name="Rectangle: Single Corner Snipped 4">
+            <a:extLst>
+              <a:ext uri="{FF2B5EF4-FFF2-40B4-BE49-F238E27FC236}">
+                <a16:creationId xmlns:a16="http://schemas.microsoft.com/office/drawing/2014/main" id="{D82D2E2B-6FDA-9ED1-ADDA-C6FEF800C02F}"/>
+              </a:ext>
+            </a:extLst>
+          </p:cNvPr>
+          <p:cNvSpPr/>
+          <p:nvPr/>
+        </p:nvSpPr>
+        <p:spPr>
+          <a:xfrm flipH="1">
+            <a:off x="9042400" y="1"/>
+            <a:ext cx="3149600" cy="6858000"/>
+          </a:xfrm>
+          <a:prstGeom prst="snip1Rect">
+            <a:avLst/>
+          </a:prstGeom>
+          <a:solidFill>
+            <a:schemeClr val="tx1">
+              <a:lumMod val="85000"/>
+              <a:lumOff val="15000"/>
+            </a:schemeClr>
+          </a:solidFill>
+          <a:ln>
+            <a:noFill/>
+          </a:ln>
+        </p:spPr>
+        <p:style>
+          <a:lnRef idx="2">
+            <a:schemeClr val="accent1">
+              <a:shade val="15000"/>
+            </a:schemeClr>
+          </a:lnRef>
+          <a:fillRef idx="1">
+            <a:schemeClr val="accent1"/>
+          </a:fillRef>
+          <a:effectRef idx="0">
+            <a:schemeClr val="accent1"/>
+          </a:effectRef>
+          <a:fontRef idx="minor">
+            <a:schemeClr val="lt1"/>
+          </a:fontRef>
+        </p:style>
+        <p:txBody>
+          <a:bodyPr rtlCol="0" anchor="ctr"/>
+          <a:lstStyle/>
+          <a:p>
+            <a:pPr algn="ctr"/>
+            <a:endParaRPr lang="en-GB"/>
+          </a:p>
+        </p:txBody>
+      </p:sp>
+      <p:sp>
+        <p:nvSpPr>
+          <p:cNvPr id="6" name="Rectangle 5">
+            <a:extLst>
+              <a:ext uri="{FF2B5EF4-FFF2-40B4-BE49-F238E27FC236}">
+                <a16:creationId xmlns:a16="http://schemas.microsoft.com/office/drawing/2014/main" id="{6A0A61D5-9CF5-EE49-BE19-D144384CC0DD}"/>
+              </a:ext>
+            </a:extLst>
+          </p:cNvPr>
+          <p:cNvSpPr/>
+          <p:nvPr/>
+        </p:nvSpPr>
+        <p:spPr>
+          <a:xfrm>
+            <a:off x="10071100" y="533400"/>
+            <a:ext cx="1282700" cy="660400"/>
+          </a:xfrm>
+          <a:prstGeom prst="rect">
+            <a:avLst/>
+          </a:prstGeom>
+          <a:solidFill>
+            <a:srgbClr val="FFCCCC"/>
+          </a:solidFill>
+          <a:ln>
+            <a:solidFill>
+              <a:srgbClr val="C00000"/>
+            </a:solidFill>
+          </a:ln>
+        </p:spPr>
+        <p:style>
+          <a:lnRef idx="2">
+            <a:schemeClr val="accent1">
+              <a:shade val="15000"/>
+            </a:schemeClr>
+          </a:lnRef>
+          <a:fillRef idx="1">
+            <a:schemeClr val="accent1"/>
+          </a:fillRef>
+          <a:effectRef idx="0">
+            <a:schemeClr val="accent1"/>
+          </a:effectRef>
+          <a:fontRef idx="minor">
+            <a:schemeClr val="lt1"/>
+          </a:fontRef>
+        </p:style>
+        <p:txBody>
+          <a:bodyPr rtlCol="0" anchor="ctr"/>
+          <a:lstStyle/>
+          <a:p>
+            <a:pPr algn="ctr"/>
+            <a:r>
+              <a:rPr lang="en-GB" dirty="0">
+                <a:solidFill>
+                  <a:sysClr val="windowText" lastClr="000000"/>
+                </a:solidFill>
+              </a:rPr>
+              <a:t>root</a:t>
+            </a:r>
+          </a:p>
+        </p:txBody>
+      </p:sp>
+      <p:sp>
+        <p:nvSpPr>
+          <p:cNvPr id="7" name="Rectangle 6">
+            <a:extLst>
+              <a:ext uri="{FF2B5EF4-FFF2-40B4-BE49-F238E27FC236}">
+                <a16:creationId xmlns:a16="http://schemas.microsoft.com/office/drawing/2014/main" id="{57E2D3BF-637F-A20C-7C8D-4AA17A0F8262}"/>
+              </a:ext>
+            </a:extLst>
+          </p:cNvPr>
+          <p:cNvSpPr/>
+          <p:nvPr/>
+        </p:nvSpPr>
+        <p:spPr>
+          <a:xfrm>
+            <a:off x="10071100" y="1549399"/>
+            <a:ext cx="1282700" cy="660400"/>
+          </a:xfrm>
+          <a:prstGeom prst="rect">
+            <a:avLst/>
+          </a:prstGeom>
+          <a:solidFill>
+            <a:schemeClr val="accent3">
+              <a:lumMod val="20000"/>
+              <a:lumOff val="80000"/>
+            </a:schemeClr>
+          </a:solidFill>
+          <a:ln>
+            <a:solidFill>
+              <a:schemeClr val="accent3">
+                <a:lumMod val="75000"/>
+              </a:schemeClr>
+            </a:solidFill>
+          </a:ln>
+        </p:spPr>
+        <p:style>
+          <a:lnRef idx="2">
+            <a:schemeClr val="accent1">
+              <a:shade val="15000"/>
+            </a:schemeClr>
+          </a:lnRef>
+          <a:fillRef idx="1">
+            <a:schemeClr val="accent1"/>
+          </a:fillRef>
+          <a:effectRef idx="0">
+            <a:schemeClr val="accent1"/>
+          </a:effectRef>
+          <a:fontRef idx="minor">
+            <a:schemeClr val="lt1"/>
+          </a:fontRef>
+        </p:style>
+        <p:txBody>
+          <a:bodyPr rtlCol="0" anchor="ctr"/>
+          <a:lstStyle/>
+          <a:p>
+            <a:pPr algn="ctr"/>
+            <a:r>
+              <a:rPr lang="en-GB" dirty="0">
+                <a:solidFill>
+                  <a:sysClr val="windowText" lastClr="000000"/>
+                </a:solidFill>
+              </a:rPr>
+              <a:t>sequence</a:t>
+            </a:r>
+          </a:p>
+        </p:txBody>
+      </p:sp>
+      <p:sp>
+        <p:nvSpPr>
+          <p:cNvPr id="8" name="Rectangle 7">
+            <a:extLst>
+              <a:ext uri="{FF2B5EF4-FFF2-40B4-BE49-F238E27FC236}">
+                <a16:creationId xmlns:a16="http://schemas.microsoft.com/office/drawing/2014/main" id="{96F4941D-3063-C0CA-FAC3-F03BA13891AB}"/>
+              </a:ext>
+            </a:extLst>
+          </p:cNvPr>
+          <p:cNvSpPr/>
+          <p:nvPr/>
+        </p:nvSpPr>
+        <p:spPr>
+          <a:xfrm>
+            <a:off x="9410700" y="2565397"/>
+            <a:ext cx="736600" cy="457202"/>
+          </a:xfrm>
+          <a:prstGeom prst="rect">
+            <a:avLst/>
+          </a:prstGeom>
+          <a:solidFill>
+            <a:srgbClr val="FFFF00"/>
+          </a:solidFill>
+          <a:ln>
+            <a:solidFill>
+              <a:srgbClr val="FFC000"/>
+            </a:solidFill>
+          </a:ln>
+        </p:spPr>
+        <p:style>
+          <a:lnRef idx="2">
+            <a:schemeClr val="accent1">
+              <a:shade val="15000"/>
+            </a:schemeClr>
+          </a:lnRef>
+          <a:fillRef idx="1">
+            <a:schemeClr val="accent1"/>
+          </a:fillRef>
+          <a:effectRef idx="0">
+            <a:schemeClr val="accent1"/>
+          </a:effectRef>
+          <a:fontRef idx="minor">
+            <a:schemeClr val="lt1"/>
+          </a:fontRef>
+        </p:style>
+        <p:txBody>
+          <a:bodyPr rtlCol="0" anchor="ctr"/>
+          <a:lstStyle/>
+          <a:p>
+            <a:pPr algn="ctr"/>
+            <a:endParaRPr lang="en-GB"/>
+          </a:p>
+        </p:txBody>
+      </p:sp>
+      <p:sp>
+        <p:nvSpPr>
+          <p:cNvPr id="9" name="Rectangle 8">
+            <a:extLst>
+              <a:ext uri="{FF2B5EF4-FFF2-40B4-BE49-F238E27FC236}">
+                <a16:creationId xmlns:a16="http://schemas.microsoft.com/office/drawing/2014/main" id="{52E83E3B-0CA1-93B3-0C05-BB9375C7FB8C}"/>
+              </a:ext>
+            </a:extLst>
+          </p:cNvPr>
+          <p:cNvSpPr/>
+          <p:nvPr/>
+        </p:nvSpPr>
+        <p:spPr>
+          <a:xfrm>
+            <a:off x="10344150" y="2565398"/>
+            <a:ext cx="736600" cy="457202"/>
+          </a:xfrm>
+          <a:prstGeom prst="rect">
+            <a:avLst/>
+          </a:prstGeom>
+          <a:solidFill>
+            <a:srgbClr val="FFFF00"/>
+          </a:solidFill>
+          <a:ln>
+            <a:solidFill>
+              <a:srgbClr val="FFC000"/>
+            </a:solidFill>
+          </a:ln>
+        </p:spPr>
+        <p:style>
+          <a:lnRef idx="2">
+            <a:schemeClr val="accent1">
+              <a:shade val="15000"/>
+            </a:schemeClr>
+          </a:lnRef>
+          <a:fillRef idx="1">
+            <a:schemeClr val="accent1"/>
+          </a:fillRef>
+          <a:effectRef idx="0">
+            <a:schemeClr val="accent1"/>
+          </a:effectRef>
+          <a:fontRef idx="minor">
+            <a:schemeClr val="lt1"/>
+          </a:fontRef>
+        </p:style>
+        <p:txBody>
+          <a:bodyPr rtlCol="0" anchor="ctr"/>
+          <a:lstStyle/>
+          <a:p>
+            <a:pPr algn="ctr"/>
+            <a:endParaRPr lang="en-GB"/>
+          </a:p>
+        </p:txBody>
+      </p:sp>
+      <p:sp>
+        <p:nvSpPr>
+          <p:cNvPr id="10" name="Rectangle 9">
+            <a:extLst>
+              <a:ext uri="{FF2B5EF4-FFF2-40B4-BE49-F238E27FC236}">
+                <a16:creationId xmlns:a16="http://schemas.microsoft.com/office/drawing/2014/main" id="{926769B4-EE85-2139-48F8-58D4EF591FA4}"/>
+              </a:ext>
+            </a:extLst>
+          </p:cNvPr>
+          <p:cNvSpPr/>
+          <p:nvPr/>
+        </p:nvSpPr>
+        <p:spPr>
+          <a:xfrm>
+            <a:off x="11277600" y="2565397"/>
+            <a:ext cx="736600" cy="457202"/>
+          </a:xfrm>
+          <a:prstGeom prst="rect">
+            <a:avLst/>
+          </a:prstGeom>
+          <a:solidFill>
+            <a:srgbClr val="FFFF00"/>
+          </a:solidFill>
+          <a:ln>
+            <a:solidFill>
+              <a:srgbClr val="FFC000"/>
+            </a:solidFill>
+          </a:ln>
+        </p:spPr>
+        <p:style>
+          <a:lnRef idx="2">
+            <a:schemeClr val="accent1">
+              <a:shade val="15000"/>
+            </a:schemeClr>
+          </a:lnRef>
+          <a:fillRef idx="1">
+            <a:schemeClr val="accent1"/>
+          </a:fillRef>
+          <a:effectRef idx="0">
+            <a:schemeClr val="accent1"/>
+          </a:effectRef>
+          <a:fontRef idx="minor">
+            <a:schemeClr val="lt1"/>
+          </a:fontRef>
+        </p:style>
+        <p:txBody>
+          <a:bodyPr rtlCol="0" anchor="ctr"/>
+          <a:lstStyle/>
+          <a:p>
+            <a:pPr algn="ctr"/>
+            <a:endParaRPr lang="en-GB"/>
+          </a:p>
+        </p:txBody>
+      </p:sp>
+      <p:cxnSp>
+        <p:nvCxnSpPr>
+          <p:cNvPr id="12" name="Straight Arrow Connector 11">
+            <a:extLst>
+              <a:ext uri="{FF2B5EF4-FFF2-40B4-BE49-F238E27FC236}">
+                <a16:creationId xmlns:a16="http://schemas.microsoft.com/office/drawing/2014/main" id="{1988506E-E172-C4A2-27F8-93A4A05958C4}"/>
+              </a:ext>
+            </a:extLst>
+          </p:cNvPr>
+          <p:cNvCxnSpPr>
+            <a:stCxn id="6" idx="2"/>
+            <a:endCxn id="7" idx="0"/>
+          </p:cNvCxnSpPr>
+          <p:nvPr/>
+        </p:nvCxnSpPr>
+        <p:spPr>
+          <a:xfrm>
+            <a:off x="10712450" y="1193800"/>
+            <a:ext cx="0" cy="355599"/>
+          </a:xfrm>
+          <a:prstGeom prst="straightConnector1">
+            <a:avLst/>
+          </a:prstGeom>
+          <a:ln>
+            <a:solidFill>
+              <a:srgbClr val="FFC000"/>
+            </a:solidFill>
+            <a:tailEnd type="triangle"/>
+          </a:ln>
+        </p:spPr>
+        <p:style>
+          <a:lnRef idx="2">
+            <a:schemeClr val="accent1"/>
+          </a:lnRef>
+          <a:fillRef idx="0">
+            <a:schemeClr val="accent1"/>
+          </a:fillRef>
+          <a:effectRef idx="1">
+            <a:schemeClr val="accent1"/>
+          </a:effectRef>
+          <a:fontRef idx="minor">
+            <a:schemeClr val="tx1"/>
+          </a:fontRef>
+        </p:style>
+      </p:cxnSp>
+      <p:cxnSp>
+        <p:nvCxnSpPr>
+          <p:cNvPr id="13" name="Straight Arrow Connector 12">
+            <a:extLst>
+              <a:ext uri="{FF2B5EF4-FFF2-40B4-BE49-F238E27FC236}">
+                <a16:creationId xmlns:a16="http://schemas.microsoft.com/office/drawing/2014/main" id="{50C5E161-5AA6-DBFE-239F-A69B99D603B7}"/>
+              </a:ext>
+            </a:extLst>
+          </p:cNvPr>
+          <p:cNvCxnSpPr>
+            <a:cxnSpLocks/>
+            <a:stCxn id="7" idx="2"/>
+            <a:endCxn id="9" idx="0"/>
+          </p:cNvCxnSpPr>
+          <p:nvPr/>
+        </p:nvCxnSpPr>
+        <p:spPr>
+          <a:xfrm>
+            <a:off x="10712450" y="2209799"/>
+            <a:ext cx="0" cy="355599"/>
+          </a:xfrm>
+          <a:prstGeom prst="straightConnector1">
+            <a:avLst/>
+          </a:prstGeom>
+          <a:ln>
+            <a:solidFill>
+              <a:srgbClr val="FFC000"/>
+            </a:solidFill>
+            <a:tailEnd type="triangle"/>
+          </a:ln>
+        </p:spPr>
+        <p:style>
+          <a:lnRef idx="2">
+            <a:schemeClr val="accent1"/>
+          </a:lnRef>
+          <a:fillRef idx="0">
+            <a:schemeClr val="accent1"/>
+          </a:fillRef>
+          <a:effectRef idx="1">
+            <a:schemeClr val="accent1"/>
+          </a:effectRef>
+          <a:fontRef idx="minor">
+            <a:schemeClr val="tx1"/>
+          </a:fontRef>
+        </p:style>
+      </p:cxnSp>
+      <p:cxnSp>
+        <p:nvCxnSpPr>
+          <p:cNvPr id="17" name="Straight Arrow Connector 16">
+            <a:extLst>
+              <a:ext uri="{FF2B5EF4-FFF2-40B4-BE49-F238E27FC236}">
+                <a16:creationId xmlns:a16="http://schemas.microsoft.com/office/drawing/2014/main" id="{97834708-62D4-3BB8-D29A-B6B46EE4691E}"/>
+              </a:ext>
+            </a:extLst>
+          </p:cNvPr>
+          <p:cNvCxnSpPr>
+            <a:cxnSpLocks/>
+            <a:stCxn id="7" idx="2"/>
+            <a:endCxn id="8" idx="0"/>
+          </p:cNvCxnSpPr>
+          <p:nvPr/>
+        </p:nvCxnSpPr>
+        <p:spPr>
+          <a:xfrm flipH="1">
+            <a:off x="9779000" y="2209799"/>
+            <a:ext cx="933450" cy="355598"/>
+          </a:xfrm>
+          <a:prstGeom prst="straightConnector1">
+            <a:avLst/>
+          </a:prstGeom>
+          <a:ln>
+            <a:solidFill>
+              <a:srgbClr val="FFC000"/>
+            </a:solidFill>
+            <a:tailEnd type="triangle"/>
+          </a:ln>
+        </p:spPr>
+        <p:style>
+          <a:lnRef idx="2">
+            <a:schemeClr val="accent1"/>
+          </a:lnRef>
+          <a:fillRef idx="0">
+            <a:schemeClr val="accent1"/>
+          </a:fillRef>
+          <a:effectRef idx="1">
+            <a:schemeClr val="accent1"/>
+          </a:effectRef>
+          <a:fontRef idx="minor">
+            <a:schemeClr val="tx1"/>
+          </a:fontRef>
+        </p:style>
+      </p:cxnSp>
+      <p:cxnSp>
+        <p:nvCxnSpPr>
+          <p:cNvPr id="21" name="Straight Arrow Connector 20">
+            <a:extLst>
+              <a:ext uri="{FF2B5EF4-FFF2-40B4-BE49-F238E27FC236}">
+                <a16:creationId xmlns:a16="http://schemas.microsoft.com/office/drawing/2014/main" id="{4C576896-0C3D-2637-2D49-BF79A346DA9C}"/>
+              </a:ext>
+            </a:extLst>
+          </p:cNvPr>
+          <p:cNvCxnSpPr>
+            <a:cxnSpLocks/>
+            <a:stCxn id="7" idx="2"/>
+            <a:endCxn id="10" idx="0"/>
+          </p:cNvCxnSpPr>
+          <p:nvPr/>
+        </p:nvCxnSpPr>
+        <p:spPr>
+          <a:xfrm>
+            <a:off x="10712450" y="2209799"/>
+            <a:ext cx="933450" cy="355598"/>
+          </a:xfrm>
+          <a:prstGeom prst="straightConnector1">
+            <a:avLst/>
+          </a:prstGeom>
+          <a:ln>
+            <a:solidFill>
+              <a:srgbClr val="FFC000"/>
+            </a:solidFill>
+            <a:tailEnd type="triangle"/>
+          </a:ln>
+        </p:spPr>
+        <p:style>
+          <a:lnRef idx="2">
+            <a:schemeClr val="accent1"/>
+          </a:lnRef>
+          <a:fillRef idx="0">
+            <a:schemeClr val="accent1"/>
+          </a:fillRef>
+          <a:effectRef idx="1">
+            <a:schemeClr val="accent1"/>
+          </a:effectRef>
+          <a:fontRef idx="minor">
+            <a:schemeClr val="tx1"/>
+          </a:fontRef>
+        </p:style>
+      </p:cxnSp>
+      <p:sp>
+        <p:nvSpPr>
+          <p:cNvPr id="24" name="Oval 23">
+            <a:extLst>
+              <a:ext uri="{FF2B5EF4-FFF2-40B4-BE49-F238E27FC236}">
+                <a16:creationId xmlns:a16="http://schemas.microsoft.com/office/drawing/2014/main" id="{675300DA-88CE-5D28-5570-E434A40EE8CE}"/>
+              </a:ext>
+            </a:extLst>
+          </p:cNvPr>
+          <p:cNvSpPr/>
+          <p:nvPr/>
+        </p:nvSpPr>
+        <p:spPr>
+          <a:xfrm>
+            <a:off x="10617200" y="261651"/>
+            <a:ext cx="195563" cy="181166"/>
+          </a:xfrm>
+          <a:prstGeom prst="ellipse">
+            <a:avLst/>
+          </a:prstGeom>
+          <a:solidFill>
+            <a:srgbClr val="7030A0"/>
+          </a:solidFill>
+          <a:ln>
+            <a:solidFill>
+              <a:srgbClr val="FF00FF"/>
+            </a:solidFill>
+          </a:ln>
+        </p:spPr>
+        <p:style>
+          <a:lnRef idx="2">
+            <a:schemeClr val="accent1">
+              <a:shade val="15000"/>
+            </a:schemeClr>
+          </a:lnRef>
+          <a:fillRef idx="1">
+            <a:schemeClr val="accent1"/>
+          </a:fillRef>
+          <a:effectRef idx="0">
+            <a:schemeClr val="accent1"/>
+          </a:effectRef>
+          <a:fontRef idx="minor">
+            <a:schemeClr val="lt1"/>
+          </a:fontRef>
+        </p:style>
+        <p:txBody>
+          <a:bodyPr rtlCol="0" anchor="ctr"/>
+          <a:lstStyle/>
+          <a:p>
+            <a:pPr algn="ctr"/>
+            <a:endParaRPr lang="en-GB"/>
+          </a:p>
+        </p:txBody>
+      </p:sp>
+      <p:sp>
+        <p:nvSpPr>
+          <p:cNvPr id="25" name="Rectangle 24">
+            <a:extLst>
+              <a:ext uri="{FF2B5EF4-FFF2-40B4-BE49-F238E27FC236}">
+                <a16:creationId xmlns:a16="http://schemas.microsoft.com/office/drawing/2014/main" id="{5E76A783-ED6A-6538-1243-8F617EC8929B}"/>
+              </a:ext>
+            </a:extLst>
+          </p:cNvPr>
+          <p:cNvSpPr/>
+          <p:nvPr/>
+        </p:nvSpPr>
+        <p:spPr>
+          <a:xfrm>
+            <a:off x="10071100" y="4003675"/>
+            <a:ext cx="1282700" cy="660400"/>
+          </a:xfrm>
+          <a:prstGeom prst="rect">
+            <a:avLst/>
+          </a:prstGeom>
+          <a:solidFill>
+            <a:srgbClr val="FFCCCC"/>
+          </a:solidFill>
+          <a:ln>
+            <a:solidFill>
+              <a:srgbClr val="C00000"/>
+            </a:solidFill>
+          </a:ln>
+        </p:spPr>
+        <p:style>
+          <a:lnRef idx="2">
+            <a:schemeClr val="accent1">
+              <a:shade val="15000"/>
+            </a:schemeClr>
+          </a:lnRef>
+          <a:fillRef idx="1">
+            <a:schemeClr val="accent1"/>
+          </a:fillRef>
+          <a:effectRef idx="0">
+            <a:schemeClr val="accent1"/>
+          </a:effectRef>
+          <a:fontRef idx="minor">
+            <a:schemeClr val="lt1"/>
+          </a:fontRef>
+        </p:style>
+        <p:txBody>
+          <a:bodyPr rtlCol="0" anchor="ctr"/>
+          <a:lstStyle/>
+          <a:p>
+            <a:pPr algn="ctr"/>
+            <a:r>
+              <a:rPr lang="en-GB" dirty="0">
+                <a:solidFill>
+                  <a:sysClr val="windowText" lastClr="000000"/>
+                </a:solidFill>
+              </a:rPr>
+              <a:t>root</a:t>
+            </a:r>
+          </a:p>
+        </p:txBody>
+      </p:sp>
+      <p:sp>
+        <p:nvSpPr>
+          <p:cNvPr id="26" name="Rectangle 25">
+            <a:extLst>
+              <a:ext uri="{FF2B5EF4-FFF2-40B4-BE49-F238E27FC236}">
+                <a16:creationId xmlns:a16="http://schemas.microsoft.com/office/drawing/2014/main" id="{ACD6CC4B-2868-D5A4-EB8F-2FF02CDCD3EF}"/>
+              </a:ext>
+            </a:extLst>
+          </p:cNvPr>
+          <p:cNvSpPr/>
+          <p:nvPr/>
+        </p:nvSpPr>
+        <p:spPr>
+          <a:xfrm>
+            <a:off x="10071100" y="5019674"/>
+            <a:ext cx="1282700" cy="660400"/>
+          </a:xfrm>
+          <a:prstGeom prst="rect">
+            <a:avLst/>
+          </a:prstGeom>
+          <a:solidFill>
+            <a:schemeClr val="accent3">
+              <a:lumMod val="20000"/>
+              <a:lumOff val="80000"/>
+            </a:schemeClr>
+          </a:solidFill>
+          <a:ln>
+            <a:solidFill>
+              <a:schemeClr val="accent3">
+                <a:lumMod val="75000"/>
+              </a:schemeClr>
+            </a:solidFill>
+          </a:ln>
+        </p:spPr>
+        <p:style>
+          <a:lnRef idx="2">
+            <a:schemeClr val="accent1">
+              <a:shade val="15000"/>
+            </a:schemeClr>
+          </a:lnRef>
+          <a:fillRef idx="1">
+            <a:schemeClr val="accent1"/>
+          </a:fillRef>
+          <a:effectRef idx="0">
+            <a:schemeClr val="accent1"/>
+          </a:effectRef>
+          <a:fontRef idx="minor">
+            <a:schemeClr val="lt1"/>
+          </a:fontRef>
+        </p:style>
+        <p:txBody>
+          <a:bodyPr rtlCol="0" anchor="ctr"/>
+          <a:lstStyle/>
+          <a:p>
+            <a:pPr algn="ctr"/>
+            <a:r>
+              <a:rPr lang="en-GB" dirty="0">
+                <a:solidFill>
+                  <a:sysClr val="windowText" lastClr="000000"/>
+                </a:solidFill>
+              </a:rPr>
+              <a:t>sequence</a:t>
+            </a:r>
+          </a:p>
+        </p:txBody>
+      </p:sp>
+      <p:sp>
+        <p:nvSpPr>
+          <p:cNvPr id="27" name="Rectangle 26">
+            <a:extLst>
+              <a:ext uri="{FF2B5EF4-FFF2-40B4-BE49-F238E27FC236}">
+                <a16:creationId xmlns:a16="http://schemas.microsoft.com/office/drawing/2014/main" id="{3830253C-B8C3-1DB0-F9DE-610B4326599F}"/>
+              </a:ext>
+            </a:extLst>
+          </p:cNvPr>
+          <p:cNvSpPr/>
+          <p:nvPr/>
+        </p:nvSpPr>
+        <p:spPr>
+          <a:xfrm>
+            <a:off x="9410700" y="6035672"/>
+            <a:ext cx="736600" cy="457202"/>
+          </a:xfrm>
+          <a:prstGeom prst="rect">
+            <a:avLst/>
+          </a:prstGeom>
+          <a:solidFill>
+            <a:srgbClr val="FFFF00"/>
+          </a:solidFill>
+          <a:ln>
+            <a:solidFill>
+              <a:srgbClr val="FFC000"/>
+            </a:solidFill>
+          </a:ln>
+        </p:spPr>
+        <p:style>
+          <a:lnRef idx="2">
+            <a:schemeClr val="accent1">
+              <a:shade val="15000"/>
+            </a:schemeClr>
+          </a:lnRef>
+          <a:fillRef idx="1">
+            <a:schemeClr val="accent1"/>
+          </a:fillRef>
+          <a:effectRef idx="0">
+            <a:schemeClr val="accent1"/>
+          </a:effectRef>
+          <a:fontRef idx="minor">
+            <a:schemeClr val="lt1"/>
+          </a:fontRef>
+        </p:style>
+        <p:txBody>
+          <a:bodyPr rtlCol="0" anchor="ctr"/>
+          <a:lstStyle/>
+          <a:p>
+            <a:pPr algn="ctr"/>
+            <a:endParaRPr lang="en-GB"/>
+          </a:p>
+        </p:txBody>
+      </p:sp>
+      <p:sp>
+        <p:nvSpPr>
+          <p:cNvPr id="28" name="Rectangle 27">
+            <a:extLst>
+              <a:ext uri="{FF2B5EF4-FFF2-40B4-BE49-F238E27FC236}">
+                <a16:creationId xmlns:a16="http://schemas.microsoft.com/office/drawing/2014/main" id="{CB11A584-238D-12ED-0719-F21C2F87381C}"/>
+              </a:ext>
+            </a:extLst>
+          </p:cNvPr>
+          <p:cNvSpPr/>
+          <p:nvPr/>
+        </p:nvSpPr>
+        <p:spPr>
+          <a:xfrm>
+            <a:off x="10344150" y="6035673"/>
+            <a:ext cx="736600" cy="457202"/>
+          </a:xfrm>
+          <a:prstGeom prst="rect">
+            <a:avLst/>
+          </a:prstGeom>
+          <a:solidFill>
+            <a:srgbClr val="FFFF00"/>
+          </a:solidFill>
+          <a:ln>
+            <a:solidFill>
+              <a:srgbClr val="FFC000"/>
+            </a:solidFill>
+          </a:ln>
+        </p:spPr>
+        <p:style>
+          <a:lnRef idx="2">
+            <a:schemeClr val="accent1">
+              <a:shade val="15000"/>
+            </a:schemeClr>
+          </a:lnRef>
+          <a:fillRef idx="1">
+            <a:schemeClr val="accent1"/>
+          </a:fillRef>
+          <a:effectRef idx="0">
+            <a:schemeClr val="accent1"/>
+          </a:effectRef>
+          <a:fontRef idx="minor">
+            <a:schemeClr val="lt1"/>
+          </a:fontRef>
+        </p:style>
+        <p:txBody>
+          <a:bodyPr rtlCol="0" anchor="ctr"/>
+          <a:lstStyle/>
+          <a:p>
+            <a:pPr algn="ctr"/>
+            <a:endParaRPr lang="en-GB"/>
+          </a:p>
+        </p:txBody>
+      </p:sp>
+      <p:sp>
+        <p:nvSpPr>
+          <p:cNvPr id="29" name="Rectangle 28">
+            <a:extLst>
+              <a:ext uri="{FF2B5EF4-FFF2-40B4-BE49-F238E27FC236}">
+                <a16:creationId xmlns:a16="http://schemas.microsoft.com/office/drawing/2014/main" id="{0F3F5A3B-91C2-9CEE-8C12-D060E4AC553A}"/>
+              </a:ext>
+            </a:extLst>
+          </p:cNvPr>
+          <p:cNvSpPr/>
+          <p:nvPr/>
+        </p:nvSpPr>
+        <p:spPr>
+          <a:xfrm>
+            <a:off x="11277600" y="6035672"/>
+            <a:ext cx="736600" cy="457202"/>
+          </a:xfrm>
+          <a:prstGeom prst="rect">
+            <a:avLst/>
+          </a:prstGeom>
+          <a:solidFill>
+            <a:srgbClr val="FFFF00"/>
+          </a:solidFill>
+          <a:ln>
+            <a:solidFill>
+              <a:srgbClr val="FFC000"/>
+            </a:solidFill>
+          </a:ln>
+        </p:spPr>
+        <p:style>
+          <a:lnRef idx="2">
+            <a:schemeClr val="accent1">
+              <a:shade val="15000"/>
+            </a:schemeClr>
+          </a:lnRef>
+          <a:fillRef idx="1">
+            <a:schemeClr val="accent1"/>
+          </a:fillRef>
+          <a:effectRef idx="0">
+            <a:schemeClr val="accent1"/>
+          </a:effectRef>
+          <a:fontRef idx="minor">
+            <a:schemeClr val="lt1"/>
+          </a:fontRef>
+        </p:style>
+        <p:txBody>
+          <a:bodyPr rtlCol="0" anchor="ctr"/>
+          <a:lstStyle/>
+          <a:p>
+            <a:pPr algn="ctr"/>
+            <a:endParaRPr lang="en-GB"/>
+          </a:p>
+        </p:txBody>
+      </p:sp>
+      <p:cxnSp>
+        <p:nvCxnSpPr>
+          <p:cNvPr id="30" name="Straight Arrow Connector 29">
+            <a:extLst>
+              <a:ext uri="{FF2B5EF4-FFF2-40B4-BE49-F238E27FC236}">
+                <a16:creationId xmlns:a16="http://schemas.microsoft.com/office/drawing/2014/main" id="{BCDA5EC6-E8D2-62B4-2E1C-56B134721A3B}"/>
+              </a:ext>
+            </a:extLst>
+          </p:cNvPr>
+          <p:cNvCxnSpPr/>
+          <p:nvPr/>
+        </p:nvCxnSpPr>
+        <p:spPr>
+          <a:xfrm>
+            <a:off x="10712450" y="4664075"/>
+            <a:ext cx="0" cy="355599"/>
+          </a:xfrm>
+          <a:prstGeom prst="straightConnector1">
+            <a:avLst/>
+          </a:prstGeom>
+          <a:ln>
+            <a:solidFill>
+              <a:srgbClr val="FFC000"/>
+            </a:solidFill>
+            <a:tailEnd type="triangle"/>
+          </a:ln>
+        </p:spPr>
+        <p:style>
+          <a:lnRef idx="2">
+            <a:schemeClr val="accent1"/>
+          </a:lnRef>
+          <a:fillRef idx="0">
+            <a:schemeClr val="accent1"/>
+          </a:fillRef>
+          <a:effectRef idx="1">
+            <a:schemeClr val="accent1"/>
+          </a:effectRef>
+          <a:fontRef idx="minor">
+            <a:schemeClr val="tx1"/>
+          </a:fontRef>
+        </p:style>
+      </p:cxnSp>
+      <p:cxnSp>
+        <p:nvCxnSpPr>
+          <p:cNvPr id="31" name="Straight Arrow Connector 30">
+            <a:extLst>
+              <a:ext uri="{FF2B5EF4-FFF2-40B4-BE49-F238E27FC236}">
+                <a16:creationId xmlns:a16="http://schemas.microsoft.com/office/drawing/2014/main" id="{3393ACFF-71B5-C7C7-3CAC-822B0D921ABD}"/>
+              </a:ext>
+            </a:extLst>
+          </p:cNvPr>
+          <p:cNvCxnSpPr>
+            <a:cxnSpLocks/>
+          </p:cNvCxnSpPr>
+          <p:nvPr/>
+        </p:nvCxnSpPr>
+        <p:spPr>
+          <a:xfrm>
+            <a:off x="10712450" y="5680074"/>
+            <a:ext cx="0" cy="355599"/>
+          </a:xfrm>
+          <a:prstGeom prst="straightConnector1">
+            <a:avLst/>
+          </a:prstGeom>
+          <a:ln>
+            <a:solidFill>
+              <a:srgbClr val="FFC000"/>
+            </a:solidFill>
+            <a:tailEnd type="triangle"/>
+          </a:ln>
+        </p:spPr>
+        <p:style>
+          <a:lnRef idx="2">
+            <a:schemeClr val="accent1"/>
+          </a:lnRef>
+          <a:fillRef idx="0">
+            <a:schemeClr val="accent1"/>
+          </a:fillRef>
+          <a:effectRef idx="1">
+            <a:schemeClr val="accent1"/>
+          </a:effectRef>
+          <a:fontRef idx="minor">
+            <a:schemeClr val="tx1"/>
+          </a:fontRef>
+        </p:style>
+      </p:cxnSp>
+      <p:cxnSp>
+        <p:nvCxnSpPr>
+          <p:cNvPr id="32" name="Straight Arrow Connector 31">
+            <a:extLst>
+              <a:ext uri="{FF2B5EF4-FFF2-40B4-BE49-F238E27FC236}">
+                <a16:creationId xmlns:a16="http://schemas.microsoft.com/office/drawing/2014/main" id="{B3BD4A8F-F1F7-FF75-3F73-19AF986D8707}"/>
+              </a:ext>
+            </a:extLst>
+          </p:cNvPr>
+          <p:cNvCxnSpPr>
+            <a:cxnSpLocks/>
+          </p:cNvCxnSpPr>
+          <p:nvPr/>
+        </p:nvCxnSpPr>
+        <p:spPr>
+          <a:xfrm flipH="1">
+            <a:off x="9779000" y="5680074"/>
+            <a:ext cx="933450" cy="355598"/>
+          </a:xfrm>
+          <a:prstGeom prst="straightConnector1">
+            <a:avLst/>
+          </a:prstGeom>
+          <a:ln>
+            <a:solidFill>
+              <a:srgbClr val="FFC000"/>
+            </a:solidFill>
+            <a:tailEnd type="triangle"/>
+          </a:ln>
+        </p:spPr>
+        <p:style>
+          <a:lnRef idx="2">
+            <a:schemeClr val="accent1"/>
+          </a:lnRef>
+          <a:fillRef idx="0">
+            <a:schemeClr val="accent1"/>
+          </a:fillRef>
+          <a:effectRef idx="1">
+            <a:schemeClr val="accent1"/>
+          </a:effectRef>
+          <a:fontRef idx="minor">
+            <a:schemeClr val="tx1"/>
+          </a:fontRef>
+        </p:style>
+      </p:cxnSp>
+      <p:cxnSp>
+        <p:nvCxnSpPr>
+          <p:cNvPr id="33" name="Straight Arrow Connector 32">
+            <a:extLst>
+              <a:ext uri="{FF2B5EF4-FFF2-40B4-BE49-F238E27FC236}">
+                <a16:creationId xmlns:a16="http://schemas.microsoft.com/office/drawing/2014/main" id="{E66E9E74-FE3A-B35F-FAD4-3FB736601269}"/>
+              </a:ext>
+            </a:extLst>
+          </p:cNvPr>
+          <p:cNvCxnSpPr>
+            <a:cxnSpLocks/>
+          </p:cNvCxnSpPr>
+          <p:nvPr/>
+        </p:nvCxnSpPr>
+        <p:spPr>
+          <a:xfrm>
+            <a:off x="10712450" y="5680074"/>
+            <a:ext cx="933450" cy="355598"/>
+          </a:xfrm>
+          <a:prstGeom prst="straightConnector1">
+            <a:avLst/>
+          </a:prstGeom>
+          <a:ln>
+            <a:solidFill>
+              <a:srgbClr val="FFC000"/>
+            </a:solidFill>
+            <a:tailEnd type="triangle"/>
+          </a:ln>
+        </p:spPr>
+        <p:style>
+          <a:lnRef idx="2">
+            <a:schemeClr val="accent1"/>
+          </a:lnRef>
+          <a:fillRef idx="0">
+            <a:schemeClr val="accent1"/>
+          </a:fillRef>
+          <a:effectRef idx="1">
+            <a:schemeClr val="accent1"/>
+          </a:effectRef>
+          <a:fontRef idx="minor">
+            <a:schemeClr val="tx1"/>
+          </a:fontRef>
+        </p:style>
+      </p:cxnSp>
+      <p:sp>
+        <p:nvSpPr>
+          <p:cNvPr id="34" name="Oval 33">
+            <a:extLst>
+              <a:ext uri="{FF2B5EF4-FFF2-40B4-BE49-F238E27FC236}">
+                <a16:creationId xmlns:a16="http://schemas.microsoft.com/office/drawing/2014/main" id="{942E714D-0461-0021-7E84-92A24FEF732F}"/>
+              </a:ext>
+            </a:extLst>
+          </p:cNvPr>
+          <p:cNvSpPr/>
+          <p:nvPr/>
+        </p:nvSpPr>
+        <p:spPr>
+          <a:xfrm>
+            <a:off x="10614668" y="3678556"/>
+            <a:ext cx="195563" cy="181166"/>
+          </a:xfrm>
+          <a:prstGeom prst="ellipse">
+            <a:avLst/>
+          </a:prstGeom>
+          <a:solidFill>
+            <a:srgbClr val="7030A0"/>
+          </a:solidFill>
+          <a:ln>
+            <a:solidFill>
+              <a:srgbClr val="FF00FF"/>
+            </a:solidFill>
+          </a:ln>
+        </p:spPr>
+        <p:style>
+          <a:lnRef idx="2">
+            <a:schemeClr val="accent1">
+              <a:shade val="15000"/>
+            </a:schemeClr>
+          </a:lnRef>
+          <a:fillRef idx="1">
+            <a:schemeClr val="accent1"/>
+          </a:fillRef>
+          <a:effectRef idx="0">
+            <a:schemeClr val="accent1"/>
+          </a:effectRef>
+          <a:fontRef idx="minor">
+            <a:schemeClr val="lt1"/>
+          </a:fontRef>
+        </p:style>
+        <p:txBody>
+          <a:bodyPr rtlCol="0" anchor="ctr"/>
+          <a:lstStyle/>
+          <a:p>
+            <a:pPr algn="ctr"/>
             <a:endParaRPr lang="en-GB"/>
           </a:p>
         </p:txBody>
@@ -4003,6 +10631,105 @@
   <p:clrMapOvr>
     <a:masterClrMapping/>
   </p:clrMapOvr>
+  <p:timing>
+    <p:tnLst>
+      <p:par>
+        <p:cTn id="1" dur="indefinite" restart="never" nodeType="tmRoot">
+          <p:childTnLst>
+            <p:seq concurrent="1" nextAc="seek">
+              <p:cTn id="2" dur="indefinite" nodeType="mainSeq">
+                <p:childTnLst>
+                  <p:par>
+                    <p:cTn id="3" fill="hold">
+                      <p:stCondLst>
+                        <p:cond delay="indefinite"/>
+                        <p:cond evt="onBegin" delay="0">
+                          <p:tn val="2"/>
+                        </p:cond>
+                      </p:stCondLst>
+                      <p:childTnLst>
+                        <p:par>
+                          <p:cTn id="4" fill="hold">
+                            <p:stCondLst>
+                              <p:cond delay="0"/>
+                            </p:stCondLst>
+                            <p:childTnLst>
+                              <p:par>
+                                <p:cTn id="5" presetID="0" presetClass="path" presetSubtype="0" repeatCount="indefinite" accel="2500" decel="2500" fill="hold" grpId="0" nodeType="withEffect">
+                                  <p:stCondLst>
+                                    <p:cond delay="0"/>
+                                  </p:stCondLst>
+                                  <p:childTnLst>
+                                    <p:animMotion origin="layout" path="M 0.00052 0.07963 L 0.00247 0.225 L 0.00052 0.26944 L -0.07383 0.31944 L -0.07383 0.35856 L -0.07201 0.3206 L 0.00052 0.26736 L 0.00299 0.22963 L 0.00117 0.26944 L -0.00079 0.35393 L 0.00117 0.23727 L 0.00117 0.2375 L 0.00247 0.27176 L 0.07877 0.32407 L 0.07812 0.35625 L 0.07812 0.35648 L 0.07552 0.32292 L -0.00079 0.2706 L 0.00052 0.07963 Z " pathEditMode="relative" rAng="0" ptsTypes="AAAAAAAAAAAAAAAAAAA">
+                                      <p:cBhvr>
+                                        <p:cTn id="6" dur="6000" fill="hold"/>
+                                        <p:tgtEl>
+                                          <p:spTgt spid="24"/>
+                                        </p:tgtEl>
+                                        <p:attrNameLst>
+                                          <p:attrName>ppt_x</p:attrName>
+                                          <p:attrName>ppt_y</p:attrName>
+                                        </p:attrNameLst>
+                                      </p:cBhvr>
+                                      <p:rCtr x="195" y="13935"/>
+                                    </p:animMotion>
+                                  </p:childTnLst>
+                                </p:cTn>
+                              </p:par>
+                              <p:par>
+                                <p:cTn id="7" presetID="0" presetClass="path" presetSubtype="0" repeatCount="indefinite" accel="2500" decel="2500" fill="hold" grpId="0" nodeType="withEffect">
+                                  <p:stCondLst>
+                                    <p:cond delay="0"/>
+                                  </p:stCondLst>
+                                  <p:childTnLst>
+                                    <p:animMotion origin="layout" path="M 0.00026 0.02222 C 0.00026 0.04352 0.00052 0.06389 0.00078 0.08518 C 0.00052 0.14884 0.00026 0.21319 0.00026 0.27685 L -0.07552 0.33426 C -0.07761 0.36365 -0.07969 0.39213 -0.08151 0.42152 L -0.1168 0.4081 C -0.11524 0.25926 -0.11342 0.11088 -0.11159 -0.03797 L -0.00052 -0.03658 C -0.00026 0.06875 4.16667E-6 0.17338 0.00026 0.2787 L -0.00209 0.41713 L -0.11823 0.40902 C -0.11654 0.25787 -0.11498 0.10671 -0.11316 -0.04398 L -0.00131 -0.04005 L -0.00131 0.2787 L 0.07656 0.33287 L 0.08203 0.41713 L -0.11758 0.40902 C -0.11576 0.25833 -0.11368 0.10764 -0.11159 -0.04283 L -0.00052 -0.04005 C -0.00079 0.00486 0.00104 -0.02084 0.00078 0.02453 " pathEditMode="relative" rAng="0" ptsTypes="AAAAAAAAAAAAAAAAAAAA">
+                                      <p:cBhvr>
+                                        <p:cTn id="8" dur="6000" fill="hold"/>
+                                        <p:tgtEl>
+                                          <p:spTgt spid="34"/>
+                                        </p:tgtEl>
+                                        <p:attrNameLst>
+                                          <p:attrName>ppt_x</p:attrName>
+                                          <p:attrName>ppt_y</p:attrName>
+                                        </p:attrNameLst>
+                                      </p:cBhvr>
+                                      <p:rCtr x="-1836" y="16644"/>
+                                    </p:animMotion>
+                                  </p:childTnLst>
+                                </p:cTn>
+                              </p:par>
+                            </p:childTnLst>
+                          </p:cTn>
+                        </p:par>
+                      </p:childTnLst>
+                    </p:cTn>
+                  </p:par>
+                </p:childTnLst>
+              </p:cTn>
+              <p:prevCondLst>
+                <p:cond evt="onPrev" delay="0">
+                  <p:tgtEl>
+                    <p:sldTgt/>
+                  </p:tgtEl>
+                </p:cond>
+              </p:prevCondLst>
+              <p:nextCondLst>
+                <p:cond evt="onNext" delay="0">
+                  <p:tgtEl>
+                    <p:sldTgt/>
+                  </p:tgtEl>
+                </p:cond>
+              </p:nextCondLst>
+            </p:seq>
+          </p:childTnLst>
+        </p:cTn>
+      </p:par>
+    </p:tnLst>
+    <p:bldLst>
+      <p:bldP spid="24" grpId="0" animBg="1"/>
+      <p:bldP spid="34" grpId="0" animBg="1"/>
+    </p:bldLst>
+  </p:timing>
 </p:sld>
 </file>
 
@@ -4031,6 +10758,111 @@
       </p:grpSpPr>
       <p:sp>
         <p:nvSpPr>
+          <p:cNvPr id="4" name="Rectangle 3">
+            <a:extLst>
+              <a:ext uri="{FF2B5EF4-FFF2-40B4-BE49-F238E27FC236}">
+                <a16:creationId xmlns:a16="http://schemas.microsoft.com/office/drawing/2014/main" id="{B740F766-90AF-677C-7B43-45DE1A2A567E}"/>
+              </a:ext>
+            </a:extLst>
+          </p:cNvPr>
+          <p:cNvSpPr/>
+          <p:nvPr/>
+        </p:nvSpPr>
+        <p:spPr>
+          <a:xfrm>
+            <a:off x="0" y="0"/>
+            <a:ext cx="12192000" cy="6858000"/>
+          </a:xfrm>
+          <a:prstGeom prst="rect">
+            <a:avLst/>
+          </a:prstGeom>
+          <a:gradFill flip="none" rotWithShape="1">
+            <a:gsLst>
+              <a:gs pos="0">
+                <a:schemeClr val="tx1">
+                  <a:lumMod val="65000"/>
+                  <a:lumOff val="35000"/>
+                  <a:shade val="30000"/>
+                  <a:satMod val="115000"/>
+                </a:schemeClr>
+              </a:gs>
+              <a:gs pos="50000">
+                <a:schemeClr val="tx1">
+                  <a:lumMod val="65000"/>
+                  <a:lumOff val="35000"/>
+                  <a:shade val="67500"/>
+                  <a:satMod val="115000"/>
+                </a:schemeClr>
+              </a:gs>
+              <a:gs pos="100000">
+                <a:schemeClr val="tx1">
+                  <a:lumMod val="65000"/>
+                  <a:lumOff val="35000"/>
+                  <a:shade val="100000"/>
+                  <a:satMod val="115000"/>
+                </a:schemeClr>
+              </a:gs>
+            </a:gsLst>
+            <a:lin ang="5400000" scaled="1"/>
+            <a:tileRect/>
+          </a:gradFill>
+          <a:ln>
+            <a:noFill/>
+          </a:ln>
+        </p:spPr>
+        <p:style>
+          <a:lnRef idx="2">
+            <a:schemeClr val="accent1">
+              <a:shade val="15000"/>
+            </a:schemeClr>
+          </a:lnRef>
+          <a:fillRef idx="1">
+            <a:schemeClr val="accent1"/>
+          </a:fillRef>
+          <a:effectRef idx="0">
+            <a:schemeClr val="accent1"/>
+          </a:effectRef>
+          <a:fontRef idx="minor">
+            <a:schemeClr val="lt1"/>
+          </a:fontRef>
+        </p:style>
+        <p:txBody>
+          <a:bodyPr rtlCol="0" anchor="ctr"/>
+          <a:lstStyle/>
+          <a:p>
+            <a:pPr algn="ctr"/>
+            <a:endParaRPr lang="en-GB">
+              <a:gradFill flip="none" rotWithShape="1">
+                <a:gsLst>
+                  <a:gs pos="0">
+                    <a:schemeClr val="accent4">
+                      <a:lumMod val="40000"/>
+                      <a:lumOff val="60000"/>
+                    </a:schemeClr>
+                  </a:gs>
+                  <a:gs pos="46000">
+                    <a:schemeClr val="accent4">
+                      <a:lumMod val="95000"/>
+                      <a:lumOff val="5000"/>
+                    </a:schemeClr>
+                  </a:gs>
+                  <a:gs pos="100000">
+                    <a:schemeClr val="accent4">
+                      <a:lumMod val="60000"/>
+                    </a:schemeClr>
+                  </a:gs>
+                </a:gsLst>
+                <a:path path="circle">
+                  <a:fillToRect l="50000" t="130000" r="50000" b="-30000"/>
+                </a:path>
+                <a:tileRect/>
+              </a:gradFill>
+            </a:endParaRPr>
+          </a:p>
+        </p:txBody>
+      </p:sp>
+      <p:sp>
+        <p:nvSpPr>
           <p:cNvPr id="2" name="Title 1">
             <a:extLst>
               <a:ext uri="{FF2B5EF4-FFF2-40B4-BE49-F238E27FC236}">
@@ -4051,7 +10883,11 @@
           <a:lstStyle/>
           <a:p>
             <a:r>
-              <a:rPr lang="en-GB" dirty="0"/>
+              <a:rPr lang="en-GB" dirty="0">
+                <a:solidFill>
+                  <a:schemeClr val="bg1"/>
+                </a:solidFill>
+              </a:rPr>
               <a:t>AI MEB</a:t>
             </a:r>
           </a:p>
@@ -4078,7 +10914,11 @@
           <a:bodyPr/>
           <a:lstStyle/>
           <a:p>
-            <a:endParaRPr lang="en-GB"/>
+            <a:endParaRPr lang="en-GB" dirty="0">
+              <a:solidFill>
+                <a:schemeClr val="bg1"/>
+              </a:solidFill>
+            </a:endParaRPr>
           </a:p>
         </p:txBody>
       </p:sp>
@@ -4120,6 +10960,111 @@
       </p:grpSpPr>
       <p:sp>
         <p:nvSpPr>
+          <p:cNvPr id="4" name="Rectangle 3">
+            <a:extLst>
+              <a:ext uri="{FF2B5EF4-FFF2-40B4-BE49-F238E27FC236}">
+                <a16:creationId xmlns:a16="http://schemas.microsoft.com/office/drawing/2014/main" id="{C4010ED5-9617-354C-B994-98B76BB51C07}"/>
+              </a:ext>
+            </a:extLst>
+          </p:cNvPr>
+          <p:cNvSpPr/>
+          <p:nvPr/>
+        </p:nvSpPr>
+        <p:spPr>
+          <a:xfrm>
+            <a:off x="0" y="0"/>
+            <a:ext cx="12192000" cy="6858000"/>
+          </a:xfrm>
+          <a:prstGeom prst="rect">
+            <a:avLst/>
+          </a:prstGeom>
+          <a:gradFill flip="none" rotWithShape="1">
+            <a:gsLst>
+              <a:gs pos="0">
+                <a:schemeClr val="tx1">
+                  <a:lumMod val="65000"/>
+                  <a:lumOff val="35000"/>
+                  <a:shade val="30000"/>
+                  <a:satMod val="115000"/>
+                </a:schemeClr>
+              </a:gs>
+              <a:gs pos="50000">
+                <a:schemeClr val="tx1">
+                  <a:lumMod val="65000"/>
+                  <a:lumOff val="35000"/>
+                  <a:shade val="67500"/>
+                  <a:satMod val="115000"/>
+                </a:schemeClr>
+              </a:gs>
+              <a:gs pos="100000">
+                <a:schemeClr val="tx1">
+                  <a:lumMod val="65000"/>
+                  <a:lumOff val="35000"/>
+                  <a:shade val="100000"/>
+                  <a:satMod val="115000"/>
+                </a:schemeClr>
+              </a:gs>
+            </a:gsLst>
+            <a:lin ang="5400000" scaled="1"/>
+            <a:tileRect/>
+          </a:gradFill>
+          <a:ln>
+            <a:noFill/>
+          </a:ln>
+        </p:spPr>
+        <p:style>
+          <a:lnRef idx="2">
+            <a:schemeClr val="accent1">
+              <a:shade val="15000"/>
+            </a:schemeClr>
+          </a:lnRef>
+          <a:fillRef idx="1">
+            <a:schemeClr val="accent1"/>
+          </a:fillRef>
+          <a:effectRef idx="0">
+            <a:schemeClr val="accent1"/>
+          </a:effectRef>
+          <a:fontRef idx="minor">
+            <a:schemeClr val="lt1"/>
+          </a:fontRef>
+        </p:style>
+        <p:txBody>
+          <a:bodyPr rtlCol="0" anchor="ctr"/>
+          <a:lstStyle/>
+          <a:p>
+            <a:pPr algn="ctr"/>
+            <a:endParaRPr lang="en-GB">
+              <a:gradFill flip="none" rotWithShape="1">
+                <a:gsLst>
+                  <a:gs pos="0">
+                    <a:schemeClr val="accent4">
+                      <a:lumMod val="40000"/>
+                      <a:lumOff val="60000"/>
+                    </a:schemeClr>
+                  </a:gs>
+                  <a:gs pos="46000">
+                    <a:schemeClr val="accent4">
+                      <a:lumMod val="95000"/>
+                      <a:lumOff val="5000"/>
+                    </a:schemeClr>
+                  </a:gs>
+                  <a:gs pos="100000">
+                    <a:schemeClr val="accent4">
+                      <a:lumMod val="60000"/>
+                    </a:schemeClr>
+                  </a:gs>
+                </a:gsLst>
+                <a:path path="circle">
+                  <a:fillToRect l="50000" t="130000" r="50000" b="-30000"/>
+                </a:path>
+                <a:tileRect/>
+              </a:gradFill>
+            </a:endParaRPr>
+          </a:p>
+        </p:txBody>
+      </p:sp>
+      <p:sp>
+        <p:nvSpPr>
           <p:cNvPr id="2" name="Title 1">
             <a:extLst>
               <a:ext uri="{FF2B5EF4-FFF2-40B4-BE49-F238E27FC236}">
@@ -4140,7 +11085,11 @@
           <a:lstStyle/>
           <a:p>
             <a:r>
-              <a:rPr lang="en-GB" dirty="0"/>
+              <a:rPr lang="en-GB" dirty="0">
+                <a:solidFill>
+                  <a:schemeClr val="bg1"/>
+                </a:solidFill>
+              </a:rPr>
               <a:t>AI navigation system</a:t>
             </a:r>
           </a:p>
@@ -4167,7 +11116,11 @@
           <a:bodyPr/>
           <a:lstStyle/>
           <a:p>
-            <a:endParaRPr lang="en-GB"/>
+            <a:endParaRPr lang="en-GB" dirty="0">
+              <a:solidFill>
+                <a:schemeClr val="bg1"/>
+              </a:solidFill>
+            </a:endParaRPr>
           </a:p>
         </p:txBody>
       </p:sp>
@@ -4209,6 +11162,111 @@
       </p:grpSpPr>
       <p:sp>
         <p:nvSpPr>
+          <p:cNvPr id="4" name="Rectangle 3">
+            <a:extLst>
+              <a:ext uri="{FF2B5EF4-FFF2-40B4-BE49-F238E27FC236}">
+                <a16:creationId xmlns:a16="http://schemas.microsoft.com/office/drawing/2014/main" id="{EAE7693F-021B-537C-6395-E1A6E9A30954}"/>
+              </a:ext>
+            </a:extLst>
+          </p:cNvPr>
+          <p:cNvSpPr/>
+          <p:nvPr/>
+        </p:nvSpPr>
+        <p:spPr>
+          <a:xfrm>
+            <a:off x="0" y="0"/>
+            <a:ext cx="12192000" cy="6858000"/>
+          </a:xfrm>
+          <a:prstGeom prst="rect">
+            <a:avLst/>
+          </a:prstGeom>
+          <a:gradFill flip="none" rotWithShape="1">
+            <a:gsLst>
+              <a:gs pos="0">
+                <a:schemeClr val="tx1">
+                  <a:lumMod val="65000"/>
+                  <a:lumOff val="35000"/>
+                  <a:shade val="30000"/>
+                  <a:satMod val="115000"/>
+                </a:schemeClr>
+              </a:gs>
+              <a:gs pos="50000">
+                <a:schemeClr val="tx1">
+                  <a:lumMod val="65000"/>
+                  <a:lumOff val="35000"/>
+                  <a:shade val="67500"/>
+                  <a:satMod val="115000"/>
+                </a:schemeClr>
+              </a:gs>
+              <a:gs pos="100000">
+                <a:schemeClr val="tx1">
+                  <a:lumMod val="65000"/>
+                  <a:lumOff val="35000"/>
+                  <a:shade val="100000"/>
+                  <a:satMod val="115000"/>
+                </a:schemeClr>
+              </a:gs>
+            </a:gsLst>
+            <a:lin ang="5400000" scaled="1"/>
+            <a:tileRect/>
+          </a:gradFill>
+          <a:ln>
+            <a:noFill/>
+          </a:ln>
+        </p:spPr>
+        <p:style>
+          <a:lnRef idx="2">
+            <a:schemeClr val="accent1">
+              <a:shade val="15000"/>
+            </a:schemeClr>
+          </a:lnRef>
+          <a:fillRef idx="1">
+            <a:schemeClr val="accent1"/>
+          </a:fillRef>
+          <a:effectRef idx="0">
+            <a:schemeClr val="accent1"/>
+          </a:effectRef>
+          <a:fontRef idx="minor">
+            <a:schemeClr val="lt1"/>
+          </a:fontRef>
+        </p:style>
+        <p:txBody>
+          <a:bodyPr rtlCol="0" anchor="ctr"/>
+          <a:lstStyle/>
+          <a:p>
+            <a:pPr algn="ctr"/>
+            <a:endParaRPr lang="en-GB">
+              <a:gradFill flip="none" rotWithShape="1">
+                <a:gsLst>
+                  <a:gs pos="0">
+                    <a:schemeClr val="accent4">
+                      <a:lumMod val="40000"/>
+                      <a:lumOff val="60000"/>
+                    </a:schemeClr>
+                  </a:gs>
+                  <a:gs pos="46000">
+                    <a:schemeClr val="accent4">
+                      <a:lumMod val="95000"/>
+                      <a:lumOff val="5000"/>
+                    </a:schemeClr>
+                  </a:gs>
+                  <a:gs pos="100000">
+                    <a:schemeClr val="accent4">
+                      <a:lumMod val="60000"/>
+                    </a:schemeClr>
+                  </a:gs>
+                </a:gsLst>
+                <a:path path="circle">
+                  <a:fillToRect l="50000" t="130000" r="50000" b="-30000"/>
+                </a:path>
+                <a:tileRect/>
+              </a:gradFill>
+            </a:endParaRPr>
+          </a:p>
+        </p:txBody>
+      </p:sp>
+      <p:sp>
+        <p:nvSpPr>
           <p:cNvPr id="2" name="Title 1">
             <a:extLst>
               <a:ext uri="{FF2B5EF4-FFF2-40B4-BE49-F238E27FC236}">
@@ -4229,7 +11287,11 @@
           <a:lstStyle/>
           <a:p>
             <a:r>
-              <a:rPr lang="en-GB" dirty="0"/>
+              <a:rPr lang="en-GB" dirty="0">
+                <a:solidFill>
+                  <a:schemeClr val="bg1"/>
+                </a:solidFill>
+              </a:rPr>
               <a:t>AI an ai</a:t>
             </a:r>
           </a:p>
@@ -4256,7 +11318,11 @@
           <a:bodyPr/>
           <a:lstStyle/>
           <a:p>
-            <a:endParaRPr lang="en-GB"/>
+            <a:endParaRPr lang="en-GB" dirty="0">
+              <a:solidFill>
+                <a:schemeClr val="bg1"/>
+              </a:solidFill>
+            </a:endParaRPr>
           </a:p>
         </p:txBody>
       </p:sp>
@@ -4298,6 +11364,111 @@
       </p:grpSpPr>
       <p:sp>
         <p:nvSpPr>
+          <p:cNvPr id="4" name="Rectangle 3">
+            <a:extLst>
+              <a:ext uri="{FF2B5EF4-FFF2-40B4-BE49-F238E27FC236}">
+                <a16:creationId xmlns:a16="http://schemas.microsoft.com/office/drawing/2014/main" id="{16C0A73F-56C9-D3AE-07E3-937D0965A1A6}"/>
+              </a:ext>
+            </a:extLst>
+          </p:cNvPr>
+          <p:cNvSpPr/>
+          <p:nvPr/>
+        </p:nvSpPr>
+        <p:spPr>
+          <a:xfrm>
+            <a:off x="0" y="0"/>
+            <a:ext cx="12192000" cy="6858000"/>
+          </a:xfrm>
+          <a:prstGeom prst="rect">
+            <a:avLst/>
+          </a:prstGeom>
+          <a:gradFill flip="none" rotWithShape="1">
+            <a:gsLst>
+              <a:gs pos="0">
+                <a:schemeClr val="tx1">
+                  <a:lumMod val="65000"/>
+                  <a:lumOff val="35000"/>
+                  <a:shade val="30000"/>
+                  <a:satMod val="115000"/>
+                </a:schemeClr>
+              </a:gs>
+              <a:gs pos="50000">
+                <a:schemeClr val="tx1">
+                  <a:lumMod val="65000"/>
+                  <a:lumOff val="35000"/>
+                  <a:shade val="67500"/>
+                  <a:satMod val="115000"/>
+                </a:schemeClr>
+              </a:gs>
+              <a:gs pos="100000">
+                <a:schemeClr val="tx1">
+                  <a:lumMod val="65000"/>
+                  <a:lumOff val="35000"/>
+                  <a:shade val="100000"/>
+                  <a:satMod val="115000"/>
+                </a:schemeClr>
+              </a:gs>
+            </a:gsLst>
+            <a:lin ang="5400000" scaled="1"/>
+            <a:tileRect/>
+          </a:gradFill>
+          <a:ln>
+            <a:noFill/>
+          </a:ln>
+        </p:spPr>
+        <p:style>
+          <a:lnRef idx="2">
+            <a:schemeClr val="accent1">
+              <a:shade val="15000"/>
+            </a:schemeClr>
+          </a:lnRef>
+          <a:fillRef idx="1">
+            <a:schemeClr val="accent1"/>
+          </a:fillRef>
+          <a:effectRef idx="0">
+            <a:schemeClr val="accent1"/>
+          </a:effectRef>
+          <a:fontRef idx="minor">
+            <a:schemeClr val="lt1"/>
+          </a:fontRef>
+        </p:style>
+        <p:txBody>
+          <a:bodyPr rtlCol="0" anchor="ctr"/>
+          <a:lstStyle/>
+          <a:p>
+            <a:pPr algn="ctr"/>
+            <a:endParaRPr lang="en-GB">
+              <a:gradFill flip="none" rotWithShape="1">
+                <a:gsLst>
+                  <a:gs pos="0">
+                    <a:schemeClr val="accent4">
+                      <a:lumMod val="40000"/>
+                      <a:lumOff val="60000"/>
+                    </a:schemeClr>
+                  </a:gs>
+                  <a:gs pos="46000">
+                    <a:schemeClr val="accent4">
+                      <a:lumMod val="95000"/>
+                      <a:lumOff val="5000"/>
+                    </a:schemeClr>
+                  </a:gs>
+                  <a:gs pos="100000">
+                    <a:schemeClr val="accent4">
+                      <a:lumMod val="60000"/>
+                    </a:schemeClr>
+                  </a:gs>
+                </a:gsLst>
+                <a:path path="circle">
+                  <a:fillToRect l="50000" t="130000" r="50000" b="-30000"/>
+                </a:path>
+                <a:tileRect/>
+              </a:gradFill>
+            </a:endParaRPr>
+          </a:p>
+        </p:txBody>
+      </p:sp>
+      <p:sp>
+        <p:nvSpPr>
           <p:cNvPr id="2" name="Title 1">
             <a:extLst>
               <a:ext uri="{FF2B5EF4-FFF2-40B4-BE49-F238E27FC236}">
@@ -4318,19 +11489,35 @@
           <a:lstStyle/>
           <a:p>
             <a:r>
-              <a:rPr lang="en-GB" dirty="0"/>
+              <a:rPr lang="en-GB" dirty="0">
+                <a:solidFill>
+                  <a:schemeClr val="bg1"/>
+                </a:solidFill>
+              </a:rPr>
               <a:t>Models </a:t>
             </a:r>
             <a:r>
-              <a:rPr lang="en-GB" sz="800" dirty="0"/>
+              <a:rPr lang="en-GB" sz="800" dirty="0">
+                <a:solidFill>
+                  <a:schemeClr val="bg1"/>
+                </a:solidFill>
+              </a:rPr>
               <a:t>(It is not my place to fight this </a:t>
             </a:r>
             <a:r>
-              <a:rPr lang="en-GB" sz="800" dirty="0" err="1"/>
+              <a:rPr lang="en-GB" sz="800" dirty="0" err="1">
+                <a:solidFill>
+                  <a:schemeClr val="bg1"/>
+                </a:solidFill>
+              </a:rPr>
               <a:t>squrge</a:t>
             </a:r>
             <a:r>
-              <a:rPr lang="en-GB" sz="800" dirty="0"/>
+              <a:rPr lang="en-GB" sz="800" dirty="0">
+                <a:solidFill>
+                  <a:schemeClr val="bg1"/>
+                </a:solidFill>
+              </a:rPr>
               <a:t> but I did so and I did it valiantly FOR PLACEHALLA!!!)</a:t>
             </a:r>
           </a:p>
@@ -4357,7 +11544,11 @@
           <a:bodyPr/>
           <a:lstStyle/>
           <a:p>
-            <a:endParaRPr lang="en-GB" dirty="0"/>
+            <a:endParaRPr lang="en-GB" dirty="0">
+              <a:solidFill>
+                <a:schemeClr val="bg1"/>
+              </a:solidFill>
+            </a:endParaRPr>
           </a:p>
         </p:txBody>
       </p:sp>
@@ -4687,4 +11878,319 @@
     </a:ext>
   </a:extLst>
 </a:theme>
+</file>
+
+<file path=ppt/theme/theme2.xml><?xml version="1.0" encoding="utf-8"?>
+<a:theme xmlns:a="http://schemas.openxmlformats.org/drawingml/2006/main" name="Office Theme">
+  <a:themeElements>
+    <a:clrScheme name="Office">
+      <a:dk1>
+        <a:sysClr val="windowText" lastClr="000000"/>
+      </a:dk1>
+      <a:lt1>
+        <a:sysClr val="window" lastClr="FFFFFF"/>
+      </a:lt1>
+      <a:dk2>
+        <a:srgbClr val="0E2841"/>
+      </a:dk2>
+      <a:lt2>
+        <a:srgbClr val="E8E8E8"/>
+      </a:lt2>
+      <a:accent1>
+        <a:srgbClr val="156082"/>
+      </a:accent1>
+      <a:accent2>
+        <a:srgbClr val="E97132"/>
+      </a:accent2>
+      <a:accent3>
+        <a:srgbClr val="196B24"/>
+      </a:accent3>
+      <a:accent4>
+        <a:srgbClr val="0F9ED5"/>
+      </a:accent4>
+      <a:accent5>
+        <a:srgbClr val="A02B93"/>
+      </a:accent5>
+      <a:accent6>
+        <a:srgbClr val="4EA72E"/>
+      </a:accent6>
+      <a:hlink>
+        <a:srgbClr val="467886"/>
+      </a:hlink>
+      <a:folHlink>
+        <a:srgbClr val="96607D"/>
+      </a:folHlink>
+    </a:clrScheme>
+    <a:fontScheme name="Office">
+      <a:majorFont>
+        <a:latin typeface="Aptos Display" panose="02110004020202020204"/>
+        <a:ea typeface=""/>
+        <a:cs typeface=""/>
+        <a:font script="Jpan" typeface="游ゴシック Light"/>
+        <a:font script="Hang" typeface="맑은 고딕"/>
+        <a:font script="Hans" typeface="等线 Light"/>
+        <a:font script="Hant" typeface="新細明體"/>
+        <a:font script="Arab" typeface="Times New Roman"/>
+        <a:font script="Hebr" typeface="Times New Roman"/>
+        <a:font script="Thai" typeface="Angsana New"/>
+        <a:font script="Ethi" typeface="Nyala"/>
+        <a:font script="Beng" typeface="Vrinda"/>
+        <a:font script="Gujr" typeface="Shruti"/>
+        <a:font script="Khmr" typeface="MoolBoran"/>
+        <a:font script="Knda" typeface="Tunga"/>
+        <a:font script="Guru" typeface="Raavi"/>
+        <a:font script="Cans" typeface="Euphemia"/>
+        <a:font script="Cher" typeface="Plantagenet Cherokee"/>
+        <a:font script="Yiii" typeface="Microsoft Yi Baiti"/>
+        <a:font script="Tibt" typeface="Microsoft Himalaya"/>
+        <a:font script="Thaa" typeface="MV Boli"/>
+        <a:font script="Deva" typeface="Mangal"/>
+        <a:font script="Telu" typeface="Gautami"/>
+        <a:font script="Taml" typeface="Latha"/>
+        <a:font script="Syrc" typeface="Estrangelo Edessa"/>
+        <a:font script="Orya" typeface="Kalinga"/>
+        <a:font script="Mlym" typeface="Kartika"/>
+        <a:font script="Laoo" typeface="DokChampa"/>
+        <a:font script="Sinh" typeface="Iskoola Pota"/>
+        <a:font script="Mong" typeface="Mongolian Baiti"/>
+        <a:font script="Viet" typeface="Times New Roman"/>
+        <a:font script="Uigh" typeface="Microsoft Uighur"/>
+        <a:font script="Geor" typeface="Sylfaen"/>
+        <a:font script="Armn" typeface="Arial"/>
+        <a:font script="Bugi" typeface="Leelawadee UI"/>
+        <a:font script="Bopo" typeface="Microsoft JhengHei"/>
+        <a:font script="Java" typeface="Javanese Text"/>
+        <a:font script="Lisu" typeface="Segoe UI"/>
+        <a:font script="Mymr" typeface="Myanmar Text"/>
+        <a:font script="Nkoo" typeface="Ebrima"/>
+        <a:font script="Olck" typeface="Nirmala UI"/>
+        <a:font script="Osma" typeface="Ebrima"/>
+        <a:font script="Phag" typeface="Phagspa"/>
+        <a:font script="Syrn" typeface="Estrangelo Edessa"/>
+        <a:font script="Syrj" typeface="Estrangelo Edessa"/>
+        <a:font script="Syre" typeface="Estrangelo Edessa"/>
+        <a:font script="Sora" typeface="Nirmala UI"/>
+        <a:font script="Tale" typeface="Microsoft Tai Le"/>
+        <a:font script="Talu" typeface="Microsoft New Tai Lue"/>
+        <a:font script="Tfng" typeface="Ebrima"/>
+      </a:majorFont>
+      <a:minorFont>
+        <a:latin typeface="Aptos" panose="02110004020202020204"/>
+        <a:ea typeface=""/>
+        <a:cs typeface=""/>
+        <a:font script="Jpan" typeface="游ゴシック"/>
+        <a:font script="Hang" typeface="맑은 고딕"/>
+        <a:font script="Hans" typeface="等线"/>
+        <a:font script="Hant" typeface="新細明體"/>
+        <a:font script="Arab" typeface="Arial"/>
+        <a:font script="Hebr" typeface="Arial"/>
+        <a:font script="Thai" typeface="Cordia New"/>
+        <a:font script="Ethi" typeface="Nyala"/>
+        <a:font script="Beng" typeface="Vrinda"/>
+        <a:font script="Gujr" typeface="Shruti"/>
+        <a:font script="Khmr" typeface="DaunPenh"/>
+        <a:font script="Knda" typeface="Tunga"/>
+        <a:font script="Guru" typeface="Raavi"/>
+        <a:font script="Cans" typeface="Euphemia"/>
+        <a:font script="Cher" typeface="Plantagenet Cherokee"/>
+        <a:font script="Yiii" typeface="Microsoft Yi Baiti"/>
+        <a:font script="Tibt" typeface="Microsoft Himalaya"/>
+        <a:font script="Thaa" typeface="MV Boli"/>
+        <a:font script="Deva" typeface="Mangal"/>
+        <a:font script="Telu" typeface="Gautami"/>
+        <a:font script="Taml" typeface="Latha"/>
+        <a:font script="Syrc" typeface="Estrangelo Edessa"/>
+        <a:font script="Orya" typeface="Kalinga"/>
+        <a:font script="Mlym" typeface="Kartika"/>
+        <a:font script="Laoo" typeface="DokChampa"/>
+        <a:font script="Sinh" typeface="Iskoola Pota"/>
+        <a:font script="Mong" typeface="Mongolian Baiti"/>
+        <a:font script="Viet" typeface="Arial"/>
+        <a:font script="Uigh" typeface="Microsoft Uighur"/>
+        <a:font script="Geor" typeface="Sylfaen"/>
+        <a:font script="Armn" typeface="Arial"/>
+        <a:font script="Bugi" typeface="Leelawadee UI"/>
+        <a:font script="Bopo" typeface="Microsoft JhengHei"/>
+        <a:font script="Java" typeface="Javanese Text"/>
+        <a:font script="Lisu" typeface="Segoe UI"/>
+        <a:font script="Mymr" typeface="Myanmar Text"/>
+        <a:font script="Nkoo" typeface="Ebrima"/>
+        <a:font script="Olck" typeface="Nirmala UI"/>
+        <a:font script="Osma" typeface="Ebrima"/>
+        <a:font script="Phag" typeface="Phagspa"/>
+        <a:font script="Syrn" typeface="Estrangelo Edessa"/>
+        <a:font script="Syrj" typeface="Estrangelo Edessa"/>
+        <a:font script="Syre" typeface="Estrangelo Edessa"/>
+        <a:font script="Sora" typeface="Nirmala UI"/>
+        <a:font script="Tale" typeface="Microsoft Tai Le"/>
+        <a:font script="Talu" typeface="Microsoft New Tai Lue"/>
+        <a:font script="Tfng" typeface="Ebrima"/>
+      </a:minorFont>
+    </a:fontScheme>
+    <a:fmtScheme name="Office">
+      <a:fillStyleLst>
+        <a:solidFill>
+          <a:schemeClr val="phClr"/>
+        </a:solidFill>
+        <a:gradFill rotWithShape="1">
+          <a:gsLst>
+            <a:gs pos="0">
+              <a:schemeClr val="phClr">
+                <a:lumMod val="110000"/>
+                <a:satMod val="105000"/>
+                <a:tint val="67000"/>
+              </a:schemeClr>
+            </a:gs>
+            <a:gs pos="50000">
+              <a:schemeClr val="phClr">
+                <a:lumMod val="105000"/>
+                <a:satMod val="103000"/>
+                <a:tint val="73000"/>
+              </a:schemeClr>
+            </a:gs>
+            <a:gs pos="100000">
+              <a:schemeClr val="phClr">
+                <a:lumMod val="105000"/>
+                <a:satMod val="109000"/>
+                <a:tint val="81000"/>
+              </a:schemeClr>
+            </a:gs>
+          </a:gsLst>
+          <a:lin ang="5400000" scaled="0"/>
+        </a:gradFill>
+        <a:gradFill rotWithShape="1">
+          <a:gsLst>
+            <a:gs pos="0">
+              <a:schemeClr val="phClr">
+                <a:satMod val="103000"/>
+                <a:lumMod val="102000"/>
+                <a:tint val="94000"/>
+              </a:schemeClr>
+            </a:gs>
+            <a:gs pos="50000">
+              <a:schemeClr val="phClr">
+                <a:satMod val="110000"/>
+                <a:lumMod val="100000"/>
+                <a:shade val="100000"/>
+              </a:schemeClr>
+            </a:gs>
+            <a:gs pos="100000">
+              <a:schemeClr val="phClr">
+                <a:lumMod val="99000"/>
+                <a:satMod val="120000"/>
+                <a:shade val="78000"/>
+              </a:schemeClr>
+            </a:gs>
+          </a:gsLst>
+          <a:lin ang="5400000" scaled="0"/>
+        </a:gradFill>
+      </a:fillStyleLst>
+      <a:lnStyleLst>
+        <a:ln w="12700" cap="flat" cmpd="sng" algn="ctr">
+          <a:solidFill>
+            <a:schemeClr val="phClr"/>
+          </a:solidFill>
+          <a:prstDash val="solid"/>
+          <a:miter lim="800000"/>
+        </a:ln>
+        <a:ln w="19050" cap="flat" cmpd="sng" algn="ctr">
+          <a:solidFill>
+            <a:schemeClr val="phClr"/>
+          </a:solidFill>
+          <a:prstDash val="solid"/>
+          <a:miter lim="800000"/>
+        </a:ln>
+        <a:ln w="25400" cap="flat" cmpd="sng" algn="ctr">
+          <a:solidFill>
+            <a:schemeClr val="phClr"/>
+          </a:solidFill>
+          <a:prstDash val="solid"/>
+          <a:miter lim="800000"/>
+        </a:ln>
+      </a:lnStyleLst>
+      <a:effectStyleLst>
+        <a:effectStyle>
+          <a:effectLst/>
+        </a:effectStyle>
+        <a:effectStyle>
+          <a:effectLst/>
+        </a:effectStyle>
+        <a:effectStyle>
+          <a:effectLst>
+            <a:outerShdw blurRad="57150" dist="19050" dir="5400000" algn="ctr" rotWithShape="0">
+              <a:srgbClr val="000000">
+                <a:alpha val="63000"/>
+              </a:srgbClr>
+            </a:outerShdw>
+          </a:effectLst>
+        </a:effectStyle>
+      </a:effectStyleLst>
+      <a:bgFillStyleLst>
+        <a:solidFill>
+          <a:schemeClr val="phClr"/>
+        </a:solidFill>
+        <a:solidFill>
+          <a:schemeClr val="phClr">
+            <a:tint val="95000"/>
+            <a:satMod val="170000"/>
+          </a:schemeClr>
+        </a:solidFill>
+        <a:gradFill rotWithShape="1">
+          <a:gsLst>
+            <a:gs pos="0">
+              <a:schemeClr val="phClr">
+                <a:tint val="93000"/>
+                <a:satMod val="150000"/>
+                <a:shade val="98000"/>
+                <a:lumMod val="102000"/>
+              </a:schemeClr>
+            </a:gs>
+            <a:gs pos="50000">
+              <a:schemeClr val="phClr">
+                <a:tint val="98000"/>
+                <a:satMod val="130000"/>
+                <a:shade val="90000"/>
+                <a:lumMod val="103000"/>
+              </a:schemeClr>
+            </a:gs>
+            <a:gs pos="100000">
+              <a:schemeClr val="phClr">
+                <a:shade val="63000"/>
+                <a:satMod val="120000"/>
+              </a:schemeClr>
+            </a:gs>
+          </a:gsLst>
+          <a:lin ang="5400000" scaled="0"/>
+        </a:gradFill>
+      </a:bgFillStyleLst>
+    </a:fmtScheme>
+  </a:themeElements>
+  <a:objectDefaults>
+    <a:lnDef>
+      <a:spPr/>
+      <a:bodyPr/>
+      <a:lstStyle/>
+      <a:style>
+        <a:lnRef idx="2">
+          <a:schemeClr val="accent1"/>
+        </a:lnRef>
+        <a:fillRef idx="0">
+          <a:schemeClr val="accent1"/>
+        </a:fillRef>
+        <a:effectRef idx="1">
+          <a:schemeClr val="accent1"/>
+        </a:effectRef>
+        <a:fontRef idx="minor">
+          <a:schemeClr val="tx1"/>
+        </a:fontRef>
+      </a:style>
+    </a:lnDef>
+  </a:objectDefaults>
+  <a:extraClrSchemeLst/>
+  <a:extLst>
+    <a:ext uri="{05A4C25C-085E-4340-85A3-A5531E510DB2}">
+      <thm15:themeFamily xmlns:thm15="http://schemas.microsoft.com/office/thememl/2012/main" name="Office Theme" id="{2E142A2C-CD16-42D6-873A-C26D2A0506FA}" vid="{1BDDFF52-6CD6-40A5-AB3C-68EB2F1E4D0A}"/>
+    </a:ext>
+  </a:extLst>
+</a:theme>
 </file>
--- a/e017770n_placeholder_presatation.pptx
+++ b/e017770n_placeholder_presatation.pptx
@@ -206,7 +206,7 @@
           <a:p>
             <a:fld id="{223844D3-2483-4259-8C26-02475C71C866}" type="datetimeFigureOut">
               <a:rPr lang="en-GB" smtClean="0"/>
-              <a:t>23/04/2026</a:t>
+              <a:t>27/04/2026</a:t>
             </a:fld>
             <a:endParaRPr lang="en-GB"/>
           </a:p>
@@ -704,7 +704,7 @@
           <a:p>
             <a:fld id="{2D637147-2A1D-43A1-A9A6-15F2FF4A0DCF}" type="datetimeFigureOut">
               <a:rPr lang="en-GB" smtClean="0"/>
-              <a:t>23/04/2026</a:t>
+              <a:t>27/04/2026</a:t>
             </a:fld>
             <a:endParaRPr lang="en-GB"/>
           </a:p>
@@ -902,7 +902,7 @@
           <a:p>
             <a:fld id="{2D637147-2A1D-43A1-A9A6-15F2FF4A0DCF}" type="datetimeFigureOut">
               <a:rPr lang="en-GB" smtClean="0"/>
-              <a:t>23/04/2026</a:t>
+              <a:t>27/04/2026</a:t>
             </a:fld>
             <a:endParaRPr lang="en-GB"/>
           </a:p>
@@ -1110,7 +1110,7 @@
           <a:p>
             <a:fld id="{2D637147-2A1D-43A1-A9A6-15F2FF4A0DCF}" type="datetimeFigureOut">
               <a:rPr lang="en-GB" smtClean="0"/>
-              <a:t>23/04/2026</a:t>
+              <a:t>27/04/2026</a:t>
             </a:fld>
             <a:endParaRPr lang="en-GB"/>
           </a:p>
@@ -1308,7 +1308,7 @@
           <a:p>
             <a:fld id="{2D637147-2A1D-43A1-A9A6-15F2FF4A0DCF}" type="datetimeFigureOut">
               <a:rPr lang="en-GB" smtClean="0"/>
-              <a:t>23/04/2026</a:t>
+              <a:t>27/04/2026</a:t>
             </a:fld>
             <a:endParaRPr lang="en-GB"/>
           </a:p>
@@ -1583,7 +1583,7 @@
           <a:p>
             <a:fld id="{2D637147-2A1D-43A1-A9A6-15F2FF4A0DCF}" type="datetimeFigureOut">
               <a:rPr lang="en-GB" smtClean="0"/>
-              <a:t>23/04/2026</a:t>
+              <a:t>27/04/2026</a:t>
             </a:fld>
             <a:endParaRPr lang="en-GB"/>
           </a:p>
@@ -1848,7 +1848,7 @@
           <a:p>
             <a:fld id="{2D637147-2A1D-43A1-A9A6-15F2FF4A0DCF}" type="datetimeFigureOut">
               <a:rPr lang="en-GB" smtClean="0"/>
-              <a:t>23/04/2026</a:t>
+              <a:t>27/04/2026</a:t>
             </a:fld>
             <a:endParaRPr lang="en-GB"/>
           </a:p>
@@ -2260,7 +2260,7 @@
           <a:p>
             <a:fld id="{2D637147-2A1D-43A1-A9A6-15F2FF4A0DCF}" type="datetimeFigureOut">
               <a:rPr lang="en-GB" smtClean="0"/>
-              <a:t>23/04/2026</a:t>
+              <a:t>27/04/2026</a:t>
             </a:fld>
             <a:endParaRPr lang="en-GB"/>
           </a:p>
@@ -2401,7 +2401,7 @@
           <a:p>
             <a:fld id="{2D637147-2A1D-43A1-A9A6-15F2FF4A0DCF}" type="datetimeFigureOut">
               <a:rPr lang="en-GB" smtClean="0"/>
-              <a:t>23/04/2026</a:t>
+              <a:t>27/04/2026</a:t>
             </a:fld>
             <a:endParaRPr lang="en-GB"/>
           </a:p>
@@ -2514,7 +2514,7 @@
           <a:p>
             <a:fld id="{2D637147-2A1D-43A1-A9A6-15F2FF4A0DCF}" type="datetimeFigureOut">
               <a:rPr lang="en-GB" smtClean="0"/>
-              <a:t>23/04/2026</a:t>
+              <a:t>27/04/2026</a:t>
             </a:fld>
             <a:endParaRPr lang="en-GB"/>
           </a:p>
@@ -2825,7 +2825,7 @@
           <a:p>
             <a:fld id="{2D637147-2A1D-43A1-A9A6-15F2FF4A0DCF}" type="datetimeFigureOut">
               <a:rPr lang="en-GB" smtClean="0"/>
-              <a:t>23/04/2026</a:t>
+              <a:t>27/04/2026</a:t>
             </a:fld>
             <a:endParaRPr lang="en-GB"/>
           </a:p>
@@ -3113,7 +3113,7 @@
           <a:p>
             <a:fld id="{2D637147-2A1D-43A1-A9A6-15F2FF4A0DCF}" type="datetimeFigureOut">
               <a:rPr lang="en-GB" smtClean="0"/>
-              <a:t>23/04/2026</a:t>
+              <a:t>27/04/2026</a:t>
             </a:fld>
             <a:endParaRPr lang="en-GB"/>
           </a:p>
@@ -3354,7 +3354,7 @@
           <a:p>
             <a:fld id="{2D637147-2A1D-43A1-A9A6-15F2FF4A0DCF}" type="datetimeFigureOut">
               <a:rPr lang="en-GB" smtClean="0"/>
-              <a:t>23/04/2026</a:t>
+              <a:t>27/04/2026</a:t>
             </a:fld>
             <a:endParaRPr lang="en-GB"/>
           </a:p>
@@ -11502,23 +11502,7 @@
                   <a:schemeClr val="bg1"/>
                 </a:solidFill>
               </a:rPr>
-              <a:t>(It is not my place to fight this </a:t>
-            </a:r>
-            <a:r>
-              <a:rPr lang="en-GB" sz="800" dirty="0" err="1">
-                <a:solidFill>
-                  <a:schemeClr val="bg1"/>
-                </a:solidFill>
-              </a:rPr>
-              <a:t>squrge</a:t>
-            </a:r>
-            <a:r>
-              <a:rPr lang="en-GB" sz="800" dirty="0">
-                <a:solidFill>
-                  <a:schemeClr val="bg1"/>
-                </a:solidFill>
-              </a:rPr>
-              <a:t> but I did so and I did it valiantly FOR PLACEHALLA!!!)</a:t>
+              <a:t>(It is not my place to fight this scourge but I did so and I did it valiantly FOR PLACEHALLA!!!)</a:t>
             </a:r>
           </a:p>
         </p:txBody>
